--- a/presentation/thesis_presentation_1.pptx
+++ b/presentation/thesis_presentation_1.pptx
@@ -6233,8 +6233,8 @@
         </p:nvSpPr>
         <p:spPr>
           <a:xfrm>
-            <a:off x="457200" y="1005840"/>
-            <a:ext cx="11247120" cy="457200"/>
+            <a:off x="457200" y="1051560"/>
+            <a:ext cx="7772400" cy="822960"/>
           </a:xfrm>
           <a:prstGeom prst="rect">
             <a:avLst/>
@@ -6249,12 +6249,13 @@
           <a:p>
             <a:pPr algn="l"/>
             <a:r>
-              <a:rPr sz="1500" b="0" i="1">
-                <a:solidFill>
-                  <a:srgbClr val="F26522"/>
+              <a:rPr sz="1500" b="0" i="0">
+                <a:solidFill>
+                  <a:srgbClr val="1A1A1A"/>
                 </a:solidFill>
               </a:rPr>
-              <a:t>Föreställ dig att du som konsult behöver snabbt hitta ett svar...</a:t>
+              <a:t>Föreställ dig att du sitter på ett företag med hundratals kollegor,
+många projekt och tusentals dokumentationssidor med information om riktlinjer och rutiner.</a:t>
             </a:r>
           </a:p>
         </p:txBody>
@@ -6267,8 +6268,8 @@
         </p:nvSpPr>
         <p:spPr>
           <a:xfrm>
-            <a:off x="640080" y="1600200"/>
-            <a:ext cx="6400800" cy="4572000"/>
+            <a:off x="457200" y="2011680"/>
+            <a:ext cx="7772400" cy="594360"/>
           </a:xfrm>
           <a:prstGeom prst="rect">
             <a:avLst/>
@@ -6281,78 +6282,14 @@
           </a:bodyPr>
           <a:lstStyle/>
           <a:p>
-            <a:pPr>
-              <a:spcBef>
-                <a:spcPts val="400"/>
-              </a:spcBef>
-            </a:pPr>
-            <a:r>
-              <a:rPr sz="1400">
+            <a:pPr algn="l"/>
+            <a:r>
+              <a:rPr sz="1500" b="0" i="0">
                 <a:solidFill>
                   <a:srgbClr val="1A1A1A"/>
                 </a:solidFill>
               </a:rPr>
-              <a:t>Vem skrev det här Confluence-dokumentet?</a:t>
-            </a:r>
-          </a:p>
-          <a:p>
-            <a:pPr>
-              <a:spcBef>
-                <a:spcPts val="400"/>
-              </a:spcBef>
-            </a:pPr>
-            <a:r>
-              <a:rPr sz="1400">
-                <a:solidFill>
-                  <a:srgbClr val="1A1A1A"/>
-                </a:solidFill>
-              </a:rPr>
-              <a:t/>
-            </a:r>
-          </a:p>
-          <a:p>
-            <a:pPr>
-              <a:spcBef>
-                <a:spcPts val="400"/>
-              </a:spcBef>
-            </a:pPr>
-            <a:r>
-              <a:rPr sz="1400">
-                <a:solidFill>
-                  <a:srgbClr val="1A1A1A"/>
-                </a:solidFill>
-              </a:rPr>
-              <a:t>Var i Slack diskuterades det här beslutet?</a:t>
-            </a:r>
-          </a:p>
-          <a:p>
-            <a:pPr>
-              <a:spcBef>
-                <a:spcPts val="400"/>
-              </a:spcBef>
-            </a:pPr>
-            <a:r>
-              <a:rPr sz="1400">
-                <a:solidFill>
-                  <a:srgbClr val="1A1A1A"/>
-                </a:solidFill>
-              </a:rPr>
-              <a:t/>
-            </a:r>
-          </a:p>
-          <a:p>
-            <a:pPr>
-              <a:spcBef>
-                <a:spcPts val="400"/>
-              </a:spcBef>
-            </a:pPr>
-            <a:r>
-              <a:rPr sz="1400">
-                <a:solidFill>
-                  <a:srgbClr val="1A1A1A"/>
-                </a:solidFill>
-              </a:rPr>
-              <a:t>Vem i GitHub skrev koden för den här funktionen?</a:t>
+              <a:t>Allt är spritt över många olika interna system och du behöver snabbt hitta svaret på en specifik fråga.</a:t>
             </a:r>
           </a:p>
         </p:txBody>
@@ -6365,8 +6302,8 @@
         </p:nvSpPr>
         <p:spPr>
           <a:xfrm>
-            <a:off x="640080" y="3840480"/>
-            <a:ext cx="6400800" cy="731520"/>
+            <a:off x="457200" y="2788920"/>
+            <a:ext cx="7772400" cy="1005840"/>
           </a:xfrm>
           <a:prstGeom prst="rect">
             <a:avLst/>
@@ -6381,13 +6318,14 @@
           <a:p>
             <a:pPr algn="l"/>
             <a:r>
-              <a:rPr sz="1400" b="0" i="1">
+              <a:rPr sz="1500" b="0" i="0">
                 <a:solidFill>
                   <a:srgbClr val="555555"/>
                 </a:solidFill>
               </a:rPr>
-              <a:t>Svaret finns — men kräver sökning i flera
-system och manuella kopplingar.</a:t>
+              <a:t>Det du gör är att du börjar söka, frågar kollegor och söker lite ytterligare
+tills du hittar svaret. Det kan ta väldigt lång tid som egentligen borde
+läggas på det riktiga arbetet.</a:t>
             </a:r>
           </a:p>
         </p:txBody>
@@ -6400,8 +6338,8 @@
         </p:nvSpPr>
         <p:spPr>
           <a:xfrm>
-            <a:off x="457200" y="4754880"/>
-            <a:ext cx="6675120" cy="1783080"/>
+            <a:off x="457200" y="4069080"/>
+            <a:ext cx="7772400" cy="1188720"/>
           </a:xfrm>
           <a:prstGeom prst="rect">
             <a:avLst/>
@@ -6445,8 +6383,8 @@
         </p:nvSpPr>
         <p:spPr>
           <a:xfrm>
-            <a:off x="594360" y="4937760"/>
-            <a:ext cx="6400800" cy="1417320"/>
+            <a:off x="594360" y="4206240"/>
+            <a:ext cx="7498079" cy="914400"/>
           </a:xfrm>
           <a:prstGeom prst="rect">
             <a:avLst/>
@@ -6461,13 +6399,13 @@
           <a:p>
             <a:pPr algn="l"/>
             <a:r>
-              <a:rPr sz="1400" b="1" i="0">
+              <a:rPr sz="1500" b="1" i="0">
                 <a:solidFill>
                   <a:srgbClr val="1A1A1A"/>
                 </a:solidFill>
               </a:rPr>
-              <a:t>Det här är vardagen hos många organisationer idag.
-Det är exakt det problemet mitt arbete syftar till att lösa.</a:t>
+              <a:t>Det här är vardagen hos många organisationer idag —
+och det är precis det problemet mitt arbete syftar till att lösa.</a:t>
             </a:r>
           </a:p>
         </p:txBody>
@@ -6480,8 +6418,8 @@
         </p:nvSpPr>
         <p:spPr>
           <a:xfrm>
-            <a:off x="7498079" y="1005840"/>
-            <a:ext cx="4389120" cy="5577840"/>
+            <a:off x="8412480" y="1051560"/>
+            <a:ext cx="3474720" cy="5120640"/>
           </a:xfrm>
           <a:prstGeom prst="rect">
             <a:avLst/>
@@ -6525,8 +6463,8 @@
         </p:nvSpPr>
         <p:spPr>
           <a:xfrm>
-            <a:off x="7498079" y="3566160"/>
-            <a:ext cx="4389120" cy="457200"/>
+            <a:off x="8412480" y="3383279"/>
+            <a:ext cx="3474720" cy="457200"/>
           </a:xfrm>
           <a:prstGeom prst="rect">
             <a:avLst/>
@@ -6546,8 +6484,7 @@
                   <a:srgbClr val="555555"/>
                 </a:solidFill>
               </a:rPr>
-              <a:t>[ BILD: Information
-spridd i olika system ]</a:t>
+              <a:t>[ BILD ]</a:t>
             </a:r>
           </a:p>
         </p:txBody>

--- a/presentation/thesis_presentation_1.pptx
+++ b/presentation/thesis_presentation_1.pptx
@@ -77,6 +77,7 @@
                 </a:pPr>
               </a:p>
             </c:txPr>
+            <c:dLblPos val="outEnd"/>
             <c:showLegendKey val="0"/>
             <c:showVal val="0"/>
             <c:showCatName val="0"/>
@@ -174,6 +175,7 @@
                 </a:pPr>
               </a:p>
             </c:txPr>
+            <c:dLblPos val="outEnd"/>
             <c:showLegendKey val="0"/>
             <c:showVal val="0"/>
             <c:showCatName val="0"/>
@@ -234,17 +236,17 @@
         </c:ser>
         <c:gapWidth val="150"/>
         <c:overlap val="0"/>
-        <c:axId val="55953740"/>
-        <c:axId val="15265418"/>
+        <c:axId val="26473826"/>
+        <c:axId val="12309367"/>
       </c:barChart>
       <c:catAx>
-        <c:axId val="55953740"/>
+        <c:axId val="26473826"/>
         <c:scaling>
           <c:orientation val="minMax"/>
         </c:scaling>
         <c:delete val="0"/>
         <c:axPos val="b"/>
-        <c:numFmt formatCode="[$-41D]yyyy/mm/dd" sourceLinked="1"/>
+        <c:numFmt formatCode="[$-41D]yyyy/mm/dd" sourceLinked="0"/>
         <c:majorTickMark val="out"/>
         <c:minorTickMark val="none"/>
         <c:tickLblPos val="nextTo"/>
@@ -271,7 +273,7 @@
             </a:pPr>
           </a:p>
         </c:txPr>
-        <c:crossAx val="15265418"/>
+        <c:crossAx val="12309367"/>
         <c:crosses val="autoZero"/>
         <c:auto val="1"/>
         <c:lblAlgn val="ctr"/>
@@ -279,7 +281,7 @@
         <c:noMultiLvlLbl val="0"/>
       </c:catAx>
       <c:valAx>
-        <c:axId val="15265418"/>
+        <c:axId val="12309367"/>
         <c:scaling>
           <c:orientation val="minMax"/>
           <c:max val="100"/>
@@ -297,7 +299,7 @@
             </a:ln>
           </c:spPr>
         </c:majorGridlines>
-        <c:numFmt formatCode="General" sourceLinked="1"/>
+        <c:numFmt formatCode="General" sourceLinked="0"/>
         <c:majorTickMark val="out"/>
         <c:minorTickMark val="none"/>
         <c:tickLblPos val="nextTo"/>
@@ -324,7 +326,7 @@
             </a:pPr>
           </a:p>
         </c:txPr>
-        <c:crossAx val="55953740"/>
+        <c:crossAx val="26473826"/>
         <c:crosses val="autoZero"/>
         <c:crossBetween val="between"/>
       </c:valAx>
@@ -431,6 +433,7 @@
                 </a:pPr>
               </a:p>
             </c:txPr>
+            <c:dLblPos val="outEnd"/>
             <c:showLegendKey val="0"/>
             <c:showVal val="0"/>
             <c:showCatName val="0"/>
@@ -528,6 +531,7 @@
                 </a:pPr>
               </a:p>
             </c:txPr>
+            <c:dLblPos val="outEnd"/>
             <c:showLegendKey val="0"/>
             <c:showVal val="0"/>
             <c:showCatName val="0"/>
@@ -588,17 +592,17 @@
         </c:ser>
         <c:gapWidth val="150"/>
         <c:overlap val="0"/>
-        <c:axId val="86384541"/>
-        <c:axId val="57753131"/>
+        <c:axId val="18476485"/>
+        <c:axId val="9480704"/>
       </c:barChart>
       <c:catAx>
-        <c:axId val="86384541"/>
+        <c:axId val="18476485"/>
         <c:scaling>
           <c:orientation val="minMax"/>
         </c:scaling>
         <c:delete val="0"/>
         <c:axPos val="b"/>
-        <c:numFmt formatCode="[$-41D]yyyy/mm/dd" sourceLinked="1"/>
+        <c:numFmt formatCode="[$-41D]yyyy/mm/dd" sourceLinked="0"/>
         <c:majorTickMark val="out"/>
         <c:minorTickMark val="none"/>
         <c:tickLblPos val="nextTo"/>
@@ -625,7 +629,7 @@
             </a:pPr>
           </a:p>
         </c:txPr>
-        <c:crossAx val="57753131"/>
+        <c:crossAx val="9480704"/>
         <c:crosses val="autoZero"/>
         <c:auto val="1"/>
         <c:lblAlgn val="ctr"/>
@@ -633,7 +637,7 @@
         <c:noMultiLvlLbl val="0"/>
       </c:catAx>
       <c:valAx>
-        <c:axId val="57753131"/>
+        <c:axId val="9480704"/>
         <c:scaling>
           <c:orientation val="minMax"/>
           <c:max val="8"/>
@@ -650,7 +654,7 @@
             </a:ln>
           </c:spPr>
         </c:majorGridlines>
-        <c:numFmt formatCode="General" sourceLinked="1"/>
+        <c:numFmt formatCode="General" sourceLinked="0"/>
         <c:majorTickMark val="out"/>
         <c:minorTickMark val="none"/>
         <c:tickLblPos val="nextTo"/>
@@ -677,7 +681,7 @@
             </a:pPr>
           </a:p>
         </c:txPr>
-        <c:crossAx val="86384541"/>
+        <c:crossAx val="18476485"/>
         <c:crosses val="autoZero"/>
         <c:crossBetween val="between"/>
       </c:valAx>
@@ -784,6 +788,7 @@
                 </a:pPr>
               </a:p>
             </c:txPr>
+            <c:dLblPos val="outEnd"/>
             <c:showLegendKey val="0"/>
             <c:showVal val="0"/>
             <c:showCatName val="0"/>
@@ -881,6 +886,7 @@
                 </a:pPr>
               </a:p>
             </c:txPr>
+            <c:dLblPos val="outEnd"/>
             <c:showLegendKey val="0"/>
             <c:showVal val="0"/>
             <c:showCatName val="0"/>
@@ -941,17 +947,17 @@
         </c:ser>
         <c:gapWidth val="150"/>
         <c:overlap val="0"/>
-        <c:axId val="46552438"/>
-        <c:axId val="8768965"/>
+        <c:axId val="39146179"/>
+        <c:axId val="8580168"/>
       </c:barChart>
       <c:catAx>
-        <c:axId val="46552438"/>
+        <c:axId val="39146179"/>
         <c:scaling>
           <c:orientation val="minMax"/>
         </c:scaling>
         <c:delete val="0"/>
         <c:axPos val="b"/>
-        <c:numFmt formatCode="[$-41D]yyyy/mm/dd" sourceLinked="1"/>
+        <c:numFmt formatCode="[$-41D]yyyy/mm/dd" sourceLinked="0"/>
         <c:majorTickMark val="out"/>
         <c:minorTickMark val="none"/>
         <c:tickLblPos val="nextTo"/>
@@ -978,7 +984,7 @@
             </a:pPr>
           </a:p>
         </c:txPr>
-        <c:crossAx val="8768965"/>
+        <c:crossAx val="8580168"/>
         <c:crosses val="autoZero"/>
         <c:auto val="1"/>
         <c:lblAlgn val="ctr"/>
@@ -986,7 +992,7 @@
         <c:noMultiLvlLbl val="0"/>
       </c:catAx>
       <c:valAx>
-        <c:axId val="8768965"/>
+        <c:axId val="8580168"/>
         <c:scaling>
           <c:orientation val="minMax"/>
           <c:max val="20000"/>
@@ -1003,7 +1009,7 @@
             </a:ln>
           </c:spPr>
         </c:majorGridlines>
-        <c:numFmt formatCode="General" sourceLinked="1"/>
+        <c:numFmt formatCode="General" sourceLinked="0"/>
         <c:majorTickMark val="out"/>
         <c:minorTickMark val="none"/>
         <c:tickLblPos val="nextTo"/>
@@ -1030,7 +1036,7 @@
             </a:pPr>
           </a:p>
         </c:txPr>
-        <c:crossAx val="46552438"/>
+        <c:crossAx val="39146179"/>
         <c:crosses val="autoZero"/>
         <c:crossBetween val="between"/>
       </c:valAx>
@@ -1087,6 +1093,1867 @@
 </file>
 
 <file path=ppt/slideLayouts/slideLayout1.xml><?xml version="1.0" encoding="utf-8"?>
+<p:sldLayout xmlns:a="http://schemas.openxmlformats.org/drawingml/2006/main" xmlns:p="http://schemas.openxmlformats.org/presentationml/2006/main" xmlns:r="http://schemas.openxmlformats.org/officeDocument/2006/relationships" xmlns:p14="http://schemas.microsoft.com/office/powerpoint/2010/main" xmlns:p15="http://schemas.microsoft.com/office/powerpoint/2012/main" xmlns:mc="http://schemas.openxmlformats.org/markup-compatibility/2006" type="blank" preserve="1">
+  <p:cSld name="Picture with Caption">
+    <p:bg>
+      <p:bgPr>
+        <a:solidFill>
+          <a:srgbClr val="ffffff"/>
+        </a:solidFill>
+      </p:bgPr>
+    </p:bg>
+    <p:spTree>
+      <p:nvGrpSpPr>
+        <p:cNvPr id="1" name=""/>
+        <p:cNvGrpSpPr/>
+        <p:nvPr/>
+      </p:nvGrpSpPr>
+      <p:grpSpPr>
+        <a:xfrm>
+          <a:off x="0" y="0"/>
+          <a:ext cx="0" cy="0"/>
+          <a:chOff x="0" y="0"/>
+          <a:chExt cx="0" cy="0"/>
+        </a:xfrm>
+      </p:grpSpPr>
+      <p:sp>
+        <p:nvSpPr>
+          <p:cNvPr id="0" name="PlaceHolder 1"/>
+          <p:cNvSpPr>
+            <a:spLocks noGrp="1"/>
+          </p:cNvSpPr>
+          <p:nvPr>
+            <p:ph type="title"/>
+          </p:nvPr>
+        </p:nvSpPr>
+        <p:spPr>
+          <a:xfrm>
+            <a:off x="1792440" y="4800600"/>
+            <a:ext cx="5484600" cy="564840"/>
+          </a:xfrm>
+          <a:prstGeom prst="rect">
+            <a:avLst/>
+          </a:prstGeom>
+          <a:noFill/>
+          <a:ln w="0">
+            <a:noFill/>
+          </a:ln>
+        </p:spPr>
+        <p:txBody>
+          <a:bodyPr lIns="91440" rIns="91440" tIns="45720" bIns="45720" anchor="b">
+            <a:noAutofit/>
+          </a:bodyPr>
+          <a:p>
+            <a:pPr indent="0" defTabSz="457200">
+              <a:lnSpc>
+                <a:spcPct val="100000"/>
+              </a:lnSpc>
+              <a:buNone/>
+              <a:tabLst>
+                <a:tab algn="l" pos="0"/>
+              </a:tabLst>
+            </a:pPr>
+            <a:r>
+              <a:rPr b="1" lang="en-US" sz="2000" strike="noStrike" u="none">
+                <a:solidFill>
+                  <a:schemeClr val="dk1"/>
+                </a:solidFill>
+                <a:effectLst/>
+                <a:uFillTx/>
+                <a:latin typeface="Calibri"/>
+              </a:rPr>
+              <a:t>Click to edit Master title style</a:t>
+            </a:r>
+            <a:endParaRPr b="0" lang="sv-SE" sz="2000" strike="noStrike" u="none">
+              <a:solidFill>
+                <a:srgbClr val="000000"/>
+              </a:solidFill>
+              <a:effectLst/>
+              <a:uFillTx/>
+              <a:latin typeface="Arial"/>
+            </a:endParaRPr>
+          </a:p>
+        </p:txBody>
+      </p:sp>
+      <p:sp>
+        <p:nvSpPr>
+          <p:cNvPr id="1" name="PlaceHolder 2"/>
+          <p:cNvSpPr>
+            <a:spLocks noGrp="1"/>
+          </p:cNvSpPr>
+          <p:nvPr>
+            <p:ph type="body"/>
+          </p:nvPr>
+        </p:nvSpPr>
+        <p:spPr>
+          <a:xfrm>
+            <a:off x="1792440" y="612720"/>
+            <a:ext cx="5484600" cy="4113000"/>
+          </a:xfrm>
+          <a:prstGeom prst="rect">
+            <a:avLst/>
+          </a:prstGeom>
+          <a:noFill/>
+          <a:ln w="0">
+            <a:noFill/>
+          </a:ln>
+        </p:spPr>
+        <p:txBody>
+          <a:bodyPr lIns="90000" rIns="90000" tIns="45000" bIns="45000" anchor="t">
+            <a:noAutofit/>
+          </a:bodyPr>
+          <a:p>
+            <a:pPr marL="432000" indent="-324000">
+              <a:lnSpc>
+                <a:spcPct val="100000"/>
+              </a:lnSpc>
+              <a:spcBef>
+                <a:spcPts val="1417"/>
+              </a:spcBef>
+              <a:buClr>
+                <a:srgbClr val="000000"/>
+              </a:buClr>
+              <a:buSzPct val="45000"/>
+              <a:buFont typeface="Wingdings" charset="2"/>
+              <a:buChar char=""/>
+            </a:pPr>
+            <a:r>
+              <a:rPr b="0" lang="en-US" sz="3200" strike="noStrike" u="none">
+                <a:solidFill>
+                  <a:schemeClr val="dk1"/>
+                </a:solidFill>
+                <a:effectLst/>
+                <a:uFillTx/>
+                <a:latin typeface="Calibri"/>
+              </a:rPr>
+              <a:t>Klicka för att redigera dispositionstextens format</a:t>
+            </a:r>
+            <a:endParaRPr b="0" lang="sv-SE" sz="3200" strike="noStrike" u="none">
+              <a:solidFill>
+                <a:srgbClr val="000000"/>
+              </a:solidFill>
+              <a:effectLst/>
+              <a:uFillTx/>
+              <a:latin typeface="Arial"/>
+            </a:endParaRPr>
+          </a:p>
+          <a:p>
+            <a:pPr lvl="1" marL="864000" indent="-324000">
+              <a:lnSpc>
+                <a:spcPct val="100000"/>
+              </a:lnSpc>
+              <a:spcBef>
+                <a:spcPts val="1134"/>
+              </a:spcBef>
+              <a:buClr>
+                <a:srgbClr val="000000"/>
+              </a:buClr>
+              <a:buSzPct val="75000"/>
+              <a:buFont typeface="Symbol" charset="2"/>
+              <a:buChar char=""/>
+            </a:pPr>
+            <a:r>
+              <a:rPr b="0" lang="en-US" sz="3200" strike="noStrike" u="none">
+                <a:solidFill>
+                  <a:schemeClr val="dk1"/>
+                </a:solidFill>
+                <a:effectLst/>
+                <a:uFillTx/>
+                <a:latin typeface="Calibri"/>
+              </a:rPr>
+              <a:t>Andra dispositionsnivån</a:t>
+            </a:r>
+            <a:endParaRPr b="0" lang="sv-SE" sz="3200" strike="noStrike" u="none">
+              <a:solidFill>
+                <a:srgbClr val="000000"/>
+              </a:solidFill>
+              <a:effectLst/>
+              <a:uFillTx/>
+              <a:latin typeface="Arial"/>
+            </a:endParaRPr>
+          </a:p>
+          <a:p>
+            <a:pPr lvl="2" marL="1296000" indent="-288000">
+              <a:lnSpc>
+                <a:spcPct val="100000"/>
+              </a:lnSpc>
+              <a:spcBef>
+                <a:spcPts val="850"/>
+              </a:spcBef>
+              <a:buClr>
+                <a:srgbClr val="000000"/>
+              </a:buClr>
+              <a:buSzPct val="45000"/>
+              <a:buFont typeface="Wingdings" charset="2"/>
+              <a:buChar char=""/>
+            </a:pPr>
+            <a:r>
+              <a:rPr b="0" lang="en-US" sz="3200" strike="noStrike" u="none">
+                <a:solidFill>
+                  <a:schemeClr val="dk1"/>
+                </a:solidFill>
+                <a:effectLst/>
+                <a:uFillTx/>
+                <a:latin typeface="Calibri"/>
+              </a:rPr>
+              <a:t>Tredje dispositionsnivån</a:t>
+            </a:r>
+            <a:endParaRPr b="0" lang="sv-SE" sz="3200" strike="noStrike" u="none">
+              <a:solidFill>
+                <a:srgbClr val="000000"/>
+              </a:solidFill>
+              <a:effectLst/>
+              <a:uFillTx/>
+              <a:latin typeface="Arial"/>
+            </a:endParaRPr>
+          </a:p>
+          <a:p>
+            <a:pPr lvl="3" marL="1728000" indent="-216000">
+              <a:lnSpc>
+                <a:spcPct val="100000"/>
+              </a:lnSpc>
+              <a:spcBef>
+                <a:spcPts val="567"/>
+              </a:spcBef>
+              <a:buClr>
+                <a:srgbClr val="000000"/>
+              </a:buClr>
+              <a:buSzPct val="75000"/>
+              <a:buFont typeface="Symbol" charset="2"/>
+              <a:buChar char=""/>
+            </a:pPr>
+            <a:r>
+              <a:rPr b="0" lang="en-US" sz="3200" strike="noStrike" u="none">
+                <a:solidFill>
+                  <a:schemeClr val="dk1"/>
+                </a:solidFill>
+                <a:effectLst/>
+                <a:uFillTx/>
+                <a:latin typeface="Calibri"/>
+              </a:rPr>
+              <a:t>Fjärde dispositionsnivån</a:t>
+            </a:r>
+            <a:endParaRPr b="0" lang="sv-SE" sz="3200" strike="noStrike" u="none">
+              <a:solidFill>
+                <a:srgbClr val="000000"/>
+              </a:solidFill>
+              <a:effectLst/>
+              <a:uFillTx/>
+              <a:latin typeface="Arial"/>
+            </a:endParaRPr>
+          </a:p>
+          <a:p>
+            <a:pPr lvl="4" marL="2160000" indent="-216000">
+              <a:lnSpc>
+                <a:spcPct val="100000"/>
+              </a:lnSpc>
+              <a:spcBef>
+                <a:spcPts val="283"/>
+              </a:spcBef>
+              <a:buClr>
+                <a:srgbClr val="000000"/>
+              </a:buClr>
+              <a:buSzPct val="45000"/>
+              <a:buFont typeface="Wingdings" charset="2"/>
+              <a:buChar char=""/>
+            </a:pPr>
+            <a:r>
+              <a:rPr b="0" lang="en-US" sz="3200" strike="noStrike" u="none">
+                <a:solidFill>
+                  <a:schemeClr val="dk1"/>
+                </a:solidFill>
+                <a:effectLst/>
+                <a:uFillTx/>
+                <a:latin typeface="Calibri"/>
+              </a:rPr>
+              <a:t>Femte dispositionsnivån</a:t>
+            </a:r>
+            <a:endParaRPr b="0" lang="sv-SE" sz="3200" strike="noStrike" u="none">
+              <a:solidFill>
+                <a:srgbClr val="000000"/>
+              </a:solidFill>
+              <a:effectLst/>
+              <a:uFillTx/>
+              <a:latin typeface="Arial"/>
+            </a:endParaRPr>
+          </a:p>
+          <a:p>
+            <a:pPr lvl="5" marL="2592000" indent="-216000">
+              <a:lnSpc>
+                <a:spcPct val="100000"/>
+              </a:lnSpc>
+              <a:spcBef>
+                <a:spcPts val="283"/>
+              </a:spcBef>
+              <a:buClr>
+                <a:srgbClr val="000000"/>
+              </a:buClr>
+              <a:buSzPct val="45000"/>
+              <a:buFont typeface="Wingdings" charset="2"/>
+              <a:buChar char=""/>
+            </a:pPr>
+            <a:r>
+              <a:rPr b="0" lang="en-US" sz="3200" strike="noStrike" u="none">
+                <a:solidFill>
+                  <a:schemeClr val="dk1"/>
+                </a:solidFill>
+                <a:effectLst/>
+                <a:uFillTx/>
+                <a:latin typeface="Calibri"/>
+              </a:rPr>
+              <a:t>Sjätte dispositionsnivån</a:t>
+            </a:r>
+            <a:endParaRPr b="0" lang="sv-SE" sz="3200" strike="noStrike" u="none">
+              <a:solidFill>
+                <a:srgbClr val="000000"/>
+              </a:solidFill>
+              <a:effectLst/>
+              <a:uFillTx/>
+              <a:latin typeface="Arial"/>
+            </a:endParaRPr>
+          </a:p>
+          <a:p>
+            <a:pPr lvl="6" marL="3024000" indent="-216000">
+              <a:lnSpc>
+                <a:spcPct val="100000"/>
+              </a:lnSpc>
+              <a:spcBef>
+                <a:spcPts val="283"/>
+              </a:spcBef>
+              <a:buClr>
+                <a:srgbClr val="000000"/>
+              </a:buClr>
+              <a:buSzPct val="45000"/>
+              <a:buFont typeface="Wingdings" charset="2"/>
+              <a:buChar char=""/>
+            </a:pPr>
+            <a:r>
+              <a:rPr b="0" lang="en-US" sz="3200" strike="noStrike" u="none">
+                <a:solidFill>
+                  <a:schemeClr val="dk1"/>
+                </a:solidFill>
+                <a:effectLst/>
+                <a:uFillTx/>
+                <a:latin typeface="Calibri"/>
+              </a:rPr>
+              <a:t>Sjunde dispositionsnivån</a:t>
+            </a:r>
+            <a:endParaRPr b="0" lang="sv-SE" sz="3200" strike="noStrike" u="none">
+              <a:solidFill>
+                <a:srgbClr val="000000"/>
+              </a:solidFill>
+              <a:effectLst/>
+              <a:uFillTx/>
+              <a:latin typeface="Arial"/>
+            </a:endParaRPr>
+          </a:p>
+        </p:txBody>
+      </p:sp>
+      <p:sp>
+        <p:nvSpPr>
+          <p:cNvPr id="2" name="PlaceHolder 3"/>
+          <p:cNvSpPr>
+            <a:spLocks noGrp="1"/>
+          </p:cNvSpPr>
+          <p:nvPr>
+            <p:ph type="body"/>
+          </p:nvPr>
+        </p:nvSpPr>
+        <p:spPr>
+          <a:xfrm>
+            <a:off x="1792440" y="5367240"/>
+            <a:ext cx="5484600" cy="803160"/>
+          </a:xfrm>
+          <a:prstGeom prst="rect">
+            <a:avLst/>
+          </a:prstGeom>
+          <a:noFill/>
+          <a:ln w="0">
+            <a:noFill/>
+          </a:ln>
+        </p:spPr>
+        <p:txBody>
+          <a:bodyPr lIns="91440" rIns="91440" tIns="45720" bIns="45720" anchor="t">
+            <a:noAutofit/>
+          </a:bodyPr>
+          <a:p>
+            <a:pPr indent="0" defTabSz="457200">
+              <a:lnSpc>
+                <a:spcPct val="100000"/>
+              </a:lnSpc>
+              <a:spcBef>
+                <a:spcPts val="281"/>
+              </a:spcBef>
+              <a:buNone/>
+              <a:tabLst>
+                <a:tab algn="l" pos="0"/>
+              </a:tabLst>
+            </a:pPr>
+            <a:r>
+              <a:rPr b="0" lang="en-US" sz="1400" strike="noStrike" u="none">
+                <a:solidFill>
+                  <a:schemeClr val="dk1"/>
+                </a:solidFill>
+                <a:effectLst/>
+                <a:uFillTx/>
+                <a:latin typeface="Calibri"/>
+              </a:rPr>
+              <a:t>Click to edit Master text styles</a:t>
+            </a:r>
+            <a:endParaRPr b="0" lang="sv-SE" sz="1400" strike="noStrike" u="none">
+              <a:solidFill>
+                <a:srgbClr val="000000"/>
+              </a:solidFill>
+              <a:effectLst/>
+              <a:uFillTx/>
+              <a:latin typeface="Arial"/>
+            </a:endParaRPr>
+          </a:p>
+        </p:txBody>
+      </p:sp>
+      <p:sp>
+        <p:nvSpPr>
+          <p:cNvPr id="3" name="PlaceHolder 4"/>
+          <p:cNvSpPr>
+            <a:spLocks noGrp="1"/>
+          </p:cNvSpPr>
+          <p:nvPr>
+            <p:ph type="dt" idx="1"/>
+          </p:nvPr>
+        </p:nvSpPr>
+        <p:spPr>
+          <a:xfrm>
+            <a:off x="457200" y="6356520"/>
+            <a:ext cx="2131920" cy="363240"/>
+          </a:xfrm>
+          <a:prstGeom prst="rect">
+            <a:avLst/>
+          </a:prstGeom>
+          <a:noFill/>
+          <a:ln w="0">
+            <a:noFill/>
+          </a:ln>
+        </p:spPr>
+        <p:txBody>
+          <a:bodyPr lIns="91440" rIns="91440" tIns="45720" bIns="45720" anchor="ctr">
+            <a:noAutofit/>
+          </a:bodyPr>
+          <a:lstStyle>
+            <a:lvl1pPr indent="0" defTabSz="457200">
+              <a:lnSpc>
+                <a:spcPct val="100000"/>
+              </a:lnSpc>
+              <a:buNone/>
+              <a:tabLst>
+                <a:tab algn="l" pos="0"/>
+              </a:tabLst>
+              <a:defRPr b="0" lang="en-US" sz="1200" strike="noStrike" u="none">
+                <a:solidFill>
+                  <a:schemeClr val="dk1">
+                    <a:tint val="75000"/>
+                  </a:schemeClr>
+                </a:solidFill>
+                <a:effectLst/>
+                <a:uFillTx/>
+                <a:latin typeface="Calibri"/>
+              </a:defRPr>
+            </a:lvl1pPr>
+          </a:lstStyle>
+          <a:p>
+            <a:pPr indent="0" defTabSz="457200">
+              <a:lnSpc>
+                <a:spcPct val="100000"/>
+              </a:lnSpc>
+              <a:buNone/>
+              <a:tabLst>
+                <a:tab algn="l" pos="0"/>
+              </a:tabLst>
+            </a:pPr>
+            <a:r>
+              <a:rPr b="0" lang="en-US" sz="1200" strike="noStrike" u="none">
+                <a:solidFill>
+                  <a:schemeClr val="dk1">
+                    <a:tint val="75000"/>
+                  </a:schemeClr>
+                </a:solidFill>
+                <a:effectLst/>
+                <a:uFillTx/>
+                <a:latin typeface="Calibri"/>
+              </a:rPr>
+              <a:t>&lt;datum/tid&gt;</a:t>
+            </a:r>
+            <a:endParaRPr b="0" lang="sv-SE" sz="1200" strike="noStrike" u="none">
+              <a:solidFill>
+                <a:srgbClr val="000000"/>
+              </a:solidFill>
+              <a:effectLst/>
+              <a:uFillTx/>
+              <a:latin typeface="Times New Roman"/>
+            </a:endParaRPr>
+          </a:p>
+        </p:txBody>
+      </p:sp>
+      <p:sp>
+        <p:nvSpPr>
+          <p:cNvPr id="4" name="PlaceHolder 5"/>
+          <p:cNvSpPr>
+            <a:spLocks noGrp="1"/>
+          </p:cNvSpPr>
+          <p:nvPr>
+            <p:ph type="ftr" idx="2"/>
+          </p:nvPr>
+        </p:nvSpPr>
+        <p:spPr>
+          <a:xfrm>
+            <a:off x="3124080" y="6356520"/>
+            <a:ext cx="2893680" cy="363240"/>
+          </a:xfrm>
+          <a:prstGeom prst="rect">
+            <a:avLst/>
+          </a:prstGeom>
+          <a:noFill/>
+          <a:ln w="0">
+            <a:noFill/>
+          </a:ln>
+        </p:spPr>
+        <p:txBody>
+          <a:bodyPr lIns="91440" rIns="91440" tIns="45720" bIns="45720" anchor="ctr">
+            <a:noAutofit/>
+          </a:bodyPr>
+          <a:lstStyle>
+            <a:lvl1pPr indent="0" algn="ctr">
+              <a:lnSpc>
+                <a:spcPct val="100000"/>
+              </a:lnSpc>
+              <a:buNone/>
+              <a:tabLst>
+                <a:tab algn="l" pos="0"/>
+              </a:tabLst>
+              <a:defRPr b="0" lang="sv-SE" sz="1400" strike="noStrike" u="none">
+                <a:solidFill>
+                  <a:srgbClr val="000000"/>
+                </a:solidFill>
+                <a:effectLst/>
+                <a:uFillTx/>
+                <a:latin typeface="Times New Roman"/>
+              </a:defRPr>
+            </a:lvl1pPr>
+          </a:lstStyle>
+          <a:p>
+            <a:pPr indent="0" algn="ctr">
+              <a:lnSpc>
+                <a:spcPct val="100000"/>
+              </a:lnSpc>
+              <a:buNone/>
+              <a:tabLst>
+                <a:tab algn="l" pos="0"/>
+              </a:tabLst>
+            </a:pPr>
+            <a:r>
+              <a:rPr b="0" lang="sv-SE" sz="1400" strike="noStrike" u="none">
+                <a:solidFill>
+                  <a:srgbClr val="000000"/>
+                </a:solidFill>
+                <a:effectLst/>
+                <a:uFillTx/>
+                <a:latin typeface="Times New Roman"/>
+              </a:rPr>
+              <a:t>&lt;sidfot&gt;</a:t>
+            </a:r>
+            <a:endParaRPr b="0" lang="sv-SE" sz="1400" strike="noStrike" u="none">
+              <a:solidFill>
+                <a:srgbClr val="000000"/>
+              </a:solidFill>
+              <a:effectLst/>
+              <a:uFillTx/>
+              <a:latin typeface="Times New Roman"/>
+            </a:endParaRPr>
+          </a:p>
+        </p:txBody>
+      </p:sp>
+      <p:sp>
+        <p:nvSpPr>
+          <p:cNvPr id="5" name="PlaceHolder 6"/>
+          <p:cNvSpPr>
+            <a:spLocks noGrp="1"/>
+          </p:cNvSpPr>
+          <p:nvPr>
+            <p:ph type="sldNum" idx="3"/>
+          </p:nvPr>
+        </p:nvSpPr>
+        <p:spPr>
+          <a:xfrm>
+            <a:off x="6553080" y="6356520"/>
+            <a:ext cx="2131920" cy="363240"/>
+          </a:xfrm>
+          <a:prstGeom prst="rect">
+            <a:avLst/>
+          </a:prstGeom>
+          <a:noFill/>
+          <a:ln w="0">
+            <a:noFill/>
+          </a:ln>
+        </p:spPr>
+        <p:txBody>
+          <a:bodyPr lIns="91440" rIns="91440" tIns="45720" bIns="45720" anchor="ctr">
+            <a:noAutofit/>
+          </a:bodyPr>
+          <a:lstStyle>
+            <a:lvl1pPr indent="0" algn="r" defTabSz="457200">
+              <a:lnSpc>
+                <a:spcPct val="100000"/>
+              </a:lnSpc>
+              <a:buNone/>
+              <a:tabLst>
+                <a:tab algn="l" pos="0"/>
+              </a:tabLst>
+              <a:defRPr b="0" lang="en-US" sz="1200" strike="noStrike" u="none">
+                <a:solidFill>
+                  <a:schemeClr val="dk1">
+                    <a:tint val="75000"/>
+                  </a:schemeClr>
+                </a:solidFill>
+                <a:effectLst/>
+                <a:uFillTx/>
+                <a:latin typeface="Calibri"/>
+              </a:defRPr>
+            </a:lvl1pPr>
+          </a:lstStyle>
+          <a:p>
+            <a:pPr indent="0" algn="r" defTabSz="457200">
+              <a:lnSpc>
+                <a:spcPct val="100000"/>
+              </a:lnSpc>
+              <a:buNone/>
+              <a:tabLst>
+                <a:tab algn="l" pos="0"/>
+              </a:tabLst>
+            </a:pPr>
+            <a:fld id="{C73FC979-4DFD-4876-B7D0-A7DEEE1C350A}" type="slidenum">
+              <a:rPr b="0" lang="en-US" sz="1200" strike="noStrike" u="none">
+                <a:solidFill>
+                  <a:schemeClr val="dk1">
+                    <a:tint val="75000"/>
+                  </a:schemeClr>
+                </a:solidFill>
+                <a:effectLst/>
+                <a:uFillTx/>
+                <a:latin typeface="Calibri"/>
+              </a:rPr>
+              <a:t>&lt;nummer&gt;</a:t>
+            </a:fld>
+            <a:endParaRPr b="0" lang="sv-SE" sz="1200" strike="noStrike" u="none">
+              <a:solidFill>
+                <a:srgbClr val="000000"/>
+              </a:solidFill>
+              <a:effectLst/>
+              <a:uFillTx/>
+              <a:latin typeface="Times New Roman"/>
+            </a:endParaRPr>
+          </a:p>
+        </p:txBody>
+      </p:sp>
+    </p:spTree>
+  </p:cSld>
+</p:sldLayout>
+</file>
+
+<file path=ppt/slideLayouts/slideLayout10.xml><?xml version="1.0" encoding="utf-8"?>
+<p:sldLayout xmlns:a="http://schemas.openxmlformats.org/drawingml/2006/main" xmlns:p="http://schemas.openxmlformats.org/presentationml/2006/main" xmlns:r="http://schemas.openxmlformats.org/officeDocument/2006/relationships" xmlns:p14="http://schemas.microsoft.com/office/powerpoint/2010/main" xmlns:p15="http://schemas.microsoft.com/office/powerpoint/2012/main" xmlns:mc="http://schemas.openxmlformats.org/markup-compatibility/2006" type="blank" preserve="1">
+  <p:cSld name="Blank">
+    <p:bg>
+      <p:bgPr>
+        <a:solidFill>
+          <a:srgbClr val="ffffff"/>
+        </a:solidFill>
+      </p:bgPr>
+    </p:bg>
+    <p:spTree>
+      <p:nvGrpSpPr>
+        <p:cNvPr id="1" name=""/>
+        <p:cNvGrpSpPr/>
+        <p:nvPr/>
+      </p:nvGrpSpPr>
+      <p:grpSpPr>
+        <a:xfrm>
+          <a:off x="0" y="0"/>
+          <a:ext cx="0" cy="0"/>
+          <a:chOff x="0" y="0"/>
+          <a:chExt cx="0" cy="0"/>
+        </a:xfrm>
+      </p:grpSpPr>
+      <p:sp>
+        <p:nvSpPr>
+          <p:cNvPr id="48" name="PlaceHolder 1"/>
+          <p:cNvSpPr>
+            <a:spLocks noGrp="1"/>
+          </p:cNvSpPr>
+          <p:nvPr>
+            <p:ph type="dt" idx="28"/>
+          </p:nvPr>
+        </p:nvSpPr>
+        <p:spPr>
+          <a:xfrm>
+            <a:off x="457200" y="6356520"/>
+            <a:ext cx="2131920" cy="363240"/>
+          </a:xfrm>
+          <a:prstGeom prst="rect">
+            <a:avLst/>
+          </a:prstGeom>
+          <a:noFill/>
+          <a:ln w="0">
+            <a:noFill/>
+          </a:ln>
+        </p:spPr>
+        <p:txBody>
+          <a:bodyPr lIns="91440" rIns="91440" tIns="45720" bIns="45720" anchor="ctr">
+            <a:noAutofit/>
+          </a:bodyPr>
+          <a:lstStyle>
+            <a:lvl1pPr indent="0" defTabSz="457200">
+              <a:lnSpc>
+                <a:spcPct val="100000"/>
+              </a:lnSpc>
+              <a:buNone/>
+              <a:tabLst>
+                <a:tab algn="l" pos="0"/>
+              </a:tabLst>
+              <a:defRPr b="0" lang="en-US" sz="1200" strike="noStrike" u="none">
+                <a:solidFill>
+                  <a:schemeClr val="dk1">
+                    <a:tint val="75000"/>
+                  </a:schemeClr>
+                </a:solidFill>
+                <a:effectLst/>
+                <a:uFillTx/>
+                <a:latin typeface="Calibri"/>
+              </a:defRPr>
+            </a:lvl1pPr>
+          </a:lstStyle>
+          <a:p>
+            <a:pPr indent="0" defTabSz="457200">
+              <a:lnSpc>
+                <a:spcPct val="100000"/>
+              </a:lnSpc>
+              <a:buNone/>
+              <a:tabLst>
+                <a:tab algn="l" pos="0"/>
+              </a:tabLst>
+            </a:pPr>
+            <a:r>
+              <a:rPr b="0" lang="en-US" sz="1200" strike="noStrike" u="none">
+                <a:solidFill>
+                  <a:schemeClr val="dk1">
+                    <a:tint val="75000"/>
+                  </a:schemeClr>
+                </a:solidFill>
+                <a:effectLst/>
+                <a:uFillTx/>
+                <a:latin typeface="Calibri"/>
+              </a:rPr>
+              <a:t>&lt;datum/tid&gt;</a:t>
+            </a:r>
+            <a:endParaRPr b="0" lang="sv-SE" sz="1200" strike="noStrike" u="none">
+              <a:solidFill>
+                <a:srgbClr val="000000"/>
+              </a:solidFill>
+              <a:effectLst/>
+              <a:uFillTx/>
+              <a:latin typeface="Times New Roman"/>
+            </a:endParaRPr>
+          </a:p>
+        </p:txBody>
+      </p:sp>
+      <p:sp>
+        <p:nvSpPr>
+          <p:cNvPr id="49" name="PlaceHolder 2"/>
+          <p:cNvSpPr>
+            <a:spLocks noGrp="1"/>
+          </p:cNvSpPr>
+          <p:nvPr>
+            <p:ph type="ftr" idx="29"/>
+          </p:nvPr>
+        </p:nvSpPr>
+        <p:spPr>
+          <a:xfrm>
+            <a:off x="3124080" y="6356520"/>
+            <a:ext cx="2893680" cy="363240"/>
+          </a:xfrm>
+          <a:prstGeom prst="rect">
+            <a:avLst/>
+          </a:prstGeom>
+          <a:noFill/>
+          <a:ln w="0">
+            <a:noFill/>
+          </a:ln>
+        </p:spPr>
+        <p:txBody>
+          <a:bodyPr lIns="91440" rIns="91440" tIns="45720" bIns="45720" anchor="ctr">
+            <a:noAutofit/>
+          </a:bodyPr>
+          <a:lstStyle>
+            <a:lvl1pPr indent="0" algn="ctr">
+              <a:lnSpc>
+                <a:spcPct val="100000"/>
+              </a:lnSpc>
+              <a:buNone/>
+              <a:tabLst>
+                <a:tab algn="l" pos="0"/>
+              </a:tabLst>
+              <a:defRPr b="0" lang="sv-SE" sz="1400" strike="noStrike" u="none">
+                <a:solidFill>
+                  <a:srgbClr val="000000"/>
+                </a:solidFill>
+                <a:effectLst/>
+                <a:uFillTx/>
+                <a:latin typeface="Times New Roman"/>
+              </a:defRPr>
+            </a:lvl1pPr>
+          </a:lstStyle>
+          <a:p>
+            <a:pPr indent="0" algn="ctr">
+              <a:lnSpc>
+                <a:spcPct val="100000"/>
+              </a:lnSpc>
+              <a:buNone/>
+              <a:tabLst>
+                <a:tab algn="l" pos="0"/>
+              </a:tabLst>
+            </a:pPr>
+            <a:r>
+              <a:rPr b="0" lang="sv-SE" sz="1400" strike="noStrike" u="none">
+                <a:solidFill>
+                  <a:srgbClr val="000000"/>
+                </a:solidFill>
+                <a:effectLst/>
+                <a:uFillTx/>
+                <a:latin typeface="Times New Roman"/>
+              </a:rPr>
+              <a:t>&lt;sidfot&gt;</a:t>
+            </a:r>
+            <a:endParaRPr b="0" lang="sv-SE" sz="1400" strike="noStrike" u="none">
+              <a:solidFill>
+                <a:srgbClr val="000000"/>
+              </a:solidFill>
+              <a:effectLst/>
+              <a:uFillTx/>
+              <a:latin typeface="Times New Roman"/>
+            </a:endParaRPr>
+          </a:p>
+        </p:txBody>
+      </p:sp>
+      <p:sp>
+        <p:nvSpPr>
+          <p:cNvPr id="50" name="PlaceHolder 3"/>
+          <p:cNvSpPr>
+            <a:spLocks noGrp="1"/>
+          </p:cNvSpPr>
+          <p:nvPr>
+            <p:ph type="sldNum" idx="30"/>
+          </p:nvPr>
+        </p:nvSpPr>
+        <p:spPr>
+          <a:xfrm>
+            <a:off x="6553080" y="6356520"/>
+            <a:ext cx="2131920" cy="363240"/>
+          </a:xfrm>
+          <a:prstGeom prst="rect">
+            <a:avLst/>
+          </a:prstGeom>
+          <a:noFill/>
+          <a:ln w="0">
+            <a:noFill/>
+          </a:ln>
+        </p:spPr>
+        <p:txBody>
+          <a:bodyPr lIns="91440" rIns="91440" tIns="45720" bIns="45720" anchor="ctr">
+            <a:noAutofit/>
+          </a:bodyPr>
+          <a:lstStyle>
+            <a:lvl1pPr indent="0" algn="r" defTabSz="457200">
+              <a:lnSpc>
+                <a:spcPct val="100000"/>
+              </a:lnSpc>
+              <a:buNone/>
+              <a:tabLst>
+                <a:tab algn="l" pos="0"/>
+              </a:tabLst>
+              <a:defRPr b="0" lang="en-US" sz="1200" strike="noStrike" u="none">
+                <a:solidFill>
+                  <a:schemeClr val="dk1">
+                    <a:tint val="75000"/>
+                  </a:schemeClr>
+                </a:solidFill>
+                <a:effectLst/>
+                <a:uFillTx/>
+                <a:latin typeface="Calibri"/>
+              </a:defRPr>
+            </a:lvl1pPr>
+          </a:lstStyle>
+          <a:p>
+            <a:pPr indent="0" algn="r" defTabSz="457200">
+              <a:lnSpc>
+                <a:spcPct val="100000"/>
+              </a:lnSpc>
+              <a:buNone/>
+              <a:tabLst>
+                <a:tab algn="l" pos="0"/>
+              </a:tabLst>
+            </a:pPr>
+            <a:fld id="{A925C0D5-73F3-42CB-8CC3-1EB00C058940}" type="slidenum">
+              <a:rPr b="0" lang="en-US" sz="1200" strike="noStrike" u="none">
+                <a:solidFill>
+                  <a:schemeClr val="dk1">
+                    <a:tint val="75000"/>
+                  </a:schemeClr>
+                </a:solidFill>
+                <a:effectLst/>
+                <a:uFillTx/>
+                <a:latin typeface="Calibri"/>
+              </a:rPr>
+              <a:t>&lt;nummer&gt;</a:t>
+            </a:fld>
+            <a:endParaRPr b="0" lang="sv-SE" sz="1200" strike="noStrike" u="none">
+              <a:solidFill>
+                <a:srgbClr val="000000"/>
+              </a:solidFill>
+              <a:effectLst/>
+              <a:uFillTx/>
+              <a:latin typeface="Times New Roman"/>
+            </a:endParaRPr>
+          </a:p>
+        </p:txBody>
+      </p:sp>
+      <p:sp>
+        <p:nvSpPr>
+          <p:cNvPr id="51" name="PlaceHolder 4"/>
+          <p:cNvSpPr>
+            <a:spLocks noGrp="1"/>
+          </p:cNvSpPr>
+          <p:nvPr>
+            <p:ph type="title"/>
+          </p:nvPr>
+        </p:nvSpPr>
+        <p:spPr>
+          <a:xfrm>
+            <a:off x="609120" y="273600"/>
+            <a:ext cx="10968120" cy="1143360"/>
+          </a:xfrm>
+          <a:prstGeom prst="rect">
+            <a:avLst/>
+          </a:prstGeom>
+          <a:noFill/>
+          <a:ln w="0">
+            <a:noFill/>
+          </a:ln>
+        </p:spPr>
+        <p:txBody>
+          <a:bodyPr lIns="0" rIns="0" tIns="0" bIns="0" anchor="ctr">
+            <a:noAutofit/>
+          </a:bodyPr>
+          <a:p>
+            <a:pPr indent="0">
+              <a:lnSpc>
+                <a:spcPct val="100000"/>
+              </a:lnSpc>
+              <a:buNone/>
+              <a:tabLst>
+                <a:tab algn="l" pos="0"/>
+              </a:tabLst>
+            </a:pPr>
+            <a:r>
+              <a:rPr b="0" lang="en-US" sz="1800" strike="noStrike" u="none">
+                <a:solidFill>
+                  <a:schemeClr val="dk1"/>
+                </a:solidFill>
+                <a:effectLst/>
+                <a:uFillTx/>
+                <a:latin typeface="Calibri"/>
+              </a:rPr>
+              <a:t>Klicka för att redigera rubriktextens format</a:t>
+            </a:r>
+            <a:endParaRPr b="0" lang="sv-SE" sz="1800" strike="noStrike" u="none">
+              <a:solidFill>
+                <a:srgbClr val="000000"/>
+              </a:solidFill>
+              <a:effectLst/>
+              <a:uFillTx/>
+              <a:latin typeface="Arial"/>
+            </a:endParaRPr>
+          </a:p>
+        </p:txBody>
+      </p:sp>
+      <p:sp>
+        <p:nvSpPr>
+          <p:cNvPr id="52" name="PlaceHolder 5"/>
+          <p:cNvSpPr>
+            <a:spLocks noGrp="1"/>
+          </p:cNvSpPr>
+          <p:nvPr>
+            <p:ph type="body"/>
+          </p:nvPr>
+        </p:nvSpPr>
+        <p:spPr>
+          <a:xfrm>
+            <a:off x="609120" y="1604520"/>
+            <a:ext cx="10968120" cy="3975840"/>
+          </a:xfrm>
+          <a:prstGeom prst="rect">
+            <a:avLst/>
+          </a:prstGeom>
+          <a:noFill/>
+          <a:ln w="0">
+            <a:noFill/>
+          </a:ln>
+        </p:spPr>
+        <p:txBody>
+          <a:bodyPr lIns="0" rIns="0" tIns="0" bIns="0" anchor="t">
+            <a:normAutofit/>
+          </a:bodyPr>
+          <a:p>
+            <a:pPr marL="432000" indent="-324000">
+              <a:lnSpc>
+                <a:spcPct val="100000"/>
+              </a:lnSpc>
+              <a:spcBef>
+                <a:spcPts val="1417"/>
+              </a:spcBef>
+              <a:buClr>
+                <a:srgbClr val="000000"/>
+              </a:buClr>
+              <a:buSzPct val="45000"/>
+              <a:buFont typeface="Wingdings" charset="2"/>
+              <a:buChar char=""/>
+            </a:pPr>
+            <a:r>
+              <a:rPr b="0" lang="en-US" sz="3200" strike="noStrike" u="none">
+                <a:solidFill>
+                  <a:schemeClr val="dk1"/>
+                </a:solidFill>
+                <a:effectLst/>
+                <a:uFillTx/>
+                <a:latin typeface="Calibri"/>
+              </a:rPr>
+              <a:t>Klicka för att redigera dispositionstextens format</a:t>
+            </a:r>
+            <a:endParaRPr b="0" lang="sv-SE" sz="3200" strike="noStrike" u="none">
+              <a:solidFill>
+                <a:srgbClr val="000000"/>
+              </a:solidFill>
+              <a:effectLst/>
+              <a:uFillTx/>
+              <a:latin typeface="Arial"/>
+            </a:endParaRPr>
+          </a:p>
+          <a:p>
+            <a:pPr lvl="1" marL="864000" indent="-324000">
+              <a:lnSpc>
+                <a:spcPct val="100000"/>
+              </a:lnSpc>
+              <a:spcBef>
+                <a:spcPts val="1134"/>
+              </a:spcBef>
+              <a:buClr>
+                <a:srgbClr val="000000"/>
+              </a:buClr>
+              <a:buSzPct val="75000"/>
+              <a:buFont typeface="Symbol" charset="2"/>
+              <a:buChar char=""/>
+            </a:pPr>
+            <a:r>
+              <a:rPr b="0" lang="en-US" sz="2400" strike="noStrike" u="none">
+                <a:solidFill>
+                  <a:schemeClr val="dk1"/>
+                </a:solidFill>
+                <a:effectLst/>
+                <a:uFillTx/>
+                <a:latin typeface="Calibri"/>
+              </a:rPr>
+              <a:t>Andra dispositionsnivån</a:t>
+            </a:r>
+            <a:endParaRPr b="0" lang="sv-SE" sz="2400" strike="noStrike" u="none">
+              <a:solidFill>
+                <a:srgbClr val="000000"/>
+              </a:solidFill>
+              <a:effectLst/>
+              <a:uFillTx/>
+              <a:latin typeface="Arial"/>
+            </a:endParaRPr>
+          </a:p>
+          <a:p>
+            <a:pPr lvl="2" marL="1296000" indent="-288000">
+              <a:lnSpc>
+                <a:spcPct val="100000"/>
+              </a:lnSpc>
+              <a:spcBef>
+                <a:spcPts val="850"/>
+              </a:spcBef>
+              <a:buClr>
+                <a:srgbClr val="000000"/>
+              </a:buClr>
+              <a:buSzPct val="45000"/>
+              <a:buFont typeface="Wingdings" charset="2"/>
+              <a:buChar char=""/>
+            </a:pPr>
+            <a:r>
+              <a:rPr b="0" lang="en-US" sz="2000" strike="noStrike" u="none">
+                <a:solidFill>
+                  <a:schemeClr val="dk1"/>
+                </a:solidFill>
+                <a:effectLst/>
+                <a:uFillTx/>
+                <a:latin typeface="Calibri"/>
+              </a:rPr>
+              <a:t>Tredje dispositionsnivån</a:t>
+            </a:r>
+            <a:endParaRPr b="0" lang="sv-SE" sz="2000" strike="noStrike" u="none">
+              <a:solidFill>
+                <a:srgbClr val="000000"/>
+              </a:solidFill>
+              <a:effectLst/>
+              <a:uFillTx/>
+              <a:latin typeface="Arial"/>
+            </a:endParaRPr>
+          </a:p>
+          <a:p>
+            <a:pPr lvl="3" marL="1728000" indent="-216000">
+              <a:lnSpc>
+                <a:spcPct val="100000"/>
+              </a:lnSpc>
+              <a:spcBef>
+                <a:spcPts val="567"/>
+              </a:spcBef>
+              <a:buClr>
+                <a:srgbClr val="000000"/>
+              </a:buClr>
+              <a:buSzPct val="75000"/>
+              <a:buFont typeface="Symbol" charset="2"/>
+              <a:buChar char=""/>
+            </a:pPr>
+            <a:r>
+              <a:rPr b="0" lang="en-US" sz="2000" strike="noStrike" u="none">
+                <a:solidFill>
+                  <a:schemeClr val="dk1"/>
+                </a:solidFill>
+                <a:effectLst/>
+                <a:uFillTx/>
+                <a:latin typeface="Calibri"/>
+              </a:rPr>
+              <a:t>Fjärde dispositionsnivån</a:t>
+            </a:r>
+            <a:endParaRPr b="0" lang="sv-SE" sz="2000" strike="noStrike" u="none">
+              <a:solidFill>
+                <a:srgbClr val="000000"/>
+              </a:solidFill>
+              <a:effectLst/>
+              <a:uFillTx/>
+              <a:latin typeface="Arial"/>
+            </a:endParaRPr>
+          </a:p>
+          <a:p>
+            <a:pPr lvl="4" marL="2160000" indent="-216000">
+              <a:lnSpc>
+                <a:spcPct val="100000"/>
+              </a:lnSpc>
+              <a:spcBef>
+                <a:spcPts val="283"/>
+              </a:spcBef>
+              <a:buClr>
+                <a:srgbClr val="000000"/>
+              </a:buClr>
+              <a:buSzPct val="45000"/>
+              <a:buFont typeface="Wingdings" charset="2"/>
+              <a:buChar char=""/>
+            </a:pPr>
+            <a:r>
+              <a:rPr b="0" lang="en-US" sz="2000" strike="noStrike" u="none">
+                <a:solidFill>
+                  <a:schemeClr val="dk1"/>
+                </a:solidFill>
+                <a:effectLst/>
+                <a:uFillTx/>
+                <a:latin typeface="Calibri"/>
+              </a:rPr>
+              <a:t>Femte dispositionsnivån</a:t>
+            </a:r>
+            <a:endParaRPr b="0" lang="sv-SE" sz="2000" strike="noStrike" u="none">
+              <a:solidFill>
+                <a:srgbClr val="000000"/>
+              </a:solidFill>
+              <a:effectLst/>
+              <a:uFillTx/>
+              <a:latin typeface="Arial"/>
+            </a:endParaRPr>
+          </a:p>
+          <a:p>
+            <a:pPr lvl="5" marL="2592000" indent="-216000">
+              <a:lnSpc>
+                <a:spcPct val="100000"/>
+              </a:lnSpc>
+              <a:spcBef>
+                <a:spcPts val="283"/>
+              </a:spcBef>
+              <a:buClr>
+                <a:srgbClr val="000000"/>
+              </a:buClr>
+              <a:buSzPct val="45000"/>
+              <a:buFont typeface="Wingdings" charset="2"/>
+              <a:buChar char=""/>
+            </a:pPr>
+            <a:r>
+              <a:rPr b="0" lang="en-US" sz="2000" strike="noStrike" u="none">
+                <a:solidFill>
+                  <a:schemeClr val="dk1"/>
+                </a:solidFill>
+                <a:effectLst/>
+                <a:uFillTx/>
+                <a:latin typeface="Calibri"/>
+              </a:rPr>
+              <a:t>Sjätte dispositionsnivån</a:t>
+            </a:r>
+            <a:endParaRPr b="0" lang="sv-SE" sz="2000" strike="noStrike" u="none">
+              <a:solidFill>
+                <a:srgbClr val="000000"/>
+              </a:solidFill>
+              <a:effectLst/>
+              <a:uFillTx/>
+              <a:latin typeface="Arial"/>
+            </a:endParaRPr>
+          </a:p>
+          <a:p>
+            <a:pPr lvl="6" marL="3024000" indent="-216000">
+              <a:lnSpc>
+                <a:spcPct val="100000"/>
+              </a:lnSpc>
+              <a:spcBef>
+                <a:spcPts val="283"/>
+              </a:spcBef>
+              <a:buClr>
+                <a:srgbClr val="000000"/>
+              </a:buClr>
+              <a:buSzPct val="45000"/>
+              <a:buFont typeface="Wingdings" charset="2"/>
+              <a:buChar char=""/>
+            </a:pPr>
+            <a:r>
+              <a:rPr b="0" lang="en-US" sz="2000" strike="noStrike" u="none">
+                <a:solidFill>
+                  <a:schemeClr val="dk1"/>
+                </a:solidFill>
+                <a:effectLst/>
+                <a:uFillTx/>
+                <a:latin typeface="Calibri"/>
+              </a:rPr>
+              <a:t>Sjunde dispositionsnivån</a:t>
+            </a:r>
+            <a:endParaRPr b="0" lang="sv-SE" sz="2000" strike="noStrike" u="none">
+              <a:solidFill>
+                <a:srgbClr val="000000"/>
+              </a:solidFill>
+              <a:effectLst/>
+              <a:uFillTx/>
+              <a:latin typeface="Arial"/>
+            </a:endParaRPr>
+          </a:p>
+        </p:txBody>
+      </p:sp>
+    </p:spTree>
+  </p:cSld>
+</p:sldLayout>
+</file>
+
+<file path=ppt/slideLayouts/slideLayout11.xml><?xml version="1.0" encoding="utf-8"?>
+<p:sldLayout xmlns:a="http://schemas.openxmlformats.org/drawingml/2006/main" xmlns:p="http://schemas.openxmlformats.org/presentationml/2006/main" xmlns:r="http://schemas.openxmlformats.org/officeDocument/2006/relationships" xmlns:p14="http://schemas.microsoft.com/office/powerpoint/2010/main" xmlns:p15="http://schemas.microsoft.com/office/powerpoint/2012/main" xmlns:mc="http://schemas.openxmlformats.org/markup-compatibility/2006" type="blank" preserve="1">
+  <p:cSld name="Content with Caption">
+    <p:bg>
+      <p:bgPr>
+        <a:solidFill>
+          <a:srgbClr val="ffffff"/>
+        </a:solidFill>
+      </p:bgPr>
+    </p:bg>
+    <p:spTree>
+      <p:nvGrpSpPr>
+        <p:cNvPr id="1" name=""/>
+        <p:cNvGrpSpPr/>
+        <p:nvPr/>
+      </p:nvGrpSpPr>
+      <p:grpSpPr>
+        <a:xfrm>
+          <a:off x="0" y="0"/>
+          <a:ext cx="0" cy="0"/>
+          <a:chOff x="0" y="0"/>
+          <a:chExt cx="0" cy="0"/>
+        </a:xfrm>
+      </p:grpSpPr>
+      <p:sp>
+        <p:nvSpPr>
+          <p:cNvPr id="53" name="PlaceHolder 1"/>
+          <p:cNvSpPr>
+            <a:spLocks noGrp="1"/>
+          </p:cNvSpPr>
+          <p:nvPr>
+            <p:ph type="title"/>
+          </p:nvPr>
+        </p:nvSpPr>
+        <p:spPr>
+          <a:xfrm>
+            <a:off x="457200" y="272880"/>
+            <a:ext cx="3006360" cy="1160280"/>
+          </a:xfrm>
+          <a:prstGeom prst="rect">
+            <a:avLst/>
+          </a:prstGeom>
+          <a:noFill/>
+          <a:ln w="0">
+            <a:noFill/>
+          </a:ln>
+        </p:spPr>
+        <p:txBody>
+          <a:bodyPr lIns="91440" rIns="91440" tIns="45720" bIns="45720" anchor="b">
+            <a:noAutofit/>
+          </a:bodyPr>
+          <a:p>
+            <a:pPr indent="0" defTabSz="457200">
+              <a:lnSpc>
+                <a:spcPct val="100000"/>
+              </a:lnSpc>
+              <a:buNone/>
+              <a:tabLst>
+                <a:tab algn="l" pos="0"/>
+              </a:tabLst>
+            </a:pPr>
+            <a:r>
+              <a:rPr b="1" lang="en-US" sz="2000" strike="noStrike" u="none">
+                <a:solidFill>
+                  <a:schemeClr val="dk1"/>
+                </a:solidFill>
+                <a:effectLst/>
+                <a:uFillTx/>
+                <a:latin typeface="Calibri"/>
+              </a:rPr>
+              <a:t>Click to edit Master title style</a:t>
+            </a:r>
+            <a:endParaRPr b="0" lang="sv-SE" sz="2000" strike="noStrike" u="none">
+              <a:solidFill>
+                <a:srgbClr val="000000"/>
+              </a:solidFill>
+              <a:effectLst/>
+              <a:uFillTx/>
+              <a:latin typeface="Arial"/>
+            </a:endParaRPr>
+          </a:p>
+        </p:txBody>
+      </p:sp>
+      <p:sp>
+        <p:nvSpPr>
+          <p:cNvPr id="54" name="PlaceHolder 2"/>
+          <p:cNvSpPr>
+            <a:spLocks noGrp="1"/>
+          </p:cNvSpPr>
+          <p:nvPr>
+            <p:ph type="body"/>
+          </p:nvPr>
+        </p:nvSpPr>
+        <p:spPr>
+          <a:xfrm>
+            <a:off x="3575160" y="272880"/>
+            <a:ext cx="5109840" cy="5851440"/>
+          </a:xfrm>
+          <a:prstGeom prst="rect">
+            <a:avLst/>
+          </a:prstGeom>
+          <a:noFill/>
+          <a:ln w="0">
+            <a:noFill/>
+          </a:ln>
+        </p:spPr>
+        <p:txBody>
+          <a:bodyPr lIns="91440" rIns="91440" tIns="45720" bIns="45720" anchor="t">
+            <a:noAutofit/>
+          </a:bodyPr>
+          <a:p>
+            <a:pPr marL="343080" indent="-343080" defTabSz="457200">
+              <a:lnSpc>
+                <a:spcPct val="100000"/>
+              </a:lnSpc>
+              <a:spcBef>
+                <a:spcPts val="641"/>
+              </a:spcBef>
+              <a:buClr>
+                <a:srgbClr val="000000"/>
+              </a:buClr>
+              <a:buFont typeface="Arial"/>
+              <a:buChar char="•"/>
+            </a:pPr>
+            <a:r>
+              <a:rPr b="0" lang="en-US" sz="3200" strike="noStrike" u="none">
+                <a:solidFill>
+                  <a:schemeClr val="dk1"/>
+                </a:solidFill>
+                <a:effectLst/>
+                <a:uFillTx/>
+                <a:latin typeface="Calibri"/>
+              </a:rPr>
+              <a:t>Click to edit Master text styles</a:t>
+            </a:r>
+            <a:endParaRPr b="0" lang="sv-SE" sz="3200" strike="noStrike" u="none">
+              <a:solidFill>
+                <a:srgbClr val="000000"/>
+              </a:solidFill>
+              <a:effectLst/>
+              <a:uFillTx/>
+              <a:latin typeface="Arial"/>
+            </a:endParaRPr>
+          </a:p>
+          <a:p>
+            <a:pPr lvl="1" marL="743040" indent="-285840" defTabSz="457200">
+              <a:lnSpc>
+                <a:spcPct val="100000"/>
+              </a:lnSpc>
+              <a:spcBef>
+                <a:spcPts val="561"/>
+              </a:spcBef>
+              <a:buClr>
+                <a:srgbClr val="000000"/>
+              </a:buClr>
+              <a:buFont typeface="Arial"/>
+              <a:buChar char="–"/>
+            </a:pPr>
+            <a:r>
+              <a:rPr b="0" lang="en-US" sz="2800" strike="noStrike" u="none">
+                <a:solidFill>
+                  <a:schemeClr val="dk1"/>
+                </a:solidFill>
+                <a:effectLst/>
+                <a:uFillTx/>
+                <a:latin typeface="Calibri"/>
+              </a:rPr>
+              <a:t>Second level</a:t>
+            </a:r>
+            <a:endParaRPr b="0" lang="sv-SE" sz="2800" strike="noStrike" u="none">
+              <a:solidFill>
+                <a:srgbClr val="000000"/>
+              </a:solidFill>
+              <a:effectLst/>
+              <a:uFillTx/>
+              <a:latin typeface="Arial"/>
+            </a:endParaRPr>
+          </a:p>
+          <a:p>
+            <a:pPr lvl="2" marL="1143000" indent="-228600" defTabSz="457200">
+              <a:lnSpc>
+                <a:spcPct val="100000"/>
+              </a:lnSpc>
+              <a:spcBef>
+                <a:spcPts val="479"/>
+              </a:spcBef>
+              <a:buClr>
+                <a:srgbClr val="000000"/>
+              </a:buClr>
+              <a:buFont typeface="Arial"/>
+              <a:buChar char="•"/>
+            </a:pPr>
+            <a:r>
+              <a:rPr b="0" lang="en-US" sz="2400" strike="noStrike" u="none">
+                <a:solidFill>
+                  <a:schemeClr val="dk1"/>
+                </a:solidFill>
+                <a:effectLst/>
+                <a:uFillTx/>
+                <a:latin typeface="Calibri"/>
+              </a:rPr>
+              <a:t>Third level</a:t>
+            </a:r>
+            <a:endParaRPr b="0" lang="sv-SE" sz="2400" strike="noStrike" u="none">
+              <a:solidFill>
+                <a:srgbClr val="000000"/>
+              </a:solidFill>
+              <a:effectLst/>
+              <a:uFillTx/>
+              <a:latin typeface="Arial"/>
+            </a:endParaRPr>
+          </a:p>
+          <a:p>
+            <a:pPr lvl="3" marL="1600200" indent="-228600" defTabSz="457200">
+              <a:lnSpc>
+                <a:spcPct val="100000"/>
+              </a:lnSpc>
+              <a:spcBef>
+                <a:spcPts val="400"/>
+              </a:spcBef>
+              <a:buClr>
+                <a:srgbClr val="000000"/>
+              </a:buClr>
+              <a:buFont typeface="Arial"/>
+              <a:buChar char="–"/>
+            </a:pPr>
+            <a:r>
+              <a:rPr b="0" lang="en-US" sz="2000" strike="noStrike" u="none">
+                <a:solidFill>
+                  <a:schemeClr val="dk1"/>
+                </a:solidFill>
+                <a:effectLst/>
+                <a:uFillTx/>
+                <a:latin typeface="Calibri"/>
+              </a:rPr>
+              <a:t>Fourth level</a:t>
+            </a:r>
+            <a:endParaRPr b="0" lang="sv-SE" sz="2000" strike="noStrike" u="none">
+              <a:solidFill>
+                <a:srgbClr val="000000"/>
+              </a:solidFill>
+              <a:effectLst/>
+              <a:uFillTx/>
+              <a:latin typeface="Arial"/>
+            </a:endParaRPr>
+          </a:p>
+          <a:p>
+            <a:pPr lvl="4" marL="2057400" indent="-228600" defTabSz="457200">
+              <a:lnSpc>
+                <a:spcPct val="100000"/>
+              </a:lnSpc>
+              <a:spcBef>
+                <a:spcPts val="400"/>
+              </a:spcBef>
+              <a:buClr>
+                <a:srgbClr val="000000"/>
+              </a:buClr>
+              <a:buFont typeface="Arial"/>
+              <a:buChar char="»"/>
+            </a:pPr>
+            <a:r>
+              <a:rPr b="0" lang="en-US" sz="2000" strike="noStrike" u="none">
+                <a:solidFill>
+                  <a:schemeClr val="dk1"/>
+                </a:solidFill>
+                <a:effectLst/>
+                <a:uFillTx/>
+                <a:latin typeface="Calibri"/>
+              </a:rPr>
+              <a:t>Fifth level</a:t>
+            </a:r>
+            <a:endParaRPr b="0" lang="sv-SE" sz="2000" strike="noStrike" u="none">
+              <a:solidFill>
+                <a:srgbClr val="000000"/>
+              </a:solidFill>
+              <a:effectLst/>
+              <a:uFillTx/>
+              <a:latin typeface="Arial"/>
+            </a:endParaRPr>
+          </a:p>
+        </p:txBody>
+      </p:sp>
+      <p:sp>
+        <p:nvSpPr>
+          <p:cNvPr id="55" name="PlaceHolder 3"/>
+          <p:cNvSpPr>
+            <a:spLocks noGrp="1"/>
+          </p:cNvSpPr>
+          <p:nvPr>
+            <p:ph type="body"/>
+          </p:nvPr>
+        </p:nvSpPr>
+        <p:spPr>
+          <a:xfrm>
+            <a:off x="457200" y="1434960"/>
+            <a:ext cx="3006360" cy="4689360"/>
+          </a:xfrm>
+          <a:prstGeom prst="rect">
+            <a:avLst/>
+          </a:prstGeom>
+          <a:noFill/>
+          <a:ln w="0">
+            <a:noFill/>
+          </a:ln>
+        </p:spPr>
+        <p:txBody>
+          <a:bodyPr lIns="91440" rIns="91440" tIns="45720" bIns="45720" anchor="t">
+            <a:noAutofit/>
+          </a:bodyPr>
+          <a:p>
+            <a:pPr indent="0" defTabSz="457200">
+              <a:lnSpc>
+                <a:spcPct val="100000"/>
+              </a:lnSpc>
+              <a:spcBef>
+                <a:spcPts val="281"/>
+              </a:spcBef>
+              <a:buNone/>
+              <a:tabLst>
+                <a:tab algn="l" pos="0"/>
+              </a:tabLst>
+            </a:pPr>
+            <a:r>
+              <a:rPr b="0" lang="en-US" sz="1400" strike="noStrike" u="none">
+                <a:solidFill>
+                  <a:schemeClr val="dk1"/>
+                </a:solidFill>
+                <a:effectLst/>
+                <a:uFillTx/>
+                <a:latin typeface="Calibri"/>
+              </a:rPr>
+              <a:t>Click to edit Master text styles</a:t>
+            </a:r>
+            <a:endParaRPr b="0" lang="sv-SE" sz="1400" strike="noStrike" u="none">
+              <a:solidFill>
+                <a:srgbClr val="000000"/>
+              </a:solidFill>
+              <a:effectLst/>
+              <a:uFillTx/>
+              <a:latin typeface="Arial"/>
+            </a:endParaRPr>
+          </a:p>
+        </p:txBody>
+      </p:sp>
+      <p:sp>
+        <p:nvSpPr>
+          <p:cNvPr id="56" name="PlaceHolder 4"/>
+          <p:cNvSpPr>
+            <a:spLocks noGrp="1"/>
+          </p:cNvSpPr>
+          <p:nvPr>
+            <p:ph type="dt" idx="31"/>
+          </p:nvPr>
+        </p:nvSpPr>
+        <p:spPr>
+          <a:xfrm>
+            <a:off x="457200" y="6356520"/>
+            <a:ext cx="2131920" cy="363240"/>
+          </a:xfrm>
+          <a:prstGeom prst="rect">
+            <a:avLst/>
+          </a:prstGeom>
+          <a:noFill/>
+          <a:ln w="0">
+            <a:noFill/>
+          </a:ln>
+        </p:spPr>
+        <p:txBody>
+          <a:bodyPr lIns="91440" rIns="91440" tIns="45720" bIns="45720" anchor="ctr">
+            <a:noAutofit/>
+          </a:bodyPr>
+          <a:lstStyle>
+            <a:lvl1pPr indent="0" defTabSz="457200">
+              <a:lnSpc>
+                <a:spcPct val="100000"/>
+              </a:lnSpc>
+              <a:buNone/>
+              <a:tabLst>
+                <a:tab algn="l" pos="0"/>
+              </a:tabLst>
+              <a:defRPr b="0" lang="en-US" sz="1200" strike="noStrike" u="none">
+                <a:solidFill>
+                  <a:schemeClr val="dk1">
+                    <a:tint val="75000"/>
+                  </a:schemeClr>
+                </a:solidFill>
+                <a:effectLst/>
+                <a:uFillTx/>
+                <a:latin typeface="Calibri"/>
+              </a:defRPr>
+            </a:lvl1pPr>
+          </a:lstStyle>
+          <a:p>
+            <a:pPr indent="0" defTabSz="457200">
+              <a:lnSpc>
+                <a:spcPct val="100000"/>
+              </a:lnSpc>
+              <a:buNone/>
+              <a:tabLst>
+                <a:tab algn="l" pos="0"/>
+              </a:tabLst>
+            </a:pPr>
+            <a:r>
+              <a:rPr b="0" lang="en-US" sz="1200" strike="noStrike" u="none">
+                <a:solidFill>
+                  <a:schemeClr val="dk1">
+                    <a:tint val="75000"/>
+                  </a:schemeClr>
+                </a:solidFill>
+                <a:effectLst/>
+                <a:uFillTx/>
+                <a:latin typeface="Calibri"/>
+              </a:rPr>
+              <a:t>&lt;datum/tid&gt;</a:t>
+            </a:r>
+            <a:endParaRPr b="0" lang="sv-SE" sz="1200" strike="noStrike" u="none">
+              <a:solidFill>
+                <a:srgbClr val="000000"/>
+              </a:solidFill>
+              <a:effectLst/>
+              <a:uFillTx/>
+              <a:latin typeface="Times New Roman"/>
+            </a:endParaRPr>
+          </a:p>
+        </p:txBody>
+      </p:sp>
+      <p:sp>
+        <p:nvSpPr>
+          <p:cNvPr id="57" name="PlaceHolder 5"/>
+          <p:cNvSpPr>
+            <a:spLocks noGrp="1"/>
+          </p:cNvSpPr>
+          <p:nvPr>
+            <p:ph type="ftr" idx="32"/>
+          </p:nvPr>
+        </p:nvSpPr>
+        <p:spPr>
+          <a:xfrm>
+            <a:off x="3124080" y="6356520"/>
+            <a:ext cx="2893680" cy="363240"/>
+          </a:xfrm>
+          <a:prstGeom prst="rect">
+            <a:avLst/>
+          </a:prstGeom>
+          <a:noFill/>
+          <a:ln w="0">
+            <a:noFill/>
+          </a:ln>
+        </p:spPr>
+        <p:txBody>
+          <a:bodyPr lIns="91440" rIns="91440" tIns="45720" bIns="45720" anchor="ctr">
+            <a:noAutofit/>
+          </a:bodyPr>
+          <a:lstStyle>
+            <a:lvl1pPr indent="0" algn="ctr">
+              <a:lnSpc>
+                <a:spcPct val="100000"/>
+              </a:lnSpc>
+              <a:buNone/>
+              <a:tabLst>
+                <a:tab algn="l" pos="0"/>
+              </a:tabLst>
+              <a:defRPr b="0" lang="sv-SE" sz="1400" strike="noStrike" u="none">
+                <a:solidFill>
+                  <a:srgbClr val="000000"/>
+                </a:solidFill>
+                <a:effectLst/>
+                <a:uFillTx/>
+                <a:latin typeface="Times New Roman"/>
+              </a:defRPr>
+            </a:lvl1pPr>
+          </a:lstStyle>
+          <a:p>
+            <a:pPr indent="0" algn="ctr">
+              <a:lnSpc>
+                <a:spcPct val="100000"/>
+              </a:lnSpc>
+              <a:buNone/>
+              <a:tabLst>
+                <a:tab algn="l" pos="0"/>
+              </a:tabLst>
+            </a:pPr>
+            <a:r>
+              <a:rPr b="0" lang="sv-SE" sz="1400" strike="noStrike" u="none">
+                <a:solidFill>
+                  <a:srgbClr val="000000"/>
+                </a:solidFill>
+                <a:effectLst/>
+                <a:uFillTx/>
+                <a:latin typeface="Times New Roman"/>
+              </a:rPr>
+              <a:t>&lt;sidfot&gt;</a:t>
+            </a:r>
+            <a:endParaRPr b="0" lang="sv-SE" sz="1400" strike="noStrike" u="none">
+              <a:solidFill>
+                <a:srgbClr val="000000"/>
+              </a:solidFill>
+              <a:effectLst/>
+              <a:uFillTx/>
+              <a:latin typeface="Times New Roman"/>
+            </a:endParaRPr>
+          </a:p>
+        </p:txBody>
+      </p:sp>
+      <p:sp>
+        <p:nvSpPr>
+          <p:cNvPr id="58" name="PlaceHolder 6"/>
+          <p:cNvSpPr>
+            <a:spLocks noGrp="1"/>
+          </p:cNvSpPr>
+          <p:nvPr>
+            <p:ph type="sldNum" idx="33"/>
+          </p:nvPr>
+        </p:nvSpPr>
+        <p:spPr>
+          <a:xfrm>
+            <a:off x="6553080" y="6356520"/>
+            <a:ext cx="2131920" cy="363240"/>
+          </a:xfrm>
+          <a:prstGeom prst="rect">
+            <a:avLst/>
+          </a:prstGeom>
+          <a:noFill/>
+          <a:ln w="0">
+            <a:noFill/>
+          </a:ln>
+        </p:spPr>
+        <p:txBody>
+          <a:bodyPr lIns="91440" rIns="91440" tIns="45720" bIns="45720" anchor="ctr">
+            <a:noAutofit/>
+          </a:bodyPr>
+          <a:lstStyle>
+            <a:lvl1pPr indent="0" algn="r" defTabSz="457200">
+              <a:lnSpc>
+                <a:spcPct val="100000"/>
+              </a:lnSpc>
+              <a:buNone/>
+              <a:tabLst>
+                <a:tab algn="l" pos="0"/>
+              </a:tabLst>
+              <a:defRPr b="0" lang="en-US" sz="1200" strike="noStrike" u="none">
+                <a:solidFill>
+                  <a:schemeClr val="dk1">
+                    <a:tint val="75000"/>
+                  </a:schemeClr>
+                </a:solidFill>
+                <a:effectLst/>
+                <a:uFillTx/>
+                <a:latin typeface="Calibri"/>
+              </a:defRPr>
+            </a:lvl1pPr>
+          </a:lstStyle>
+          <a:p>
+            <a:pPr indent="0" algn="r" defTabSz="457200">
+              <a:lnSpc>
+                <a:spcPct val="100000"/>
+              </a:lnSpc>
+              <a:buNone/>
+              <a:tabLst>
+                <a:tab algn="l" pos="0"/>
+              </a:tabLst>
+            </a:pPr>
+            <a:fld id="{CB004C8A-3B8A-41D5-BC45-7B11F3581068}" type="slidenum">
+              <a:rPr b="0" lang="en-US" sz="1200" strike="noStrike" u="none">
+                <a:solidFill>
+                  <a:schemeClr val="dk1">
+                    <a:tint val="75000"/>
+                  </a:schemeClr>
+                </a:solidFill>
+                <a:effectLst/>
+                <a:uFillTx/>
+                <a:latin typeface="Calibri"/>
+              </a:rPr>
+              <a:t>&lt;nummer&gt;</a:t>
+            </a:fld>
+            <a:endParaRPr b="0" lang="sv-SE" sz="1200" strike="noStrike" u="none">
+              <a:solidFill>
+                <a:srgbClr val="000000"/>
+              </a:solidFill>
+              <a:effectLst/>
+              <a:uFillTx/>
+              <a:latin typeface="Times New Roman"/>
+            </a:endParaRPr>
+          </a:p>
+        </p:txBody>
+      </p:sp>
+    </p:spTree>
+  </p:cSld>
+</p:sldLayout>
+</file>
+
+<file path=ppt/slideLayouts/slideLayout2.xml><?xml version="1.0" encoding="utf-8"?>
 <p:sldLayout xmlns:a="http://schemas.openxmlformats.org/drawingml/2006/main" xmlns:p="http://schemas.openxmlformats.org/presentationml/2006/main" xmlns:r="http://schemas.openxmlformats.org/officeDocument/2006/relationships" xmlns:p14="http://schemas.microsoft.com/office/powerpoint/2010/main" xmlns:p15="http://schemas.microsoft.com/office/powerpoint/2012/main" xmlns:mc="http://schemas.openxmlformats.org/markup-compatibility/2006" type="title" preserve="1">
   <p:cSld name="Title Slide">
     <p:bg>
@@ -1112,7 +2979,7 @@
       </p:grpSpPr>
       <p:sp>
         <p:nvSpPr>
-          <p:cNvPr id="0" name="PlaceHolder 1"/>
+          <p:cNvPr id="6" name="PlaceHolder 1"/>
           <p:cNvSpPr>
             <a:spLocks noGrp="1"/>
           </p:cNvSpPr>
@@ -1123,7 +2990,7 @@
         <p:spPr>
           <a:xfrm>
             <a:off x="685800" y="2130480"/>
-            <a:ext cx="7772040" cy="1469520"/>
+            <a:ext cx="7770600" cy="1468080"/>
           </a:xfrm>
           <a:prstGeom prst="rect">
             <a:avLst/>
@@ -1143,6 +3010,9 @@
                 <a:spcPct val="100000"/>
               </a:lnSpc>
               <a:buNone/>
+              <a:tabLst>
+                <a:tab algn="l" pos="0"/>
+              </a:tabLst>
             </a:pPr>
             <a:r>
               <a:rPr b="0" lang="en-US" sz="4400" strike="noStrike" u="none">
@@ -1155,31 +3025,31 @@
               </a:rPr>
               <a:t>Click to edit Master title style</a:t>
             </a:r>
-            <a:endParaRPr b="0" lang="en-US" sz="4400" strike="noStrike" u="none">
-              <a:solidFill>
-                <a:schemeClr val="dk1"/>
-              </a:solidFill>
-              <a:effectLst/>
-              <a:uFillTx/>
-              <a:latin typeface="Calibri"/>
-            </a:endParaRPr>
-          </a:p>
-        </p:txBody>
-      </p:sp>
-      <p:sp>
-        <p:nvSpPr>
-          <p:cNvPr id="1" name="PlaceHolder 2"/>
+            <a:endParaRPr b="0" lang="sv-SE" sz="4400" strike="noStrike" u="none">
+              <a:solidFill>
+                <a:srgbClr val="000000"/>
+              </a:solidFill>
+              <a:effectLst/>
+              <a:uFillTx/>
+              <a:latin typeface="Arial"/>
+            </a:endParaRPr>
+          </a:p>
+        </p:txBody>
+      </p:sp>
+      <p:sp>
+        <p:nvSpPr>
+          <p:cNvPr id="7" name="PlaceHolder 2"/>
           <p:cNvSpPr>
             <a:spLocks noGrp="1"/>
           </p:cNvSpPr>
           <p:nvPr>
-            <p:ph type="dt" idx="1"/>
+            <p:ph type="dt" idx="4"/>
           </p:nvPr>
         </p:nvSpPr>
         <p:spPr>
           <a:xfrm>
             <a:off x="457200" y="6356520"/>
-            <a:ext cx="2133360" cy="364680"/>
+            <a:ext cx="2131920" cy="363240"/>
           </a:xfrm>
           <a:prstGeom prst="rect">
             <a:avLst/>
@@ -1199,6 +3069,9 @@
                 <a:spcPct val="100000"/>
               </a:lnSpc>
               <a:buNone/>
+              <a:tabLst>
+                <a:tab algn="l" pos="0"/>
+              </a:tabLst>
               <a:defRPr b="0" lang="en-US" sz="1200" strike="noStrike" u="none">
                 <a:solidFill>
                   <a:schemeClr val="dk1">
@@ -1217,6 +3090,9 @@
                 <a:spcPct val="100000"/>
               </a:lnSpc>
               <a:buNone/>
+              <a:tabLst>
+                <a:tab algn="l" pos="0"/>
+              </a:tabLst>
             </a:pPr>
             <a:r>
               <a:rPr b="0" lang="en-US" sz="1200" strike="noStrike" u="none">
@@ -1244,18 +3120,18 @@
       </p:sp>
       <p:sp>
         <p:nvSpPr>
-          <p:cNvPr id="2" name="PlaceHolder 3"/>
+          <p:cNvPr id="8" name="PlaceHolder 3"/>
           <p:cNvSpPr>
             <a:spLocks noGrp="1"/>
           </p:cNvSpPr>
           <p:nvPr>
-            <p:ph type="ftr" idx="2"/>
+            <p:ph type="ftr" idx="5"/>
           </p:nvPr>
         </p:nvSpPr>
         <p:spPr>
           <a:xfrm>
             <a:off x="3124080" y="6356520"/>
-            <a:ext cx="2895120" cy="364680"/>
+            <a:ext cx="2893680" cy="363240"/>
           </a:xfrm>
           <a:prstGeom prst="rect">
             <a:avLst/>
@@ -1271,7 +3147,13 @@
           </a:bodyPr>
           <a:lstStyle>
             <a:lvl1pPr indent="0" algn="ctr">
+              <a:lnSpc>
+                <a:spcPct val="100000"/>
+              </a:lnSpc>
               <a:buNone/>
+              <a:tabLst>
+                <a:tab algn="l" pos="0"/>
+              </a:tabLst>
               <a:defRPr b="0" lang="sv-SE" sz="1400" strike="noStrike" u="none">
                 <a:solidFill>
                   <a:srgbClr val="000000"/>
@@ -1284,7 +3166,13 @@
           </a:lstStyle>
           <a:p>
             <a:pPr indent="0" algn="ctr">
+              <a:lnSpc>
+                <a:spcPct val="100000"/>
+              </a:lnSpc>
               <a:buNone/>
+              <a:tabLst>
+                <a:tab algn="l" pos="0"/>
+              </a:tabLst>
             </a:pPr>
             <a:r>
               <a:rPr b="0" lang="sv-SE" sz="1400" strike="noStrike" u="none">
@@ -1310,18 +3198,18 @@
       </p:sp>
       <p:sp>
         <p:nvSpPr>
-          <p:cNvPr id="3" name="PlaceHolder 4"/>
+          <p:cNvPr id="9" name="PlaceHolder 4"/>
           <p:cNvSpPr>
             <a:spLocks noGrp="1"/>
           </p:cNvSpPr>
           <p:nvPr>
-            <p:ph type="sldNum" idx="3"/>
+            <p:ph type="sldNum" idx="6"/>
           </p:nvPr>
         </p:nvSpPr>
         <p:spPr>
           <a:xfrm>
             <a:off x="6553080" y="6356520"/>
-            <a:ext cx="2133360" cy="364680"/>
+            <a:ext cx="2131920" cy="363240"/>
           </a:xfrm>
           <a:prstGeom prst="rect">
             <a:avLst/>
@@ -1341,6 +3229,9 @@
                 <a:spcPct val="100000"/>
               </a:lnSpc>
               <a:buNone/>
+              <a:tabLst>
+                <a:tab algn="l" pos="0"/>
+              </a:tabLst>
               <a:defRPr b="0" lang="en-US" sz="1200" strike="noStrike" u="none">
                 <a:solidFill>
                   <a:schemeClr val="dk1">
@@ -1359,8 +3250,11 @@
                 <a:spcPct val="100000"/>
               </a:lnSpc>
               <a:buNone/>
-            </a:pPr>
-            <a:fld id="{3EEC9A13-F66E-42D7-BC13-73E7AABAD995}" type="slidenum">
+              <a:tabLst>
+                <a:tab algn="l" pos="0"/>
+              </a:tabLst>
+            </a:pPr>
+            <a:fld id="{C8B62C7D-D9E8-4AC6-8558-A8713794C918}" type="slidenum">
               <a:rPr b="0" lang="en-US" sz="1200" strike="noStrike" u="none">
                 <a:solidFill>
                   <a:schemeClr val="dk1">
@@ -1389,1189 +3283,7 @@
 </p:sldLayout>
 </file>
 
-<file path=ppt/slideLayouts/slideLayout10.xml><?xml version="1.0" encoding="utf-8"?>
-<p:sldLayout xmlns:a="http://schemas.openxmlformats.org/drawingml/2006/main" xmlns:p="http://schemas.openxmlformats.org/presentationml/2006/main" xmlns:r="http://schemas.openxmlformats.org/officeDocument/2006/relationships" xmlns:p14="http://schemas.microsoft.com/office/powerpoint/2010/main" xmlns:p15="http://schemas.microsoft.com/office/powerpoint/2012/main" xmlns:mc="http://schemas.openxmlformats.org/markup-compatibility/2006" type="blank" preserve="1">
-  <p:cSld name="Content with Caption">
-    <p:bg>
-      <p:bgPr>
-        <a:solidFill>
-          <a:srgbClr val="ffffff"/>
-        </a:solidFill>
-      </p:bgPr>
-    </p:bg>
-    <p:spTree>
-      <p:nvGrpSpPr>
-        <p:cNvPr id="1" name=""/>
-        <p:cNvGrpSpPr/>
-        <p:nvPr/>
-      </p:nvGrpSpPr>
-      <p:grpSpPr>
-        <a:xfrm>
-          <a:off x="0" y="0"/>
-          <a:ext cx="0" cy="0"/>
-          <a:chOff x="0" y="0"/>
-          <a:chExt cx="0" cy="0"/>
-        </a:xfrm>
-      </p:grpSpPr>
-      <p:sp>
-        <p:nvSpPr>
-          <p:cNvPr id="47" name="PlaceHolder 1"/>
-          <p:cNvSpPr>
-            <a:spLocks noGrp="1"/>
-          </p:cNvSpPr>
-          <p:nvPr>
-            <p:ph type="title"/>
-          </p:nvPr>
-        </p:nvSpPr>
-        <p:spPr>
-          <a:xfrm>
-            <a:off x="457200" y="272880"/>
-            <a:ext cx="3007800" cy="1161720"/>
-          </a:xfrm>
-          <a:prstGeom prst="rect">
-            <a:avLst/>
-          </a:prstGeom>
-          <a:noFill/>
-          <a:ln w="0">
-            <a:noFill/>
-          </a:ln>
-        </p:spPr>
-        <p:txBody>
-          <a:bodyPr lIns="91440" rIns="91440" tIns="45720" bIns="45720" anchor="b">
-            <a:noAutofit/>
-          </a:bodyPr>
-          <a:p>
-            <a:pPr indent="0" defTabSz="457200">
-              <a:lnSpc>
-                <a:spcPct val="100000"/>
-              </a:lnSpc>
-              <a:buNone/>
-            </a:pPr>
-            <a:r>
-              <a:rPr b="1" lang="en-US" sz="2000" strike="noStrike" u="none">
-                <a:solidFill>
-                  <a:schemeClr val="dk1"/>
-                </a:solidFill>
-                <a:effectLst/>
-                <a:uFillTx/>
-                <a:latin typeface="Calibri"/>
-              </a:rPr>
-              <a:t>Click to edit Master title style</a:t>
-            </a:r>
-            <a:endParaRPr b="0" lang="en-US" sz="2000" strike="noStrike" u="none">
-              <a:solidFill>
-                <a:schemeClr val="dk1"/>
-              </a:solidFill>
-              <a:effectLst/>
-              <a:uFillTx/>
-              <a:latin typeface="Calibri"/>
-            </a:endParaRPr>
-          </a:p>
-        </p:txBody>
-      </p:sp>
-      <p:sp>
-        <p:nvSpPr>
-          <p:cNvPr id="48" name="PlaceHolder 2"/>
-          <p:cNvSpPr>
-            <a:spLocks noGrp="1"/>
-          </p:cNvSpPr>
-          <p:nvPr>
-            <p:ph type="body"/>
-          </p:nvPr>
-        </p:nvSpPr>
-        <p:spPr>
-          <a:xfrm>
-            <a:off x="3575160" y="272880"/>
-            <a:ext cx="5111280" cy="5852880"/>
-          </a:xfrm>
-          <a:prstGeom prst="rect">
-            <a:avLst/>
-          </a:prstGeom>
-          <a:noFill/>
-          <a:ln w="0">
-            <a:noFill/>
-          </a:ln>
-        </p:spPr>
-        <p:txBody>
-          <a:bodyPr lIns="91440" rIns="91440" tIns="45720" bIns="45720" anchor="t">
-            <a:noAutofit/>
-          </a:bodyPr>
-          <a:p>
-            <a:pPr marL="343080" indent="-343080" defTabSz="457200">
-              <a:lnSpc>
-                <a:spcPct val="100000"/>
-              </a:lnSpc>
-              <a:spcBef>
-                <a:spcPts val="641"/>
-              </a:spcBef>
-              <a:buClr>
-                <a:srgbClr val="000000"/>
-              </a:buClr>
-              <a:buFont typeface="Arial"/>
-              <a:buChar char="•"/>
-            </a:pPr>
-            <a:r>
-              <a:rPr b="0" lang="en-US" sz="3200" strike="noStrike" u="none">
-                <a:solidFill>
-                  <a:schemeClr val="dk1"/>
-                </a:solidFill>
-                <a:effectLst/>
-                <a:uFillTx/>
-                <a:latin typeface="Calibri"/>
-              </a:rPr>
-              <a:t>Click to edit Master text styles</a:t>
-            </a:r>
-            <a:endParaRPr b="0" lang="en-US" sz="3200" strike="noStrike" u="none">
-              <a:solidFill>
-                <a:schemeClr val="dk1"/>
-              </a:solidFill>
-              <a:effectLst/>
-              <a:uFillTx/>
-              <a:latin typeface="Calibri"/>
-            </a:endParaRPr>
-          </a:p>
-          <a:p>
-            <a:pPr lvl="1" marL="743040" indent="-285840" defTabSz="457200">
-              <a:lnSpc>
-                <a:spcPct val="100000"/>
-              </a:lnSpc>
-              <a:spcBef>
-                <a:spcPts val="561"/>
-              </a:spcBef>
-              <a:buClr>
-                <a:srgbClr val="000000"/>
-              </a:buClr>
-              <a:buFont typeface="Arial"/>
-              <a:buChar char="–"/>
-            </a:pPr>
-            <a:r>
-              <a:rPr b="0" lang="en-US" sz="2800" strike="noStrike" u="none">
-                <a:solidFill>
-                  <a:schemeClr val="dk1"/>
-                </a:solidFill>
-                <a:effectLst/>
-                <a:uFillTx/>
-                <a:latin typeface="Calibri"/>
-              </a:rPr>
-              <a:t>Second level</a:t>
-            </a:r>
-            <a:endParaRPr b="0" lang="en-US" sz="2800" strike="noStrike" u="none">
-              <a:solidFill>
-                <a:schemeClr val="dk1"/>
-              </a:solidFill>
-              <a:effectLst/>
-              <a:uFillTx/>
-              <a:latin typeface="Calibri"/>
-            </a:endParaRPr>
-          </a:p>
-          <a:p>
-            <a:pPr lvl="2" marL="1143000" indent="-228600" defTabSz="457200">
-              <a:lnSpc>
-                <a:spcPct val="100000"/>
-              </a:lnSpc>
-              <a:spcBef>
-                <a:spcPts val="479"/>
-              </a:spcBef>
-              <a:buClr>
-                <a:srgbClr val="000000"/>
-              </a:buClr>
-              <a:buFont typeface="Arial"/>
-              <a:buChar char="•"/>
-            </a:pPr>
-            <a:r>
-              <a:rPr b="0" lang="en-US" sz="2400" strike="noStrike" u="none">
-                <a:solidFill>
-                  <a:schemeClr val="dk1"/>
-                </a:solidFill>
-                <a:effectLst/>
-                <a:uFillTx/>
-                <a:latin typeface="Calibri"/>
-              </a:rPr>
-              <a:t>Third level</a:t>
-            </a:r>
-            <a:endParaRPr b="0" lang="en-US" sz="2400" strike="noStrike" u="none">
-              <a:solidFill>
-                <a:schemeClr val="dk1"/>
-              </a:solidFill>
-              <a:effectLst/>
-              <a:uFillTx/>
-              <a:latin typeface="Calibri"/>
-            </a:endParaRPr>
-          </a:p>
-          <a:p>
-            <a:pPr lvl="3" marL="1600200" indent="-228600" defTabSz="457200">
-              <a:lnSpc>
-                <a:spcPct val="100000"/>
-              </a:lnSpc>
-              <a:spcBef>
-                <a:spcPts val="400"/>
-              </a:spcBef>
-              <a:buClr>
-                <a:srgbClr val="000000"/>
-              </a:buClr>
-              <a:buFont typeface="Arial"/>
-              <a:buChar char="–"/>
-            </a:pPr>
-            <a:r>
-              <a:rPr b="0" lang="en-US" sz="2000" strike="noStrike" u="none">
-                <a:solidFill>
-                  <a:schemeClr val="dk1"/>
-                </a:solidFill>
-                <a:effectLst/>
-                <a:uFillTx/>
-                <a:latin typeface="Calibri"/>
-              </a:rPr>
-              <a:t>Fourth level</a:t>
-            </a:r>
-            <a:endParaRPr b="0" lang="en-US" sz="2000" strike="noStrike" u="none">
-              <a:solidFill>
-                <a:schemeClr val="dk1"/>
-              </a:solidFill>
-              <a:effectLst/>
-              <a:uFillTx/>
-              <a:latin typeface="Calibri"/>
-            </a:endParaRPr>
-          </a:p>
-          <a:p>
-            <a:pPr lvl="4" marL="2057400" indent="-228600" defTabSz="457200">
-              <a:lnSpc>
-                <a:spcPct val="100000"/>
-              </a:lnSpc>
-              <a:spcBef>
-                <a:spcPts val="400"/>
-              </a:spcBef>
-              <a:buClr>
-                <a:srgbClr val="000000"/>
-              </a:buClr>
-              <a:buFont typeface="Arial"/>
-              <a:buChar char="»"/>
-            </a:pPr>
-            <a:r>
-              <a:rPr b="0" lang="en-US" sz="2000" strike="noStrike" u="none">
-                <a:solidFill>
-                  <a:schemeClr val="dk1"/>
-                </a:solidFill>
-                <a:effectLst/>
-                <a:uFillTx/>
-                <a:latin typeface="Calibri"/>
-              </a:rPr>
-              <a:t>Fifth level</a:t>
-            </a:r>
-            <a:endParaRPr b="0" lang="en-US" sz="2000" strike="noStrike" u="none">
-              <a:solidFill>
-                <a:schemeClr val="dk1"/>
-              </a:solidFill>
-              <a:effectLst/>
-              <a:uFillTx/>
-              <a:latin typeface="Calibri"/>
-            </a:endParaRPr>
-          </a:p>
-        </p:txBody>
-      </p:sp>
-      <p:sp>
-        <p:nvSpPr>
-          <p:cNvPr id="49" name="PlaceHolder 3"/>
-          <p:cNvSpPr>
-            <a:spLocks noGrp="1"/>
-          </p:cNvSpPr>
-          <p:nvPr>
-            <p:ph type="body"/>
-          </p:nvPr>
-        </p:nvSpPr>
-        <p:spPr>
-          <a:xfrm>
-            <a:off x="457200" y="1434960"/>
-            <a:ext cx="3007800" cy="4690800"/>
-          </a:xfrm>
-          <a:prstGeom prst="rect">
-            <a:avLst/>
-          </a:prstGeom>
-          <a:noFill/>
-          <a:ln w="0">
-            <a:noFill/>
-          </a:ln>
-        </p:spPr>
-        <p:txBody>
-          <a:bodyPr lIns="91440" rIns="91440" tIns="45720" bIns="45720" anchor="t">
-            <a:noAutofit/>
-          </a:bodyPr>
-          <a:p>
-            <a:pPr indent="0" defTabSz="457200">
-              <a:lnSpc>
-                <a:spcPct val="100000"/>
-              </a:lnSpc>
-              <a:spcBef>
-                <a:spcPts val="281"/>
-              </a:spcBef>
-              <a:buNone/>
-              <a:tabLst>
-                <a:tab algn="l" pos="0"/>
-              </a:tabLst>
-            </a:pPr>
-            <a:r>
-              <a:rPr b="0" lang="en-US" sz="1400" strike="noStrike" u="none">
-                <a:solidFill>
-                  <a:schemeClr val="dk1"/>
-                </a:solidFill>
-                <a:effectLst/>
-                <a:uFillTx/>
-                <a:latin typeface="Calibri"/>
-              </a:rPr>
-              <a:t>Click to edit Master text styles</a:t>
-            </a:r>
-            <a:endParaRPr b="0" lang="en-US" sz="1400" strike="noStrike" u="none">
-              <a:solidFill>
-                <a:schemeClr val="dk1"/>
-              </a:solidFill>
-              <a:effectLst/>
-              <a:uFillTx/>
-              <a:latin typeface="Calibri"/>
-            </a:endParaRPr>
-          </a:p>
-        </p:txBody>
-      </p:sp>
-      <p:sp>
-        <p:nvSpPr>
-          <p:cNvPr id="50" name="PlaceHolder 4"/>
-          <p:cNvSpPr>
-            <a:spLocks noGrp="1"/>
-          </p:cNvSpPr>
-          <p:nvPr>
-            <p:ph type="dt" idx="28"/>
-          </p:nvPr>
-        </p:nvSpPr>
-        <p:spPr>
-          <a:xfrm>
-            <a:off x="457200" y="6356520"/>
-            <a:ext cx="2133360" cy="364680"/>
-          </a:xfrm>
-          <a:prstGeom prst="rect">
-            <a:avLst/>
-          </a:prstGeom>
-          <a:noFill/>
-          <a:ln w="0">
-            <a:noFill/>
-          </a:ln>
-        </p:spPr>
-        <p:txBody>
-          <a:bodyPr lIns="91440" rIns="91440" tIns="45720" bIns="45720" anchor="ctr">
-            <a:noAutofit/>
-          </a:bodyPr>
-          <a:lstStyle>
-            <a:lvl1pPr indent="0" defTabSz="457200">
-              <a:lnSpc>
-                <a:spcPct val="100000"/>
-              </a:lnSpc>
-              <a:buNone/>
-              <a:defRPr b="0" lang="en-US" sz="1200" strike="noStrike" u="none">
-                <a:solidFill>
-                  <a:schemeClr val="dk1">
-                    <a:tint val="75000"/>
-                  </a:schemeClr>
-                </a:solidFill>
-                <a:effectLst/>
-                <a:uFillTx/>
-                <a:latin typeface="Calibri"/>
-              </a:defRPr>
-            </a:lvl1pPr>
-          </a:lstStyle>
-          <a:p>
-            <a:pPr indent="0" defTabSz="457200">
-              <a:lnSpc>
-                <a:spcPct val="100000"/>
-              </a:lnSpc>
-              <a:buNone/>
-            </a:pPr>
-            <a:r>
-              <a:rPr b="0" lang="en-US" sz="1200" strike="noStrike" u="none">
-                <a:solidFill>
-                  <a:schemeClr val="dk1">
-                    <a:tint val="75000"/>
-                  </a:schemeClr>
-                </a:solidFill>
-                <a:effectLst/>
-                <a:uFillTx/>
-                <a:latin typeface="Calibri"/>
-              </a:rPr>
-              <a:t>&lt;datum/tid&gt;</a:t>
-            </a:r>
-            <a:endParaRPr b="0" lang="sv-SE" sz="1200" strike="noStrike" u="none">
-              <a:solidFill>
-                <a:srgbClr val="000000"/>
-              </a:solidFill>
-              <a:effectLst/>
-              <a:uFillTx/>
-              <a:latin typeface="Times New Roman"/>
-            </a:endParaRPr>
-          </a:p>
-        </p:txBody>
-      </p:sp>
-      <p:sp>
-        <p:nvSpPr>
-          <p:cNvPr id="51" name="PlaceHolder 5"/>
-          <p:cNvSpPr>
-            <a:spLocks noGrp="1"/>
-          </p:cNvSpPr>
-          <p:nvPr>
-            <p:ph type="ftr" idx="29"/>
-          </p:nvPr>
-        </p:nvSpPr>
-        <p:spPr>
-          <a:xfrm>
-            <a:off x="3124080" y="6356520"/>
-            <a:ext cx="2895120" cy="364680"/>
-          </a:xfrm>
-          <a:prstGeom prst="rect">
-            <a:avLst/>
-          </a:prstGeom>
-          <a:noFill/>
-          <a:ln w="0">
-            <a:noFill/>
-          </a:ln>
-        </p:spPr>
-        <p:txBody>
-          <a:bodyPr lIns="91440" rIns="91440" tIns="45720" bIns="45720" anchor="ctr">
-            <a:noAutofit/>
-          </a:bodyPr>
-          <a:lstStyle>
-            <a:lvl1pPr indent="0" algn="ctr">
-              <a:buNone/>
-              <a:defRPr b="0" lang="sv-SE" sz="1400" strike="noStrike" u="none">
-                <a:solidFill>
-                  <a:srgbClr val="000000"/>
-                </a:solidFill>
-                <a:effectLst/>
-                <a:uFillTx/>
-                <a:latin typeface="Times New Roman"/>
-              </a:defRPr>
-            </a:lvl1pPr>
-          </a:lstStyle>
-          <a:p>
-            <a:pPr indent="0" algn="ctr">
-              <a:buNone/>
-            </a:pPr>
-            <a:r>
-              <a:rPr b="0" lang="sv-SE" sz="1400" strike="noStrike" u="none">
-                <a:solidFill>
-                  <a:srgbClr val="000000"/>
-                </a:solidFill>
-                <a:effectLst/>
-                <a:uFillTx/>
-                <a:latin typeface="Times New Roman"/>
-              </a:rPr>
-              <a:t>&lt;sidfot&gt;</a:t>
-            </a:r>
-            <a:endParaRPr b="0" lang="sv-SE" sz="1400" strike="noStrike" u="none">
-              <a:solidFill>
-                <a:srgbClr val="000000"/>
-              </a:solidFill>
-              <a:effectLst/>
-              <a:uFillTx/>
-              <a:latin typeface="Times New Roman"/>
-            </a:endParaRPr>
-          </a:p>
-        </p:txBody>
-      </p:sp>
-      <p:sp>
-        <p:nvSpPr>
-          <p:cNvPr id="52" name="PlaceHolder 6"/>
-          <p:cNvSpPr>
-            <a:spLocks noGrp="1"/>
-          </p:cNvSpPr>
-          <p:nvPr>
-            <p:ph type="sldNum" idx="30"/>
-          </p:nvPr>
-        </p:nvSpPr>
-        <p:spPr>
-          <a:xfrm>
-            <a:off x="6553080" y="6356520"/>
-            <a:ext cx="2133360" cy="364680"/>
-          </a:xfrm>
-          <a:prstGeom prst="rect">
-            <a:avLst/>
-          </a:prstGeom>
-          <a:noFill/>
-          <a:ln w="0">
-            <a:noFill/>
-          </a:ln>
-        </p:spPr>
-        <p:txBody>
-          <a:bodyPr lIns="91440" rIns="91440" tIns="45720" bIns="45720" anchor="ctr">
-            <a:noAutofit/>
-          </a:bodyPr>
-          <a:lstStyle>
-            <a:lvl1pPr indent="0" algn="r" defTabSz="457200">
-              <a:lnSpc>
-                <a:spcPct val="100000"/>
-              </a:lnSpc>
-              <a:buNone/>
-              <a:defRPr b="0" lang="en-US" sz="1200" strike="noStrike" u="none">
-                <a:solidFill>
-                  <a:schemeClr val="dk1">
-                    <a:tint val="75000"/>
-                  </a:schemeClr>
-                </a:solidFill>
-                <a:effectLst/>
-                <a:uFillTx/>
-                <a:latin typeface="Calibri"/>
-              </a:defRPr>
-            </a:lvl1pPr>
-          </a:lstStyle>
-          <a:p>
-            <a:pPr indent="0" algn="r" defTabSz="457200">
-              <a:lnSpc>
-                <a:spcPct val="100000"/>
-              </a:lnSpc>
-              <a:buNone/>
-            </a:pPr>
-            <a:fld id="{0B313936-C8F0-4BFE-B8AB-BE4613256452}" type="slidenum">
-              <a:rPr b="0" lang="en-US" sz="1200" strike="noStrike" u="none">
-                <a:solidFill>
-                  <a:schemeClr val="dk1">
-                    <a:tint val="75000"/>
-                  </a:schemeClr>
-                </a:solidFill>
-                <a:effectLst/>
-                <a:uFillTx/>
-                <a:latin typeface="Calibri"/>
-              </a:rPr>
-              <a:t>&lt;nummer&gt;</a:t>
-            </a:fld>
-            <a:endParaRPr b="0" lang="sv-SE" sz="1200" strike="noStrike" u="none">
-              <a:solidFill>
-                <a:srgbClr val="000000"/>
-              </a:solidFill>
-              <a:effectLst/>
-              <a:uFillTx/>
-              <a:latin typeface="Times New Roman"/>
-            </a:endParaRPr>
-          </a:p>
-        </p:txBody>
-      </p:sp>
-    </p:spTree>
-  </p:cSld>
-</p:sldLayout>
-</file>
-
-<file path=ppt/slideLayouts/slideLayout11.xml><?xml version="1.0" encoding="utf-8"?>
-<p:sldLayout xmlns:a="http://schemas.openxmlformats.org/drawingml/2006/main" xmlns:p="http://schemas.openxmlformats.org/presentationml/2006/main" xmlns:r="http://schemas.openxmlformats.org/officeDocument/2006/relationships" xmlns:p14="http://schemas.microsoft.com/office/powerpoint/2010/main" xmlns:p15="http://schemas.microsoft.com/office/powerpoint/2012/main" xmlns:mc="http://schemas.openxmlformats.org/markup-compatibility/2006" type="blank" preserve="1">
-  <p:cSld name="Picture with Caption">
-    <p:bg>
-      <p:bgPr>
-        <a:solidFill>
-          <a:srgbClr val="ffffff"/>
-        </a:solidFill>
-      </p:bgPr>
-    </p:bg>
-    <p:spTree>
-      <p:nvGrpSpPr>
-        <p:cNvPr id="1" name=""/>
-        <p:cNvGrpSpPr/>
-        <p:nvPr/>
-      </p:nvGrpSpPr>
-      <p:grpSpPr>
-        <a:xfrm>
-          <a:off x="0" y="0"/>
-          <a:ext cx="0" cy="0"/>
-          <a:chOff x="0" y="0"/>
-          <a:chExt cx="0" cy="0"/>
-        </a:xfrm>
-      </p:grpSpPr>
-      <p:sp>
-        <p:nvSpPr>
-          <p:cNvPr id="53" name="PlaceHolder 1"/>
-          <p:cNvSpPr>
-            <a:spLocks noGrp="1"/>
-          </p:cNvSpPr>
-          <p:nvPr>
-            <p:ph type="title"/>
-          </p:nvPr>
-        </p:nvSpPr>
-        <p:spPr>
-          <a:xfrm>
-            <a:off x="1792440" y="4800600"/>
-            <a:ext cx="5486040" cy="566280"/>
-          </a:xfrm>
-          <a:prstGeom prst="rect">
-            <a:avLst/>
-          </a:prstGeom>
-          <a:noFill/>
-          <a:ln w="0">
-            <a:noFill/>
-          </a:ln>
-        </p:spPr>
-        <p:txBody>
-          <a:bodyPr lIns="91440" rIns="91440" tIns="45720" bIns="45720" anchor="b">
-            <a:noAutofit/>
-          </a:bodyPr>
-          <a:p>
-            <a:pPr indent="0" defTabSz="457200">
-              <a:lnSpc>
-                <a:spcPct val="100000"/>
-              </a:lnSpc>
-              <a:buNone/>
-            </a:pPr>
-            <a:r>
-              <a:rPr b="1" lang="en-US" sz="2000" strike="noStrike" u="none">
-                <a:solidFill>
-                  <a:schemeClr val="dk1"/>
-                </a:solidFill>
-                <a:effectLst/>
-                <a:uFillTx/>
-                <a:latin typeface="Calibri"/>
-              </a:rPr>
-              <a:t>Click to edit Master title style</a:t>
-            </a:r>
-            <a:endParaRPr b="0" lang="en-US" sz="2000" strike="noStrike" u="none">
-              <a:solidFill>
-                <a:schemeClr val="dk1"/>
-              </a:solidFill>
-              <a:effectLst/>
-              <a:uFillTx/>
-              <a:latin typeface="Calibri"/>
-            </a:endParaRPr>
-          </a:p>
-        </p:txBody>
-      </p:sp>
-      <p:sp>
-        <p:nvSpPr>
-          <p:cNvPr id="54" name="PlaceHolder 2"/>
-          <p:cNvSpPr>
-            <a:spLocks noGrp="1"/>
-          </p:cNvSpPr>
-          <p:nvPr>
-            <p:ph type="body"/>
-          </p:nvPr>
-        </p:nvSpPr>
-        <p:spPr>
-          <a:xfrm>
-            <a:off x="1792440" y="612720"/>
-            <a:ext cx="5486040" cy="4114440"/>
-          </a:xfrm>
-          <a:prstGeom prst="rect">
-            <a:avLst/>
-          </a:prstGeom>
-          <a:noFill/>
-          <a:ln w="0">
-            <a:noFill/>
-          </a:ln>
-        </p:spPr>
-        <p:txBody>
-          <a:bodyPr lIns="90000" rIns="90000" tIns="45000" bIns="45000" anchor="t">
-            <a:noAutofit/>
-          </a:bodyPr>
-          <a:p>
-            <a:pPr marL="432000" indent="-324000">
-              <a:spcBef>
-                <a:spcPts val="1417"/>
-              </a:spcBef>
-              <a:buClr>
-                <a:srgbClr val="000000"/>
-              </a:buClr>
-              <a:buSzPct val="45000"/>
-              <a:buFont typeface="Wingdings" charset="2"/>
-              <a:buChar char=""/>
-            </a:pPr>
-            <a:r>
-              <a:rPr b="0" lang="en-US" sz="3200" strike="noStrike" u="none">
-                <a:solidFill>
-                  <a:schemeClr val="dk1"/>
-                </a:solidFill>
-                <a:effectLst/>
-                <a:uFillTx/>
-                <a:latin typeface="Calibri"/>
-              </a:rPr>
-              <a:t>Klicka för att redigera dispositionstextens format</a:t>
-            </a:r>
-            <a:endParaRPr b="0" lang="en-US" sz="3200" strike="noStrike" u="none">
-              <a:solidFill>
-                <a:schemeClr val="dk1"/>
-              </a:solidFill>
-              <a:effectLst/>
-              <a:uFillTx/>
-              <a:latin typeface="Calibri"/>
-            </a:endParaRPr>
-          </a:p>
-          <a:p>
-            <a:pPr lvl="1" marL="864000" indent="-324000">
-              <a:spcBef>
-                <a:spcPts val="1134"/>
-              </a:spcBef>
-              <a:buClr>
-                <a:srgbClr val="000000"/>
-              </a:buClr>
-              <a:buSzPct val="75000"/>
-              <a:buFont typeface="Symbol" charset="2"/>
-              <a:buChar char=""/>
-            </a:pPr>
-            <a:r>
-              <a:rPr b="0" lang="en-US" sz="3200" strike="noStrike" u="none">
-                <a:solidFill>
-                  <a:schemeClr val="dk1"/>
-                </a:solidFill>
-                <a:effectLst/>
-                <a:uFillTx/>
-                <a:latin typeface="Calibri"/>
-              </a:rPr>
-              <a:t>Andra dispositionsnivån</a:t>
-            </a:r>
-            <a:endParaRPr b="0" lang="en-US" sz="3200" strike="noStrike" u="none">
-              <a:solidFill>
-                <a:schemeClr val="dk1"/>
-              </a:solidFill>
-              <a:effectLst/>
-              <a:uFillTx/>
-              <a:latin typeface="Calibri"/>
-            </a:endParaRPr>
-          </a:p>
-          <a:p>
-            <a:pPr lvl="2" marL="1296000" indent="-288000">
-              <a:spcBef>
-                <a:spcPts val="850"/>
-              </a:spcBef>
-              <a:buClr>
-                <a:srgbClr val="000000"/>
-              </a:buClr>
-              <a:buSzPct val="45000"/>
-              <a:buFont typeface="Wingdings" charset="2"/>
-              <a:buChar char=""/>
-            </a:pPr>
-            <a:r>
-              <a:rPr b="0" lang="en-US" sz="3200" strike="noStrike" u="none">
-                <a:solidFill>
-                  <a:schemeClr val="dk1"/>
-                </a:solidFill>
-                <a:effectLst/>
-                <a:uFillTx/>
-                <a:latin typeface="Calibri"/>
-              </a:rPr>
-              <a:t>Tredje dispositionsnivån</a:t>
-            </a:r>
-            <a:endParaRPr b="0" lang="en-US" sz="3200" strike="noStrike" u="none">
-              <a:solidFill>
-                <a:schemeClr val="dk1"/>
-              </a:solidFill>
-              <a:effectLst/>
-              <a:uFillTx/>
-              <a:latin typeface="Calibri"/>
-            </a:endParaRPr>
-          </a:p>
-          <a:p>
-            <a:pPr lvl="3" marL="1728000" indent="-216000">
-              <a:spcBef>
-                <a:spcPts val="567"/>
-              </a:spcBef>
-              <a:buClr>
-                <a:srgbClr val="000000"/>
-              </a:buClr>
-              <a:buSzPct val="75000"/>
-              <a:buFont typeface="Symbol" charset="2"/>
-              <a:buChar char=""/>
-            </a:pPr>
-            <a:r>
-              <a:rPr b="0" lang="en-US" sz="3200" strike="noStrike" u="none">
-                <a:solidFill>
-                  <a:schemeClr val="dk1"/>
-                </a:solidFill>
-                <a:effectLst/>
-                <a:uFillTx/>
-                <a:latin typeface="Calibri"/>
-              </a:rPr>
-              <a:t>Fjärde dispositionsnivån</a:t>
-            </a:r>
-            <a:endParaRPr b="0" lang="en-US" sz="3200" strike="noStrike" u="none">
-              <a:solidFill>
-                <a:schemeClr val="dk1"/>
-              </a:solidFill>
-              <a:effectLst/>
-              <a:uFillTx/>
-              <a:latin typeface="Calibri"/>
-            </a:endParaRPr>
-          </a:p>
-          <a:p>
-            <a:pPr lvl="4" marL="2160000" indent="-216000">
-              <a:spcBef>
-                <a:spcPts val="283"/>
-              </a:spcBef>
-              <a:buClr>
-                <a:srgbClr val="000000"/>
-              </a:buClr>
-              <a:buSzPct val="45000"/>
-              <a:buFont typeface="Wingdings" charset="2"/>
-              <a:buChar char=""/>
-            </a:pPr>
-            <a:r>
-              <a:rPr b="0" lang="en-US" sz="3200" strike="noStrike" u="none">
-                <a:solidFill>
-                  <a:schemeClr val="dk1"/>
-                </a:solidFill>
-                <a:effectLst/>
-                <a:uFillTx/>
-                <a:latin typeface="Calibri"/>
-              </a:rPr>
-              <a:t>Femte dispositionsnivån</a:t>
-            </a:r>
-            <a:endParaRPr b="0" lang="en-US" sz="3200" strike="noStrike" u="none">
-              <a:solidFill>
-                <a:schemeClr val="dk1"/>
-              </a:solidFill>
-              <a:effectLst/>
-              <a:uFillTx/>
-              <a:latin typeface="Calibri"/>
-            </a:endParaRPr>
-          </a:p>
-          <a:p>
-            <a:pPr lvl="5" marL="2592000" indent="-216000">
-              <a:spcBef>
-                <a:spcPts val="283"/>
-              </a:spcBef>
-              <a:buClr>
-                <a:srgbClr val="000000"/>
-              </a:buClr>
-              <a:buSzPct val="45000"/>
-              <a:buFont typeface="Wingdings" charset="2"/>
-              <a:buChar char=""/>
-            </a:pPr>
-            <a:r>
-              <a:rPr b="0" lang="en-US" sz="3200" strike="noStrike" u="none">
-                <a:solidFill>
-                  <a:schemeClr val="dk1"/>
-                </a:solidFill>
-                <a:effectLst/>
-                <a:uFillTx/>
-                <a:latin typeface="Calibri"/>
-              </a:rPr>
-              <a:t>Sjätte dispositionsnivån</a:t>
-            </a:r>
-            <a:endParaRPr b="0" lang="en-US" sz="3200" strike="noStrike" u="none">
-              <a:solidFill>
-                <a:schemeClr val="dk1"/>
-              </a:solidFill>
-              <a:effectLst/>
-              <a:uFillTx/>
-              <a:latin typeface="Calibri"/>
-            </a:endParaRPr>
-          </a:p>
-          <a:p>
-            <a:pPr lvl="6" marL="3024000" indent="-216000">
-              <a:spcBef>
-                <a:spcPts val="283"/>
-              </a:spcBef>
-              <a:buClr>
-                <a:srgbClr val="000000"/>
-              </a:buClr>
-              <a:buSzPct val="45000"/>
-              <a:buFont typeface="Wingdings" charset="2"/>
-              <a:buChar char=""/>
-            </a:pPr>
-            <a:r>
-              <a:rPr b="0" lang="en-US" sz="3200" strike="noStrike" u="none">
-                <a:solidFill>
-                  <a:schemeClr val="dk1"/>
-                </a:solidFill>
-                <a:effectLst/>
-                <a:uFillTx/>
-                <a:latin typeface="Calibri"/>
-              </a:rPr>
-              <a:t>Sjunde dispositionsnivån</a:t>
-            </a:r>
-            <a:endParaRPr b="0" lang="en-US" sz="3200" strike="noStrike" u="none">
-              <a:solidFill>
-                <a:schemeClr val="dk1"/>
-              </a:solidFill>
-              <a:effectLst/>
-              <a:uFillTx/>
-              <a:latin typeface="Calibri"/>
-            </a:endParaRPr>
-          </a:p>
-        </p:txBody>
-      </p:sp>
-      <p:sp>
-        <p:nvSpPr>
-          <p:cNvPr id="55" name="PlaceHolder 3"/>
-          <p:cNvSpPr>
-            <a:spLocks noGrp="1"/>
-          </p:cNvSpPr>
-          <p:nvPr>
-            <p:ph type="body"/>
-          </p:nvPr>
-        </p:nvSpPr>
-        <p:spPr>
-          <a:xfrm>
-            <a:off x="1792440" y="5367240"/>
-            <a:ext cx="5486040" cy="804600"/>
-          </a:xfrm>
-          <a:prstGeom prst="rect">
-            <a:avLst/>
-          </a:prstGeom>
-          <a:noFill/>
-          <a:ln w="0">
-            <a:noFill/>
-          </a:ln>
-        </p:spPr>
-        <p:txBody>
-          <a:bodyPr lIns="91440" rIns="91440" tIns="45720" bIns="45720" anchor="t">
-            <a:noAutofit/>
-          </a:bodyPr>
-          <a:p>
-            <a:pPr indent="0" defTabSz="457200">
-              <a:lnSpc>
-                <a:spcPct val="100000"/>
-              </a:lnSpc>
-              <a:spcBef>
-                <a:spcPts val="281"/>
-              </a:spcBef>
-              <a:buNone/>
-              <a:tabLst>
-                <a:tab algn="l" pos="0"/>
-              </a:tabLst>
-            </a:pPr>
-            <a:r>
-              <a:rPr b="0" lang="en-US" sz="1400" strike="noStrike" u="none">
-                <a:solidFill>
-                  <a:schemeClr val="dk1"/>
-                </a:solidFill>
-                <a:effectLst/>
-                <a:uFillTx/>
-                <a:latin typeface="Calibri"/>
-              </a:rPr>
-              <a:t>Click to edit Master text styles</a:t>
-            </a:r>
-            <a:endParaRPr b="0" lang="en-US" sz="1400" strike="noStrike" u="none">
-              <a:solidFill>
-                <a:schemeClr val="dk1"/>
-              </a:solidFill>
-              <a:effectLst/>
-              <a:uFillTx/>
-              <a:latin typeface="Calibri"/>
-            </a:endParaRPr>
-          </a:p>
-        </p:txBody>
-      </p:sp>
-      <p:sp>
-        <p:nvSpPr>
-          <p:cNvPr id="56" name="PlaceHolder 4"/>
-          <p:cNvSpPr>
-            <a:spLocks noGrp="1"/>
-          </p:cNvSpPr>
-          <p:nvPr>
-            <p:ph type="dt" idx="31"/>
-          </p:nvPr>
-        </p:nvSpPr>
-        <p:spPr>
-          <a:xfrm>
-            <a:off x="457200" y="6356520"/>
-            <a:ext cx="2133360" cy="364680"/>
-          </a:xfrm>
-          <a:prstGeom prst="rect">
-            <a:avLst/>
-          </a:prstGeom>
-          <a:noFill/>
-          <a:ln w="0">
-            <a:noFill/>
-          </a:ln>
-        </p:spPr>
-        <p:txBody>
-          <a:bodyPr lIns="91440" rIns="91440" tIns="45720" bIns="45720" anchor="ctr">
-            <a:noAutofit/>
-          </a:bodyPr>
-          <a:lstStyle>
-            <a:lvl1pPr indent="0" defTabSz="457200">
-              <a:lnSpc>
-                <a:spcPct val="100000"/>
-              </a:lnSpc>
-              <a:buNone/>
-              <a:defRPr b="0" lang="en-US" sz="1200" strike="noStrike" u="none">
-                <a:solidFill>
-                  <a:schemeClr val="dk1">
-                    <a:tint val="75000"/>
-                  </a:schemeClr>
-                </a:solidFill>
-                <a:effectLst/>
-                <a:uFillTx/>
-                <a:latin typeface="Calibri"/>
-              </a:defRPr>
-            </a:lvl1pPr>
-          </a:lstStyle>
-          <a:p>
-            <a:pPr indent="0" defTabSz="457200">
-              <a:lnSpc>
-                <a:spcPct val="100000"/>
-              </a:lnSpc>
-              <a:buNone/>
-            </a:pPr>
-            <a:r>
-              <a:rPr b="0" lang="en-US" sz="1200" strike="noStrike" u="none">
-                <a:solidFill>
-                  <a:schemeClr val="dk1">
-                    <a:tint val="75000"/>
-                  </a:schemeClr>
-                </a:solidFill>
-                <a:effectLst/>
-                <a:uFillTx/>
-                <a:latin typeface="Calibri"/>
-              </a:rPr>
-              <a:t>&lt;datum/tid&gt;</a:t>
-            </a:r>
-            <a:endParaRPr b="0" lang="sv-SE" sz="1200" strike="noStrike" u="none">
-              <a:solidFill>
-                <a:srgbClr val="000000"/>
-              </a:solidFill>
-              <a:effectLst/>
-              <a:uFillTx/>
-              <a:latin typeface="Times New Roman"/>
-            </a:endParaRPr>
-          </a:p>
-        </p:txBody>
-      </p:sp>
-      <p:sp>
-        <p:nvSpPr>
-          <p:cNvPr id="57" name="PlaceHolder 5"/>
-          <p:cNvSpPr>
-            <a:spLocks noGrp="1"/>
-          </p:cNvSpPr>
-          <p:nvPr>
-            <p:ph type="ftr" idx="32"/>
-          </p:nvPr>
-        </p:nvSpPr>
-        <p:spPr>
-          <a:xfrm>
-            <a:off x="3124080" y="6356520"/>
-            <a:ext cx="2895120" cy="364680"/>
-          </a:xfrm>
-          <a:prstGeom prst="rect">
-            <a:avLst/>
-          </a:prstGeom>
-          <a:noFill/>
-          <a:ln w="0">
-            <a:noFill/>
-          </a:ln>
-        </p:spPr>
-        <p:txBody>
-          <a:bodyPr lIns="91440" rIns="91440" tIns="45720" bIns="45720" anchor="ctr">
-            <a:noAutofit/>
-          </a:bodyPr>
-          <a:lstStyle>
-            <a:lvl1pPr indent="0" algn="ctr">
-              <a:buNone/>
-              <a:defRPr b="0" lang="sv-SE" sz="1400" strike="noStrike" u="none">
-                <a:solidFill>
-                  <a:srgbClr val="000000"/>
-                </a:solidFill>
-                <a:effectLst/>
-                <a:uFillTx/>
-                <a:latin typeface="Times New Roman"/>
-              </a:defRPr>
-            </a:lvl1pPr>
-          </a:lstStyle>
-          <a:p>
-            <a:pPr indent="0" algn="ctr">
-              <a:buNone/>
-            </a:pPr>
-            <a:r>
-              <a:rPr b="0" lang="sv-SE" sz="1400" strike="noStrike" u="none">
-                <a:solidFill>
-                  <a:srgbClr val="000000"/>
-                </a:solidFill>
-                <a:effectLst/>
-                <a:uFillTx/>
-                <a:latin typeface="Times New Roman"/>
-              </a:rPr>
-              <a:t>&lt;sidfot&gt;</a:t>
-            </a:r>
-            <a:endParaRPr b="0" lang="sv-SE" sz="1400" strike="noStrike" u="none">
-              <a:solidFill>
-                <a:srgbClr val="000000"/>
-              </a:solidFill>
-              <a:effectLst/>
-              <a:uFillTx/>
-              <a:latin typeface="Times New Roman"/>
-            </a:endParaRPr>
-          </a:p>
-        </p:txBody>
-      </p:sp>
-      <p:sp>
-        <p:nvSpPr>
-          <p:cNvPr id="58" name="PlaceHolder 6"/>
-          <p:cNvSpPr>
-            <a:spLocks noGrp="1"/>
-          </p:cNvSpPr>
-          <p:nvPr>
-            <p:ph type="sldNum" idx="33"/>
-          </p:nvPr>
-        </p:nvSpPr>
-        <p:spPr>
-          <a:xfrm>
-            <a:off x="6553080" y="6356520"/>
-            <a:ext cx="2133360" cy="364680"/>
-          </a:xfrm>
-          <a:prstGeom prst="rect">
-            <a:avLst/>
-          </a:prstGeom>
-          <a:noFill/>
-          <a:ln w="0">
-            <a:noFill/>
-          </a:ln>
-        </p:spPr>
-        <p:txBody>
-          <a:bodyPr lIns="91440" rIns="91440" tIns="45720" bIns="45720" anchor="ctr">
-            <a:noAutofit/>
-          </a:bodyPr>
-          <a:lstStyle>
-            <a:lvl1pPr indent="0" algn="r" defTabSz="457200">
-              <a:lnSpc>
-                <a:spcPct val="100000"/>
-              </a:lnSpc>
-              <a:buNone/>
-              <a:defRPr b="0" lang="en-US" sz="1200" strike="noStrike" u="none">
-                <a:solidFill>
-                  <a:schemeClr val="dk1">
-                    <a:tint val="75000"/>
-                  </a:schemeClr>
-                </a:solidFill>
-                <a:effectLst/>
-                <a:uFillTx/>
-                <a:latin typeface="Calibri"/>
-              </a:defRPr>
-            </a:lvl1pPr>
-          </a:lstStyle>
-          <a:p>
-            <a:pPr indent="0" algn="r" defTabSz="457200">
-              <a:lnSpc>
-                <a:spcPct val="100000"/>
-              </a:lnSpc>
-              <a:buNone/>
-            </a:pPr>
-            <a:fld id="{1B9D28A8-A789-4107-9C37-51A167ACBBD3}" type="slidenum">
-              <a:rPr b="0" lang="en-US" sz="1200" strike="noStrike" u="none">
-                <a:solidFill>
-                  <a:schemeClr val="dk1">
-                    <a:tint val="75000"/>
-                  </a:schemeClr>
-                </a:solidFill>
-                <a:effectLst/>
-                <a:uFillTx/>
-                <a:latin typeface="Calibri"/>
-              </a:rPr>
-              <a:t>&lt;nummer&gt;</a:t>
-            </a:fld>
-            <a:endParaRPr b="0" lang="sv-SE" sz="1200" strike="noStrike" u="none">
-              <a:solidFill>
-                <a:srgbClr val="000000"/>
-              </a:solidFill>
-              <a:effectLst/>
-              <a:uFillTx/>
-              <a:latin typeface="Times New Roman"/>
-            </a:endParaRPr>
-          </a:p>
-        </p:txBody>
-      </p:sp>
-    </p:spTree>
-  </p:cSld>
-</p:sldLayout>
-</file>
-
-<file path=ppt/slideLayouts/slideLayout2.xml><?xml version="1.0" encoding="utf-8"?>
+<file path=ppt/slideLayouts/slideLayout3.xml><?xml version="1.0" encoding="utf-8"?>
 <p:sldLayout xmlns:a="http://schemas.openxmlformats.org/drawingml/2006/main" xmlns:p="http://schemas.openxmlformats.org/presentationml/2006/main" xmlns:r="http://schemas.openxmlformats.org/officeDocument/2006/relationships" xmlns:p14="http://schemas.microsoft.com/office/powerpoint/2010/main" xmlns:p15="http://schemas.microsoft.com/office/powerpoint/2012/main" xmlns:mc="http://schemas.openxmlformats.org/markup-compatibility/2006" type="vertTx" preserve="1">
   <p:cSld name="Title and Vertical Text">
     <p:bg>
@@ -2597,7 +3309,7 @@
       </p:grpSpPr>
       <p:sp>
         <p:nvSpPr>
-          <p:cNvPr id="4" name="PlaceHolder 1"/>
+          <p:cNvPr id="10" name="PlaceHolder 1"/>
           <p:cNvSpPr>
             <a:spLocks noGrp="1"/>
           </p:cNvSpPr>
@@ -2608,7 +3320,7 @@
         <p:spPr>
           <a:xfrm>
             <a:off x="457200" y="274680"/>
-            <a:ext cx="8229240" cy="1142640"/>
+            <a:ext cx="8227800" cy="1141200"/>
           </a:xfrm>
           <a:prstGeom prst="rect">
             <a:avLst/>
@@ -2628,6 +3340,9 @@
                 <a:spcPct val="100000"/>
               </a:lnSpc>
               <a:buNone/>
+              <a:tabLst>
+                <a:tab algn="l" pos="0"/>
+              </a:tabLst>
             </a:pPr>
             <a:r>
               <a:rPr b="0" lang="en-US" sz="4400" strike="noStrike" u="none">
@@ -2640,20 +3355,20 @@
               </a:rPr>
               <a:t>Click to edit Master title style</a:t>
             </a:r>
-            <a:endParaRPr b="0" lang="en-US" sz="4400" strike="noStrike" u="none">
-              <a:solidFill>
-                <a:schemeClr val="dk1"/>
-              </a:solidFill>
-              <a:effectLst/>
-              <a:uFillTx/>
-              <a:latin typeface="Calibri"/>
-            </a:endParaRPr>
-          </a:p>
-        </p:txBody>
-      </p:sp>
-      <p:sp>
-        <p:nvSpPr>
-          <p:cNvPr id="5" name="PlaceHolder 2"/>
+            <a:endParaRPr b="0" lang="sv-SE" sz="4400" strike="noStrike" u="none">
+              <a:solidFill>
+                <a:srgbClr val="000000"/>
+              </a:solidFill>
+              <a:effectLst/>
+              <a:uFillTx/>
+              <a:latin typeface="Arial"/>
+            </a:endParaRPr>
+          </a:p>
+        </p:txBody>
+      </p:sp>
+      <p:sp>
+        <p:nvSpPr>
+          <p:cNvPr id="11" name="PlaceHolder 2"/>
           <p:cNvSpPr>
             <a:spLocks noGrp="1"/>
           </p:cNvSpPr>
@@ -2664,7 +3379,7 @@
         <p:spPr>
           <a:xfrm>
             <a:off x="457200" y="1600200"/>
-            <a:ext cx="8229240" cy="4525560"/>
+            <a:ext cx="8227800" cy="4524120"/>
           </a:xfrm>
           <a:prstGeom prst="rect">
             <a:avLst/>
@@ -2703,13 +3418,13 @@
               </a:rPr>
               <a:t>Click to edit Master text styles</a:t>
             </a:r>
-            <a:endParaRPr b="0" lang="en-US" sz="3200" strike="noStrike" u="none">
-              <a:solidFill>
-                <a:schemeClr val="dk1"/>
-              </a:solidFill>
-              <a:effectLst/>
-              <a:uFillTx/>
-              <a:latin typeface="Calibri"/>
+            <a:endParaRPr b="0" lang="sv-SE" sz="3200" strike="noStrike" u="none">
+              <a:solidFill>
+                <a:srgbClr val="000000"/>
+              </a:solidFill>
+              <a:effectLst/>
+              <a:uFillTx/>
+              <a:latin typeface="Arial"/>
             </a:endParaRPr>
           </a:p>
           <a:p>
@@ -2737,13 +3452,13 @@
               </a:rPr>
               <a:t>Second level</a:t>
             </a:r>
-            <a:endParaRPr b="0" lang="en-US" sz="2800" strike="noStrike" u="none">
-              <a:solidFill>
-                <a:schemeClr val="dk1"/>
-              </a:solidFill>
-              <a:effectLst/>
-              <a:uFillTx/>
-              <a:latin typeface="Calibri"/>
+            <a:endParaRPr b="0" lang="sv-SE" sz="2800" strike="noStrike" u="none">
+              <a:solidFill>
+                <a:srgbClr val="000000"/>
+              </a:solidFill>
+              <a:effectLst/>
+              <a:uFillTx/>
+              <a:latin typeface="Arial"/>
             </a:endParaRPr>
           </a:p>
           <a:p>
@@ -2771,13 +3486,13 @@
               </a:rPr>
               <a:t>Third level</a:t>
             </a:r>
-            <a:endParaRPr b="0" lang="en-US" sz="2400" strike="noStrike" u="none">
-              <a:solidFill>
-                <a:schemeClr val="dk1"/>
-              </a:solidFill>
-              <a:effectLst/>
-              <a:uFillTx/>
-              <a:latin typeface="Calibri"/>
+            <a:endParaRPr b="0" lang="sv-SE" sz="2400" strike="noStrike" u="none">
+              <a:solidFill>
+                <a:srgbClr val="000000"/>
+              </a:solidFill>
+              <a:effectLst/>
+              <a:uFillTx/>
+              <a:latin typeface="Arial"/>
             </a:endParaRPr>
           </a:p>
           <a:p>
@@ -2805,13 +3520,13 @@
               </a:rPr>
               <a:t>Fourth level</a:t>
             </a:r>
-            <a:endParaRPr b="0" lang="en-US" sz="2000" strike="noStrike" u="none">
-              <a:solidFill>
-                <a:schemeClr val="dk1"/>
-              </a:solidFill>
-              <a:effectLst/>
-              <a:uFillTx/>
-              <a:latin typeface="Calibri"/>
+            <a:endParaRPr b="0" lang="sv-SE" sz="2000" strike="noStrike" u="none">
+              <a:solidFill>
+                <a:srgbClr val="000000"/>
+              </a:solidFill>
+              <a:effectLst/>
+              <a:uFillTx/>
+              <a:latin typeface="Arial"/>
             </a:endParaRPr>
           </a:p>
           <a:p>
@@ -2839,31 +3554,31 @@
               </a:rPr>
               <a:t>Fifth level</a:t>
             </a:r>
-            <a:endParaRPr b="0" lang="en-US" sz="2000" strike="noStrike" u="none">
-              <a:solidFill>
-                <a:schemeClr val="dk1"/>
-              </a:solidFill>
-              <a:effectLst/>
-              <a:uFillTx/>
-              <a:latin typeface="Calibri"/>
-            </a:endParaRPr>
-          </a:p>
-        </p:txBody>
-      </p:sp>
-      <p:sp>
-        <p:nvSpPr>
-          <p:cNvPr id="6" name="PlaceHolder 3"/>
+            <a:endParaRPr b="0" lang="sv-SE" sz="2000" strike="noStrike" u="none">
+              <a:solidFill>
+                <a:srgbClr val="000000"/>
+              </a:solidFill>
+              <a:effectLst/>
+              <a:uFillTx/>
+              <a:latin typeface="Arial"/>
+            </a:endParaRPr>
+          </a:p>
+        </p:txBody>
+      </p:sp>
+      <p:sp>
+        <p:nvSpPr>
+          <p:cNvPr id="12" name="PlaceHolder 3"/>
           <p:cNvSpPr>
             <a:spLocks noGrp="1"/>
           </p:cNvSpPr>
           <p:nvPr>
-            <p:ph type="dt" idx="4"/>
+            <p:ph type="dt" idx="7"/>
           </p:nvPr>
         </p:nvSpPr>
         <p:spPr>
           <a:xfrm>
             <a:off x="457200" y="6356520"/>
-            <a:ext cx="2133360" cy="364680"/>
+            <a:ext cx="2131920" cy="363240"/>
           </a:xfrm>
           <a:prstGeom prst="rect">
             <a:avLst/>
@@ -2883,6 +3598,9 @@
                 <a:spcPct val="100000"/>
               </a:lnSpc>
               <a:buNone/>
+              <a:tabLst>
+                <a:tab algn="l" pos="0"/>
+              </a:tabLst>
               <a:defRPr b="0" lang="en-US" sz="1200" strike="noStrike" u="none">
                 <a:solidFill>
                   <a:schemeClr val="dk1">
@@ -2901,6 +3619,9 @@
                 <a:spcPct val="100000"/>
               </a:lnSpc>
               <a:buNone/>
+              <a:tabLst>
+                <a:tab algn="l" pos="0"/>
+              </a:tabLst>
             </a:pPr>
             <a:r>
               <a:rPr b="0" lang="en-US" sz="1200" strike="noStrike" u="none">
@@ -2928,18 +3649,18 @@
       </p:sp>
       <p:sp>
         <p:nvSpPr>
-          <p:cNvPr id="7" name="PlaceHolder 4"/>
+          <p:cNvPr id="13" name="PlaceHolder 4"/>
           <p:cNvSpPr>
             <a:spLocks noGrp="1"/>
           </p:cNvSpPr>
           <p:nvPr>
-            <p:ph type="ftr" idx="5"/>
+            <p:ph type="ftr" idx="8"/>
           </p:nvPr>
         </p:nvSpPr>
         <p:spPr>
           <a:xfrm>
             <a:off x="3124080" y="6356520"/>
-            <a:ext cx="2895120" cy="364680"/>
+            <a:ext cx="2893680" cy="363240"/>
           </a:xfrm>
           <a:prstGeom prst="rect">
             <a:avLst/>
@@ -2955,7 +3676,13 @@
           </a:bodyPr>
           <a:lstStyle>
             <a:lvl1pPr indent="0" algn="ctr">
+              <a:lnSpc>
+                <a:spcPct val="100000"/>
+              </a:lnSpc>
               <a:buNone/>
+              <a:tabLst>
+                <a:tab algn="l" pos="0"/>
+              </a:tabLst>
               <a:defRPr b="0" lang="sv-SE" sz="1400" strike="noStrike" u="none">
                 <a:solidFill>
                   <a:srgbClr val="000000"/>
@@ -2968,7 +3695,13 @@
           </a:lstStyle>
           <a:p>
             <a:pPr indent="0" algn="ctr">
+              <a:lnSpc>
+                <a:spcPct val="100000"/>
+              </a:lnSpc>
               <a:buNone/>
+              <a:tabLst>
+                <a:tab algn="l" pos="0"/>
+              </a:tabLst>
             </a:pPr>
             <a:r>
               <a:rPr b="0" lang="sv-SE" sz="1400" strike="noStrike" u="none">
@@ -2994,18 +3727,18 @@
       </p:sp>
       <p:sp>
         <p:nvSpPr>
-          <p:cNvPr id="8" name="PlaceHolder 5"/>
+          <p:cNvPr id="14" name="PlaceHolder 5"/>
           <p:cNvSpPr>
             <a:spLocks noGrp="1"/>
           </p:cNvSpPr>
           <p:nvPr>
-            <p:ph type="sldNum" idx="6"/>
+            <p:ph type="sldNum" idx="9"/>
           </p:nvPr>
         </p:nvSpPr>
         <p:spPr>
           <a:xfrm>
             <a:off x="6553080" y="6356520"/>
-            <a:ext cx="2133360" cy="364680"/>
+            <a:ext cx="2131920" cy="363240"/>
           </a:xfrm>
           <a:prstGeom prst="rect">
             <a:avLst/>
@@ -3025,6 +3758,9 @@
                 <a:spcPct val="100000"/>
               </a:lnSpc>
               <a:buNone/>
+              <a:tabLst>
+                <a:tab algn="l" pos="0"/>
+              </a:tabLst>
               <a:defRPr b="0" lang="en-US" sz="1200" strike="noStrike" u="none">
                 <a:solidFill>
                   <a:schemeClr val="dk1">
@@ -3043,8 +3779,11 @@
                 <a:spcPct val="100000"/>
               </a:lnSpc>
               <a:buNone/>
-            </a:pPr>
-            <a:fld id="{5895297C-3FA9-4655-90C1-387B8968B323}" type="slidenum">
+              <a:tabLst>
+                <a:tab algn="l" pos="0"/>
+              </a:tabLst>
+            </a:pPr>
+            <a:fld id="{BD233AC0-D311-4A18-B496-7A2B77BBB762}" type="slidenum">
               <a:rPr b="0" lang="en-US" sz="1200" strike="noStrike" u="none">
                 <a:solidFill>
                   <a:schemeClr val="dk1">
@@ -3073,7 +3812,7 @@
 </p:sldLayout>
 </file>
 
-<file path=ppt/slideLayouts/slideLayout3.xml><?xml version="1.0" encoding="utf-8"?>
+<file path=ppt/slideLayouts/slideLayout4.xml><?xml version="1.0" encoding="utf-8"?>
 <p:sldLayout xmlns:a="http://schemas.openxmlformats.org/drawingml/2006/main" xmlns:p="http://schemas.openxmlformats.org/presentationml/2006/main" xmlns:r="http://schemas.openxmlformats.org/officeDocument/2006/relationships" xmlns:p14="http://schemas.microsoft.com/office/powerpoint/2010/main" xmlns:p15="http://schemas.microsoft.com/office/powerpoint/2012/main" xmlns:mc="http://schemas.openxmlformats.org/markup-compatibility/2006" type="vertTitleAndTx" preserve="1">
   <p:cSld name="Vertical Title and Text">
     <p:bg>
@@ -3099,7 +3838,7 @@
       </p:grpSpPr>
       <p:sp>
         <p:nvSpPr>
-          <p:cNvPr id="9" name="PlaceHolder 1"/>
+          <p:cNvPr id="15" name="PlaceHolder 1"/>
           <p:cNvSpPr>
             <a:spLocks noGrp="1"/>
           </p:cNvSpPr>
@@ -3110,7 +3849,7 @@
         <p:spPr>
           <a:xfrm>
             <a:off x="6629400" y="274680"/>
-            <a:ext cx="2057040" cy="5851080"/>
+            <a:ext cx="2055600" cy="5849640"/>
           </a:xfrm>
           <a:prstGeom prst="rect">
             <a:avLst/>
@@ -3130,6 +3869,9 @@
                 <a:spcPct val="100000"/>
               </a:lnSpc>
               <a:buNone/>
+              <a:tabLst>
+                <a:tab algn="l" pos="0"/>
+              </a:tabLst>
             </a:pPr>
             <a:r>
               <a:rPr b="0" lang="en-US" sz="4400" strike="noStrike" u="none">
@@ -3142,20 +3884,20 @@
               </a:rPr>
               <a:t>Click to edit Master title style</a:t>
             </a:r>
-            <a:endParaRPr b="0" lang="en-US" sz="4400" strike="noStrike" u="none">
-              <a:solidFill>
-                <a:schemeClr val="dk1"/>
-              </a:solidFill>
-              <a:effectLst/>
-              <a:uFillTx/>
-              <a:latin typeface="Calibri"/>
-            </a:endParaRPr>
-          </a:p>
-        </p:txBody>
-      </p:sp>
-      <p:sp>
-        <p:nvSpPr>
-          <p:cNvPr id="10" name="PlaceHolder 2"/>
+            <a:endParaRPr b="0" lang="sv-SE" sz="4400" strike="noStrike" u="none">
+              <a:solidFill>
+                <a:srgbClr val="000000"/>
+              </a:solidFill>
+              <a:effectLst/>
+              <a:uFillTx/>
+              <a:latin typeface="Arial"/>
+            </a:endParaRPr>
+          </a:p>
+        </p:txBody>
+      </p:sp>
+      <p:sp>
+        <p:nvSpPr>
+          <p:cNvPr id="16" name="PlaceHolder 2"/>
           <p:cNvSpPr>
             <a:spLocks noGrp="1"/>
           </p:cNvSpPr>
@@ -3166,7 +3908,7 @@
         <p:spPr>
           <a:xfrm>
             <a:off x="457200" y="274680"/>
-            <a:ext cx="6019560" cy="5851080"/>
+            <a:ext cx="6018120" cy="5849640"/>
           </a:xfrm>
           <a:prstGeom prst="rect">
             <a:avLst/>
@@ -3205,13 +3947,13 @@
               </a:rPr>
               <a:t>Click to edit Master text styles</a:t>
             </a:r>
-            <a:endParaRPr b="0" lang="en-US" sz="3200" strike="noStrike" u="none">
-              <a:solidFill>
-                <a:schemeClr val="dk1"/>
-              </a:solidFill>
-              <a:effectLst/>
-              <a:uFillTx/>
-              <a:latin typeface="Calibri"/>
+            <a:endParaRPr b="0" lang="sv-SE" sz="3200" strike="noStrike" u="none">
+              <a:solidFill>
+                <a:srgbClr val="000000"/>
+              </a:solidFill>
+              <a:effectLst/>
+              <a:uFillTx/>
+              <a:latin typeface="Arial"/>
             </a:endParaRPr>
           </a:p>
           <a:p>
@@ -3239,13 +3981,13 @@
               </a:rPr>
               <a:t>Second level</a:t>
             </a:r>
-            <a:endParaRPr b="0" lang="en-US" sz="2800" strike="noStrike" u="none">
-              <a:solidFill>
-                <a:schemeClr val="dk1"/>
-              </a:solidFill>
-              <a:effectLst/>
-              <a:uFillTx/>
-              <a:latin typeface="Calibri"/>
+            <a:endParaRPr b="0" lang="sv-SE" sz="2800" strike="noStrike" u="none">
+              <a:solidFill>
+                <a:srgbClr val="000000"/>
+              </a:solidFill>
+              <a:effectLst/>
+              <a:uFillTx/>
+              <a:latin typeface="Arial"/>
             </a:endParaRPr>
           </a:p>
           <a:p>
@@ -3273,13 +4015,13 @@
               </a:rPr>
               <a:t>Third level</a:t>
             </a:r>
-            <a:endParaRPr b="0" lang="en-US" sz="2400" strike="noStrike" u="none">
-              <a:solidFill>
-                <a:schemeClr val="dk1"/>
-              </a:solidFill>
-              <a:effectLst/>
-              <a:uFillTx/>
-              <a:latin typeface="Calibri"/>
+            <a:endParaRPr b="0" lang="sv-SE" sz="2400" strike="noStrike" u="none">
+              <a:solidFill>
+                <a:srgbClr val="000000"/>
+              </a:solidFill>
+              <a:effectLst/>
+              <a:uFillTx/>
+              <a:latin typeface="Arial"/>
             </a:endParaRPr>
           </a:p>
           <a:p>
@@ -3307,13 +4049,13 @@
               </a:rPr>
               <a:t>Fourth level</a:t>
             </a:r>
-            <a:endParaRPr b="0" lang="en-US" sz="2000" strike="noStrike" u="none">
-              <a:solidFill>
-                <a:schemeClr val="dk1"/>
-              </a:solidFill>
-              <a:effectLst/>
-              <a:uFillTx/>
-              <a:latin typeface="Calibri"/>
+            <a:endParaRPr b="0" lang="sv-SE" sz="2000" strike="noStrike" u="none">
+              <a:solidFill>
+                <a:srgbClr val="000000"/>
+              </a:solidFill>
+              <a:effectLst/>
+              <a:uFillTx/>
+              <a:latin typeface="Arial"/>
             </a:endParaRPr>
           </a:p>
           <a:p>
@@ -3341,31 +4083,31 @@
               </a:rPr>
               <a:t>Fifth level</a:t>
             </a:r>
-            <a:endParaRPr b="0" lang="en-US" sz="2000" strike="noStrike" u="none">
-              <a:solidFill>
-                <a:schemeClr val="dk1"/>
-              </a:solidFill>
-              <a:effectLst/>
-              <a:uFillTx/>
-              <a:latin typeface="Calibri"/>
-            </a:endParaRPr>
-          </a:p>
-        </p:txBody>
-      </p:sp>
-      <p:sp>
-        <p:nvSpPr>
-          <p:cNvPr id="11" name="PlaceHolder 3"/>
+            <a:endParaRPr b="0" lang="sv-SE" sz="2000" strike="noStrike" u="none">
+              <a:solidFill>
+                <a:srgbClr val="000000"/>
+              </a:solidFill>
+              <a:effectLst/>
+              <a:uFillTx/>
+              <a:latin typeface="Arial"/>
+            </a:endParaRPr>
+          </a:p>
+        </p:txBody>
+      </p:sp>
+      <p:sp>
+        <p:nvSpPr>
+          <p:cNvPr id="17" name="PlaceHolder 3"/>
           <p:cNvSpPr>
             <a:spLocks noGrp="1"/>
           </p:cNvSpPr>
           <p:nvPr>
-            <p:ph type="dt" idx="7"/>
+            <p:ph type="dt" idx="10"/>
           </p:nvPr>
         </p:nvSpPr>
         <p:spPr>
           <a:xfrm>
             <a:off x="457200" y="6356520"/>
-            <a:ext cx="2133360" cy="364680"/>
+            <a:ext cx="2131920" cy="363240"/>
           </a:xfrm>
           <a:prstGeom prst="rect">
             <a:avLst/>
@@ -3385,6 +4127,9 @@
                 <a:spcPct val="100000"/>
               </a:lnSpc>
               <a:buNone/>
+              <a:tabLst>
+                <a:tab algn="l" pos="0"/>
+              </a:tabLst>
               <a:defRPr b="0" lang="en-US" sz="1200" strike="noStrike" u="none">
                 <a:solidFill>
                   <a:schemeClr val="dk1">
@@ -3403,6 +4148,9 @@
                 <a:spcPct val="100000"/>
               </a:lnSpc>
               <a:buNone/>
+              <a:tabLst>
+                <a:tab algn="l" pos="0"/>
+              </a:tabLst>
             </a:pPr>
             <a:r>
               <a:rPr b="0" lang="en-US" sz="1200" strike="noStrike" u="none">
@@ -3430,18 +4178,18 @@
       </p:sp>
       <p:sp>
         <p:nvSpPr>
-          <p:cNvPr id="12" name="PlaceHolder 4"/>
+          <p:cNvPr id="18" name="PlaceHolder 4"/>
           <p:cNvSpPr>
             <a:spLocks noGrp="1"/>
           </p:cNvSpPr>
           <p:nvPr>
-            <p:ph type="ftr" idx="8"/>
+            <p:ph type="ftr" idx="11"/>
           </p:nvPr>
         </p:nvSpPr>
         <p:spPr>
           <a:xfrm>
             <a:off x="3124080" y="6356520"/>
-            <a:ext cx="2895120" cy="364680"/>
+            <a:ext cx="2893680" cy="363240"/>
           </a:xfrm>
           <a:prstGeom prst="rect">
             <a:avLst/>
@@ -3457,7 +4205,13 @@
           </a:bodyPr>
           <a:lstStyle>
             <a:lvl1pPr indent="0" algn="ctr">
+              <a:lnSpc>
+                <a:spcPct val="100000"/>
+              </a:lnSpc>
               <a:buNone/>
+              <a:tabLst>
+                <a:tab algn="l" pos="0"/>
+              </a:tabLst>
               <a:defRPr b="0" lang="sv-SE" sz="1400" strike="noStrike" u="none">
                 <a:solidFill>
                   <a:srgbClr val="000000"/>
@@ -3470,7 +4224,13 @@
           </a:lstStyle>
           <a:p>
             <a:pPr indent="0" algn="ctr">
+              <a:lnSpc>
+                <a:spcPct val="100000"/>
+              </a:lnSpc>
               <a:buNone/>
+              <a:tabLst>
+                <a:tab algn="l" pos="0"/>
+              </a:tabLst>
             </a:pPr>
             <a:r>
               <a:rPr b="0" lang="sv-SE" sz="1400" strike="noStrike" u="none">
@@ -3496,18 +4256,18 @@
       </p:sp>
       <p:sp>
         <p:nvSpPr>
-          <p:cNvPr id="13" name="PlaceHolder 5"/>
+          <p:cNvPr id="19" name="PlaceHolder 5"/>
           <p:cNvSpPr>
             <a:spLocks noGrp="1"/>
           </p:cNvSpPr>
           <p:nvPr>
-            <p:ph type="sldNum" idx="9"/>
+            <p:ph type="sldNum" idx="12"/>
           </p:nvPr>
         </p:nvSpPr>
         <p:spPr>
           <a:xfrm>
             <a:off x="6553080" y="6356520"/>
-            <a:ext cx="2133360" cy="364680"/>
+            <a:ext cx="2131920" cy="363240"/>
           </a:xfrm>
           <a:prstGeom prst="rect">
             <a:avLst/>
@@ -3527,6 +4287,9 @@
                 <a:spcPct val="100000"/>
               </a:lnSpc>
               <a:buNone/>
+              <a:tabLst>
+                <a:tab algn="l" pos="0"/>
+              </a:tabLst>
               <a:defRPr b="0" lang="en-US" sz="1200" strike="noStrike" u="none">
                 <a:solidFill>
                   <a:schemeClr val="dk1">
@@ -3545,8 +4308,11 @@
                 <a:spcPct val="100000"/>
               </a:lnSpc>
               <a:buNone/>
-            </a:pPr>
-            <a:fld id="{5F538DD9-E040-45FA-874A-64B31361C822}" type="slidenum">
+              <a:tabLst>
+                <a:tab algn="l" pos="0"/>
+              </a:tabLst>
+            </a:pPr>
+            <a:fld id="{AB4EA7B2-17D3-4CEA-A69B-E6850864DAB8}" type="slidenum">
               <a:rPr b="0" lang="en-US" sz="1200" strike="noStrike" u="none">
                 <a:solidFill>
                   <a:schemeClr val="dk1">
@@ -3575,7 +4341,7 @@
 </p:sldLayout>
 </file>
 
-<file path=ppt/slideLayouts/slideLayout4.xml><?xml version="1.0" encoding="utf-8"?>
+<file path=ppt/slideLayouts/slideLayout5.xml><?xml version="1.0" encoding="utf-8"?>
 <p:sldLayout xmlns:a="http://schemas.openxmlformats.org/drawingml/2006/main" xmlns:p="http://schemas.openxmlformats.org/presentationml/2006/main" xmlns:r="http://schemas.openxmlformats.org/officeDocument/2006/relationships" xmlns:p14="http://schemas.microsoft.com/office/powerpoint/2010/main" xmlns:p15="http://schemas.microsoft.com/office/powerpoint/2012/main" xmlns:mc="http://schemas.openxmlformats.org/markup-compatibility/2006" type="obj" preserve="1">
   <p:cSld name="Title and Content">
     <p:bg>
@@ -3601,7 +4367,7 @@
       </p:grpSpPr>
       <p:sp>
         <p:nvSpPr>
-          <p:cNvPr id="14" name="PlaceHolder 1"/>
+          <p:cNvPr id="20" name="PlaceHolder 1"/>
           <p:cNvSpPr>
             <a:spLocks noGrp="1"/>
           </p:cNvSpPr>
@@ -3612,7 +4378,7 @@
         <p:spPr>
           <a:xfrm>
             <a:off x="457200" y="274680"/>
-            <a:ext cx="8229240" cy="1142640"/>
+            <a:ext cx="8227800" cy="1141200"/>
           </a:xfrm>
           <a:prstGeom prst="rect">
             <a:avLst/>
@@ -3632,6 +4398,9 @@
                 <a:spcPct val="100000"/>
               </a:lnSpc>
               <a:buNone/>
+              <a:tabLst>
+                <a:tab algn="l" pos="0"/>
+              </a:tabLst>
             </a:pPr>
             <a:r>
               <a:rPr b="0" lang="en-US" sz="4400" strike="noStrike" u="none">
@@ -3644,20 +4413,20 @@
               </a:rPr>
               <a:t>Click to edit Master title style</a:t>
             </a:r>
-            <a:endParaRPr b="0" lang="en-US" sz="4400" strike="noStrike" u="none">
-              <a:solidFill>
-                <a:schemeClr val="dk1"/>
-              </a:solidFill>
-              <a:effectLst/>
-              <a:uFillTx/>
-              <a:latin typeface="Calibri"/>
-            </a:endParaRPr>
-          </a:p>
-        </p:txBody>
-      </p:sp>
-      <p:sp>
-        <p:nvSpPr>
-          <p:cNvPr id="15" name="PlaceHolder 2"/>
+            <a:endParaRPr b="0" lang="sv-SE" sz="4400" strike="noStrike" u="none">
+              <a:solidFill>
+                <a:srgbClr val="000000"/>
+              </a:solidFill>
+              <a:effectLst/>
+              <a:uFillTx/>
+              <a:latin typeface="Arial"/>
+            </a:endParaRPr>
+          </a:p>
+        </p:txBody>
+      </p:sp>
+      <p:sp>
+        <p:nvSpPr>
+          <p:cNvPr id="21" name="PlaceHolder 2"/>
           <p:cNvSpPr>
             <a:spLocks noGrp="1"/>
           </p:cNvSpPr>
@@ -3668,7 +4437,7 @@
         <p:spPr>
           <a:xfrm>
             <a:off x="457200" y="1600200"/>
-            <a:ext cx="8229240" cy="4525560"/>
+            <a:ext cx="8227800" cy="4524120"/>
           </a:xfrm>
           <a:prstGeom prst="rect">
             <a:avLst/>
@@ -3707,13 +4476,13 @@
               </a:rPr>
               <a:t>Click to edit Master text styles</a:t>
             </a:r>
-            <a:endParaRPr b="0" lang="en-US" sz="3200" strike="noStrike" u="none">
-              <a:solidFill>
-                <a:schemeClr val="dk1"/>
-              </a:solidFill>
-              <a:effectLst/>
-              <a:uFillTx/>
-              <a:latin typeface="Calibri"/>
+            <a:endParaRPr b="0" lang="sv-SE" sz="3200" strike="noStrike" u="none">
+              <a:solidFill>
+                <a:srgbClr val="000000"/>
+              </a:solidFill>
+              <a:effectLst/>
+              <a:uFillTx/>
+              <a:latin typeface="Arial"/>
             </a:endParaRPr>
           </a:p>
           <a:p>
@@ -3741,13 +4510,13 @@
               </a:rPr>
               <a:t>Second level</a:t>
             </a:r>
-            <a:endParaRPr b="0" lang="en-US" sz="2800" strike="noStrike" u="none">
-              <a:solidFill>
-                <a:schemeClr val="dk1"/>
-              </a:solidFill>
-              <a:effectLst/>
-              <a:uFillTx/>
-              <a:latin typeface="Calibri"/>
+            <a:endParaRPr b="0" lang="sv-SE" sz="2800" strike="noStrike" u="none">
+              <a:solidFill>
+                <a:srgbClr val="000000"/>
+              </a:solidFill>
+              <a:effectLst/>
+              <a:uFillTx/>
+              <a:latin typeface="Arial"/>
             </a:endParaRPr>
           </a:p>
           <a:p>
@@ -3775,13 +4544,13 @@
               </a:rPr>
               <a:t>Third level</a:t>
             </a:r>
-            <a:endParaRPr b="0" lang="en-US" sz="2400" strike="noStrike" u="none">
-              <a:solidFill>
-                <a:schemeClr val="dk1"/>
-              </a:solidFill>
-              <a:effectLst/>
-              <a:uFillTx/>
-              <a:latin typeface="Calibri"/>
+            <a:endParaRPr b="0" lang="sv-SE" sz="2400" strike="noStrike" u="none">
+              <a:solidFill>
+                <a:srgbClr val="000000"/>
+              </a:solidFill>
+              <a:effectLst/>
+              <a:uFillTx/>
+              <a:latin typeface="Arial"/>
             </a:endParaRPr>
           </a:p>
           <a:p>
@@ -3809,13 +4578,13 @@
               </a:rPr>
               <a:t>Fourth level</a:t>
             </a:r>
-            <a:endParaRPr b="0" lang="en-US" sz="2000" strike="noStrike" u="none">
-              <a:solidFill>
-                <a:schemeClr val="dk1"/>
-              </a:solidFill>
-              <a:effectLst/>
-              <a:uFillTx/>
-              <a:latin typeface="Calibri"/>
+            <a:endParaRPr b="0" lang="sv-SE" sz="2000" strike="noStrike" u="none">
+              <a:solidFill>
+                <a:srgbClr val="000000"/>
+              </a:solidFill>
+              <a:effectLst/>
+              <a:uFillTx/>
+              <a:latin typeface="Arial"/>
             </a:endParaRPr>
           </a:p>
           <a:p>
@@ -3843,31 +4612,31 @@
               </a:rPr>
               <a:t>Fifth level</a:t>
             </a:r>
-            <a:endParaRPr b="0" lang="en-US" sz="2000" strike="noStrike" u="none">
-              <a:solidFill>
-                <a:schemeClr val="dk1"/>
-              </a:solidFill>
-              <a:effectLst/>
-              <a:uFillTx/>
-              <a:latin typeface="Calibri"/>
-            </a:endParaRPr>
-          </a:p>
-        </p:txBody>
-      </p:sp>
-      <p:sp>
-        <p:nvSpPr>
-          <p:cNvPr id="16" name="PlaceHolder 3"/>
+            <a:endParaRPr b="0" lang="sv-SE" sz="2000" strike="noStrike" u="none">
+              <a:solidFill>
+                <a:srgbClr val="000000"/>
+              </a:solidFill>
+              <a:effectLst/>
+              <a:uFillTx/>
+              <a:latin typeface="Arial"/>
+            </a:endParaRPr>
+          </a:p>
+        </p:txBody>
+      </p:sp>
+      <p:sp>
+        <p:nvSpPr>
+          <p:cNvPr id="22" name="PlaceHolder 3"/>
           <p:cNvSpPr>
             <a:spLocks noGrp="1"/>
           </p:cNvSpPr>
           <p:nvPr>
-            <p:ph type="dt" idx="10"/>
+            <p:ph type="dt" idx="13"/>
           </p:nvPr>
         </p:nvSpPr>
         <p:spPr>
           <a:xfrm>
             <a:off x="457200" y="6356520"/>
-            <a:ext cx="2133360" cy="364680"/>
+            <a:ext cx="2131920" cy="363240"/>
           </a:xfrm>
           <a:prstGeom prst="rect">
             <a:avLst/>
@@ -3887,6 +4656,9 @@
                 <a:spcPct val="100000"/>
               </a:lnSpc>
               <a:buNone/>
+              <a:tabLst>
+                <a:tab algn="l" pos="0"/>
+              </a:tabLst>
               <a:defRPr b="0" lang="en-US" sz="1200" strike="noStrike" u="none">
                 <a:solidFill>
                   <a:schemeClr val="dk1">
@@ -3905,6 +4677,9 @@
                 <a:spcPct val="100000"/>
               </a:lnSpc>
               <a:buNone/>
+              <a:tabLst>
+                <a:tab algn="l" pos="0"/>
+              </a:tabLst>
             </a:pPr>
             <a:r>
               <a:rPr b="0" lang="en-US" sz="1200" strike="noStrike" u="none">
@@ -3932,18 +4707,18 @@
       </p:sp>
       <p:sp>
         <p:nvSpPr>
-          <p:cNvPr id="17" name="PlaceHolder 4"/>
+          <p:cNvPr id="23" name="PlaceHolder 4"/>
           <p:cNvSpPr>
             <a:spLocks noGrp="1"/>
           </p:cNvSpPr>
           <p:nvPr>
-            <p:ph type="ftr" idx="11"/>
+            <p:ph type="ftr" idx="14"/>
           </p:nvPr>
         </p:nvSpPr>
         <p:spPr>
           <a:xfrm>
             <a:off x="3124080" y="6356520"/>
-            <a:ext cx="2895120" cy="364680"/>
+            <a:ext cx="2893680" cy="363240"/>
           </a:xfrm>
           <a:prstGeom prst="rect">
             <a:avLst/>
@@ -3959,7 +4734,13 @@
           </a:bodyPr>
           <a:lstStyle>
             <a:lvl1pPr indent="0" algn="ctr">
+              <a:lnSpc>
+                <a:spcPct val="100000"/>
+              </a:lnSpc>
               <a:buNone/>
+              <a:tabLst>
+                <a:tab algn="l" pos="0"/>
+              </a:tabLst>
               <a:defRPr b="0" lang="sv-SE" sz="1400" strike="noStrike" u="none">
                 <a:solidFill>
                   <a:srgbClr val="000000"/>
@@ -3972,7 +4753,13 @@
           </a:lstStyle>
           <a:p>
             <a:pPr indent="0" algn="ctr">
+              <a:lnSpc>
+                <a:spcPct val="100000"/>
+              </a:lnSpc>
               <a:buNone/>
+              <a:tabLst>
+                <a:tab algn="l" pos="0"/>
+              </a:tabLst>
             </a:pPr>
             <a:r>
               <a:rPr b="0" lang="sv-SE" sz="1400" strike="noStrike" u="none">
@@ -3998,18 +4785,18 @@
       </p:sp>
       <p:sp>
         <p:nvSpPr>
-          <p:cNvPr id="18" name="PlaceHolder 5"/>
+          <p:cNvPr id="24" name="PlaceHolder 5"/>
           <p:cNvSpPr>
             <a:spLocks noGrp="1"/>
           </p:cNvSpPr>
           <p:nvPr>
-            <p:ph type="sldNum" idx="12"/>
+            <p:ph type="sldNum" idx="15"/>
           </p:nvPr>
         </p:nvSpPr>
         <p:spPr>
           <a:xfrm>
             <a:off x="6553080" y="6356520"/>
-            <a:ext cx="2133360" cy="364680"/>
+            <a:ext cx="2131920" cy="363240"/>
           </a:xfrm>
           <a:prstGeom prst="rect">
             <a:avLst/>
@@ -4029,6 +4816,9 @@
                 <a:spcPct val="100000"/>
               </a:lnSpc>
               <a:buNone/>
+              <a:tabLst>
+                <a:tab algn="l" pos="0"/>
+              </a:tabLst>
               <a:defRPr b="0" lang="en-US" sz="1200" strike="noStrike" u="none">
                 <a:solidFill>
                   <a:schemeClr val="dk1">
@@ -4047,8 +4837,11 @@
                 <a:spcPct val="100000"/>
               </a:lnSpc>
               <a:buNone/>
-            </a:pPr>
-            <a:fld id="{064900BD-63C0-4879-AC91-8DC60C8BF792}" type="slidenum">
+              <a:tabLst>
+                <a:tab algn="l" pos="0"/>
+              </a:tabLst>
+            </a:pPr>
+            <a:fld id="{EFAF1E67-5079-4435-AA07-BB91114CD9A6}" type="slidenum">
               <a:rPr b="0" lang="en-US" sz="1200" strike="noStrike" u="none">
                 <a:solidFill>
                   <a:schemeClr val="dk1">
@@ -4077,7 +4870,7 @@
 </p:sldLayout>
 </file>
 
-<file path=ppt/slideLayouts/slideLayout5.xml><?xml version="1.0" encoding="utf-8"?>
+<file path=ppt/slideLayouts/slideLayout6.xml><?xml version="1.0" encoding="utf-8"?>
 <p:sldLayout xmlns:a="http://schemas.openxmlformats.org/drawingml/2006/main" xmlns:p="http://schemas.openxmlformats.org/presentationml/2006/main" xmlns:r="http://schemas.openxmlformats.org/officeDocument/2006/relationships" xmlns:p14="http://schemas.microsoft.com/office/powerpoint/2010/main" xmlns:p15="http://schemas.microsoft.com/office/powerpoint/2012/main" xmlns:mc="http://schemas.openxmlformats.org/markup-compatibility/2006" type="blank" preserve="1">
   <p:cSld name="Section Header">
     <p:bg>
@@ -4103,7 +4896,7 @@
       </p:grpSpPr>
       <p:sp>
         <p:nvSpPr>
-          <p:cNvPr id="19" name="PlaceHolder 1"/>
+          <p:cNvPr id="25" name="PlaceHolder 1"/>
           <p:cNvSpPr>
             <a:spLocks noGrp="1"/>
           </p:cNvSpPr>
@@ -4114,7 +4907,7 @@
         <p:spPr>
           <a:xfrm>
             <a:off x="722160" y="4406760"/>
-            <a:ext cx="7772040" cy="1361880"/>
+            <a:ext cx="7770600" cy="1360440"/>
           </a:xfrm>
           <a:prstGeom prst="rect">
             <a:avLst/>
@@ -4134,6 +4927,9 @@
                 <a:spcPct val="100000"/>
               </a:lnSpc>
               <a:buNone/>
+              <a:tabLst>
+                <a:tab algn="l" pos="0"/>
+              </a:tabLst>
             </a:pPr>
             <a:r>
               <a:rPr b="1" lang="en-US" sz="4000" strike="noStrike" u="none" cap="all">
@@ -4146,20 +4942,20 @@
               </a:rPr>
               <a:t>Click to edit Master title style</a:t>
             </a:r>
-            <a:endParaRPr b="0" lang="en-US" sz="4000" strike="noStrike" u="none">
-              <a:solidFill>
-                <a:schemeClr val="dk1"/>
-              </a:solidFill>
-              <a:effectLst/>
-              <a:uFillTx/>
-              <a:latin typeface="Calibri"/>
-            </a:endParaRPr>
-          </a:p>
-        </p:txBody>
-      </p:sp>
-      <p:sp>
-        <p:nvSpPr>
-          <p:cNvPr id="20" name="PlaceHolder 2"/>
+            <a:endParaRPr b="0" lang="sv-SE" sz="4000" strike="noStrike" u="none">
+              <a:solidFill>
+                <a:srgbClr val="000000"/>
+              </a:solidFill>
+              <a:effectLst/>
+              <a:uFillTx/>
+              <a:latin typeface="Arial"/>
+            </a:endParaRPr>
+          </a:p>
+        </p:txBody>
+      </p:sp>
+      <p:sp>
+        <p:nvSpPr>
+          <p:cNvPr id="26" name="PlaceHolder 2"/>
           <p:cNvSpPr>
             <a:spLocks noGrp="1"/>
           </p:cNvSpPr>
@@ -4170,7 +4966,7 @@
         <p:spPr>
           <a:xfrm>
             <a:off x="722160" y="2906640"/>
-            <a:ext cx="7772040" cy="1499760"/>
+            <a:ext cx="7770600" cy="1498320"/>
           </a:xfrm>
           <a:prstGeom prst="rect">
             <a:avLst/>
@@ -4210,31 +5006,31 @@
               </a:rPr>
               <a:t>Click to edit Master text styles</a:t>
             </a:r>
-            <a:endParaRPr b="0" lang="en-US" sz="2000" strike="noStrike" u="none">
-              <a:solidFill>
-                <a:schemeClr val="dk1"/>
-              </a:solidFill>
-              <a:effectLst/>
-              <a:uFillTx/>
-              <a:latin typeface="Calibri"/>
-            </a:endParaRPr>
-          </a:p>
-        </p:txBody>
-      </p:sp>
-      <p:sp>
-        <p:nvSpPr>
-          <p:cNvPr id="21" name="PlaceHolder 3"/>
+            <a:endParaRPr b="0" lang="sv-SE" sz="2000" strike="noStrike" u="none">
+              <a:solidFill>
+                <a:srgbClr val="000000"/>
+              </a:solidFill>
+              <a:effectLst/>
+              <a:uFillTx/>
+              <a:latin typeface="Arial"/>
+            </a:endParaRPr>
+          </a:p>
+        </p:txBody>
+      </p:sp>
+      <p:sp>
+        <p:nvSpPr>
+          <p:cNvPr id="27" name="PlaceHolder 3"/>
           <p:cNvSpPr>
             <a:spLocks noGrp="1"/>
           </p:cNvSpPr>
           <p:nvPr>
-            <p:ph type="dt" idx="13"/>
+            <p:ph type="dt" idx="16"/>
           </p:nvPr>
         </p:nvSpPr>
         <p:spPr>
           <a:xfrm>
             <a:off x="457200" y="6356520"/>
-            <a:ext cx="2133360" cy="364680"/>
+            <a:ext cx="2131920" cy="363240"/>
           </a:xfrm>
           <a:prstGeom prst="rect">
             <a:avLst/>
@@ -4254,6 +5050,9 @@
                 <a:spcPct val="100000"/>
               </a:lnSpc>
               <a:buNone/>
+              <a:tabLst>
+                <a:tab algn="l" pos="0"/>
+              </a:tabLst>
               <a:defRPr b="0" lang="en-US" sz="1200" strike="noStrike" u="none">
                 <a:solidFill>
                   <a:schemeClr val="dk1">
@@ -4272,6 +5071,9 @@
                 <a:spcPct val="100000"/>
               </a:lnSpc>
               <a:buNone/>
+              <a:tabLst>
+                <a:tab algn="l" pos="0"/>
+              </a:tabLst>
             </a:pPr>
             <a:r>
               <a:rPr b="0" lang="en-US" sz="1200" strike="noStrike" u="none">
@@ -4299,18 +5101,18 @@
       </p:sp>
       <p:sp>
         <p:nvSpPr>
-          <p:cNvPr id="22" name="PlaceHolder 4"/>
+          <p:cNvPr id="28" name="PlaceHolder 4"/>
           <p:cNvSpPr>
             <a:spLocks noGrp="1"/>
           </p:cNvSpPr>
           <p:nvPr>
-            <p:ph type="ftr" idx="14"/>
+            <p:ph type="ftr" idx="17"/>
           </p:nvPr>
         </p:nvSpPr>
         <p:spPr>
           <a:xfrm>
             <a:off x="3124080" y="6356520"/>
-            <a:ext cx="2895120" cy="364680"/>
+            <a:ext cx="2893680" cy="363240"/>
           </a:xfrm>
           <a:prstGeom prst="rect">
             <a:avLst/>
@@ -4326,7 +5128,13 @@
           </a:bodyPr>
           <a:lstStyle>
             <a:lvl1pPr indent="0" algn="ctr">
+              <a:lnSpc>
+                <a:spcPct val="100000"/>
+              </a:lnSpc>
               <a:buNone/>
+              <a:tabLst>
+                <a:tab algn="l" pos="0"/>
+              </a:tabLst>
               <a:defRPr b="0" lang="sv-SE" sz="1400" strike="noStrike" u="none">
                 <a:solidFill>
                   <a:srgbClr val="000000"/>
@@ -4339,7 +5147,13 @@
           </a:lstStyle>
           <a:p>
             <a:pPr indent="0" algn="ctr">
+              <a:lnSpc>
+                <a:spcPct val="100000"/>
+              </a:lnSpc>
               <a:buNone/>
+              <a:tabLst>
+                <a:tab algn="l" pos="0"/>
+              </a:tabLst>
             </a:pPr>
             <a:r>
               <a:rPr b="0" lang="sv-SE" sz="1400" strike="noStrike" u="none">
@@ -4365,18 +5179,18 @@
       </p:sp>
       <p:sp>
         <p:nvSpPr>
-          <p:cNvPr id="23" name="PlaceHolder 5"/>
+          <p:cNvPr id="29" name="PlaceHolder 5"/>
           <p:cNvSpPr>
             <a:spLocks noGrp="1"/>
           </p:cNvSpPr>
           <p:nvPr>
-            <p:ph type="sldNum" idx="15"/>
+            <p:ph type="sldNum" idx="18"/>
           </p:nvPr>
         </p:nvSpPr>
         <p:spPr>
           <a:xfrm>
             <a:off x="6553080" y="6356520"/>
-            <a:ext cx="2133360" cy="364680"/>
+            <a:ext cx="2131920" cy="363240"/>
           </a:xfrm>
           <a:prstGeom prst="rect">
             <a:avLst/>
@@ -4396,6 +5210,9 @@
                 <a:spcPct val="100000"/>
               </a:lnSpc>
               <a:buNone/>
+              <a:tabLst>
+                <a:tab algn="l" pos="0"/>
+              </a:tabLst>
               <a:defRPr b="0" lang="en-US" sz="1200" strike="noStrike" u="none">
                 <a:solidFill>
                   <a:schemeClr val="dk1">
@@ -4414,8 +5231,11 @@
                 <a:spcPct val="100000"/>
               </a:lnSpc>
               <a:buNone/>
-            </a:pPr>
-            <a:fld id="{9D2945B9-B43C-4B6F-AE0A-35B9140508C3}" type="slidenum">
+              <a:tabLst>
+                <a:tab algn="l" pos="0"/>
+              </a:tabLst>
+            </a:pPr>
+            <a:fld id="{17855448-9AA4-4C78-8E0B-67C746830742}" type="slidenum">
               <a:rPr b="0" lang="en-US" sz="1200" strike="noStrike" u="none">
                 <a:solidFill>
                   <a:schemeClr val="dk1">
@@ -4444,7 +5264,7 @@
 </p:sldLayout>
 </file>
 
-<file path=ppt/slideLayouts/slideLayout6.xml><?xml version="1.0" encoding="utf-8"?>
+<file path=ppt/slideLayouts/slideLayout7.xml><?xml version="1.0" encoding="utf-8"?>
 <p:sldLayout xmlns:a="http://schemas.openxmlformats.org/drawingml/2006/main" xmlns:p="http://schemas.openxmlformats.org/presentationml/2006/main" xmlns:r="http://schemas.openxmlformats.org/officeDocument/2006/relationships" xmlns:p14="http://schemas.microsoft.com/office/powerpoint/2010/main" xmlns:p15="http://schemas.microsoft.com/office/powerpoint/2012/main" xmlns:mc="http://schemas.openxmlformats.org/markup-compatibility/2006" type="twoObj" preserve="1">
   <p:cSld name="Two Content">
     <p:bg>
@@ -4470,7 +5290,7 @@
       </p:grpSpPr>
       <p:sp>
         <p:nvSpPr>
-          <p:cNvPr id="24" name="PlaceHolder 1"/>
+          <p:cNvPr id="30" name="PlaceHolder 1"/>
           <p:cNvSpPr>
             <a:spLocks noGrp="1"/>
           </p:cNvSpPr>
@@ -4481,7 +5301,7 @@
         <p:spPr>
           <a:xfrm>
             <a:off x="457200" y="274680"/>
-            <a:ext cx="8229240" cy="1142640"/>
+            <a:ext cx="8227800" cy="1141200"/>
           </a:xfrm>
           <a:prstGeom prst="rect">
             <a:avLst/>
@@ -4501,6 +5321,9 @@
                 <a:spcPct val="100000"/>
               </a:lnSpc>
               <a:buNone/>
+              <a:tabLst>
+                <a:tab algn="l" pos="0"/>
+              </a:tabLst>
             </a:pPr>
             <a:r>
               <a:rPr b="0" lang="en-US" sz="4400" strike="noStrike" u="none">
@@ -4513,20 +5336,20 @@
               </a:rPr>
               <a:t>Click to edit Master title style</a:t>
             </a:r>
-            <a:endParaRPr b="0" lang="en-US" sz="4400" strike="noStrike" u="none">
-              <a:solidFill>
-                <a:schemeClr val="dk1"/>
-              </a:solidFill>
-              <a:effectLst/>
-              <a:uFillTx/>
-              <a:latin typeface="Calibri"/>
-            </a:endParaRPr>
-          </a:p>
-        </p:txBody>
-      </p:sp>
-      <p:sp>
-        <p:nvSpPr>
-          <p:cNvPr id="25" name="PlaceHolder 2"/>
+            <a:endParaRPr b="0" lang="sv-SE" sz="4400" strike="noStrike" u="none">
+              <a:solidFill>
+                <a:srgbClr val="000000"/>
+              </a:solidFill>
+              <a:effectLst/>
+              <a:uFillTx/>
+              <a:latin typeface="Arial"/>
+            </a:endParaRPr>
+          </a:p>
+        </p:txBody>
+      </p:sp>
+      <p:sp>
+        <p:nvSpPr>
+          <p:cNvPr id="31" name="PlaceHolder 2"/>
           <p:cNvSpPr>
             <a:spLocks noGrp="1"/>
           </p:cNvSpPr>
@@ -4537,7 +5360,7 @@
         <p:spPr>
           <a:xfrm>
             <a:off x="457200" y="1600200"/>
-            <a:ext cx="4038120" cy="4525560"/>
+            <a:ext cx="4036680" cy="4524120"/>
           </a:xfrm>
           <a:prstGeom prst="rect">
             <a:avLst/>
@@ -4576,13 +5399,13 @@
               </a:rPr>
               <a:t>Click to edit Master text styles</a:t>
             </a:r>
-            <a:endParaRPr b="0" lang="en-US" sz="2800" strike="noStrike" u="none">
-              <a:solidFill>
-                <a:schemeClr val="dk1"/>
-              </a:solidFill>
-              <a:effectLst/>
-              <a:uFillTx/>
-              <a:latin typeface="Calibri"/>
+            <a:endParaRPr b="0" lang="sv-SE" sz="2800" strike="noStrike" u="none">
+              <a:solidFill>
+                <a:srgbClr val="000000"/>
+              </a:solidFill>
+              <a:effectLst/>
+              <a:uFillTx/>
+              <a:latin typeface="Arial"/>
             </a:endParaRPr>
           </a:p>
           <a:p>
@@ -4610,13 +5433,13 @@
               </a:rPr>
               <a:t>Second level</a:t>
             </a:r>
-            <a:endParaRPr b="0" lang="en-US" sz="2400" strike="noStrike" u="none">
-              <a:solidFill>
-                <a:schemeClr val="dk1"/>
-              </a:solidFill>
-              <a:effectLst/>
-              <a:uFillTx/>
-              <a:latin typeface="Calibri"/>
+            <a:endParaRPr b="0" lang="sv-SE" sz="2400" strike="noStrike" u="none">
+              <a:solidFill>
+                <a:srgbClr val="000000"/>
+              </a:solidFill>
+              <a:effectLst/>
+              <a:uFillTx/>
+              <a:latin typeface="Arial"/>
             </a:endParaRPr>
           </a:p>
           <a:p>
@@ -4644,13 +5467,13 @@
               </a:rPr>
               <a:t>Third level</a:t>
             </a:r>
-            <a:endParaRPr b="0" lang="en-US" sz="2000" strike="noStrike" u="none">
-              <a:solidFill>
-                <a:schemeClr val="dk1"/>
-              </a:solidFill>
-              <a:effectLst/>
-              <a:uFillTx/>
-              <a:latin typeface="Calibri"/>
+            <a:endParaRPr b="0" lang="sv-SE" sz="2000" strike="noStrike" u="none">
+              <a:solidFill>
+                <a:srgbClr val="000000"/>
+              </a:solidFill>
+              <a:effectLst/>
+              <a:uFillTx/>
+              <a:latin typeface="Arial"/>
             </a:endParaRPr>
           </a:p>
           <a:p>
@@ -4678,13 +5501,13 @@
               </a:rPr>
               <a:t>Fourth level</a:t>
             </a:r>
-            <a:endParaRPr b="0" lang="en-US" sz="1800" strike="noStrike" u="none">
-              <a:solidFill>
-                <a:schemeClr val="dk1"/>
-              </a:solidFill>
-              <a:effectLst/>
-              <a:uFillTx/>
-              <a:latin typeface="Calibri"/>
+            <a:endParaRPr b="0" lang="sv-SE" sz="1800" strike="noStrike" u="none">
+              <a:solidFill>
+                <a:srgbClr val="000000"/>
+              </a:solidFill>
+              <a:effectLst/>
+              <a:uFillTx/>
+              <a:latin typeface="Arial"/>
             </a:endParaRPr>
           </a:p>
           <a:p>
@@ -4712,20 +5535,20 @@
               </a:rPr>
               <a:t>Fifth level</a:t>
             </a:r>
-            <a:endParaRPr b="0" lang="en-US" sz="1800" strike="noStrike" u="none">
-              <a:solidFill>
-                <a:schemeClr val="dk1"/>
-              </a:solidFill>
-              <a:effectLst/>
-              <a:uFillTx/>
-              <a:latin typeface="Calibri"/>
-            </a:endParaRPr>
-          </a:p>
-        </p:txBody>
-      </p:sp>
-      <p:sp>
-        <p:nvSpPr>
-          <p:cNvPr id="26" name="PlaceHolder 3"/>
+            <a:endParaRPr b="0" lang="sv-SE" sz="1800" strike="noStrike" u="none">
+              <a:solidFill>
+                <a:srgbClr val="000000"/>
+              </a:solidFill>
+              <a:effectLst/>
+              <a:uFillTx/>
+              <a:latin typeface="Arial"/>
+            </a:endParaRPr>
+          </a:p>
+        </p:txBody>
+      </p:sp>
+      <p:sp>
+        <p:nvSpPr>
+          <p:cNvPr id="32" name="PlaceHolder 3"/>
           <p:cNvSpPr>
             <a:spLocks noGrp="1"/>
           </p:cNvSpPr>
@@ -4736,7 +5559,7 @@
         <p:spPr>
           <a:xfrm>
             <a:off x="4648320" y="1600200"/>
-            <a:ext cx="4038120" cy="4525560"/>
+            <a:ext cx="4036680" cy="4524120"/>
           </a:xfrm>
           <a:prstGeom prst="rect">
             <a:avLst/>
@@ -4775,13 +5598,13 @@
               </a:rPr>
               <a:t>Click to edit Master text styles</a:t>
             </a:r>
-            <a:endParaRPr b="0" lang="en-US" sz="2800" strike="noStrike" u="none">
-              <a:solidFill>
-                <a:schemeClr val="dk1"/>
-              </a:solidFill>
-              <a:effectLst/>
-              <a:uFillTx/>
-              <a:latin typeface="Calibri"/>
+            <a:endParaRPr b="0" lang="sv-SE" sz="2800" strike="noStrike" u="none">
+              <a:solidFill>
+                <a:srgbClr val="000000"/>
+              </a:solidFill>
+              <a:effectLst/>
+              <a:uFillTx/>
+              <a:latin typeface="Arial"/>
             </a:endParaRPr>
           </a:p>
           <a:p>
@@ -4809,13 +5632,13 @@
               </a:rPr>
               <a:t>Second level</a:t>
             </a:r>
-            <a:endParaRPr b="0" lang="en-US" sz="2400" strike="noStrike" u="none">
-              <a:solidFill>
-                <a:schemeClr val="dk1"/>
-              </a:solidFill>
-              <a:effectLst/>
-              <a:uFillTx/>
-              <a:latin typeface="Calibri"/>
+            <a:endParaRPr b="0" lang="sv-SE" sz="2400" strike="noStrike" u="none">
+              <a:solidFill>
+                <a:srgbClr val="000000"/>
+              </a:solidFill>
+              <a:effectLst/>
+              <a:uFillTx/>
+              <a:latin typeface="Arial"/>
             </a:endParaRPr>
           </a:p>
           <a:p>
@@ -4843,13 +5666,13 @@
               </a:rPr>
               <a:t>Third level</a:t>
             </a:r>
-            <a:endParaRPr b="0" lang="en-US" sz="2000" strike="noStrike" u="none">
-              <a:solidFill>
-                <a:schemeClr val="dk1"/>
-              </a:solidFill>
-              <a:effectLst/>
-              <a:uFillTx/>
-              <a:latin typeface="Calibri"/>
+            <a:endParaRPr b="0" lang="sv-SE" sz="2000" strike="noStrike" u="none">
+              <a:solidFill>
+                <a:srgbClr val="000000"/>
+              </a:solidFill>
+              <a:effectLst/>
+              <a:uFillTx/>
+              <a:latin typeface="Arial"/>
             </a:endParaRPr>
           </a:p>
           <a:p>
@@ -4877,13 +5700,13 @@
               </a:rPr>
               <a:t>Fourth level</a:t>
             </a:r>
-            <a:endParaRPr b="0" lang="en-US" sz="1800" strike="noStrike" u="none">
-              <a:solidFill>
-                <a:schemeClr val="dk1"/>
-              </a:solidFill>
-              <a:effectLst/>
-              <a:uFillTx/>
-              <a:latin typeface="Calibri"/>
+            <a:endParaRPr b="0" lang="sv-SE" sz="1800" strike="noStrike" u="none">
+              <a:solidFill>
+                <a:srgbClr val="000000"/>
+              </a:solidFill>
+              <a:effectLst/>
+              <a:uFillTx/>
+              <a:latin typeface="Arial"/>
             </a:endParaRPr>
           </a:p>
           <a:p>
@@ -4911,31 +5734,31 @@
               </a:rPr>
               <a:t>Fifth level</a:t>
             </a:r>
-            <a:endParaRPr b="0" lang="en-US" sz="1800" strike="noStrike" u="none">
-              <a:solidFill>
-                <a:schemeClr val="dk1"/>
-              </a:solidFill>
-              <a:effectLst/>
-              <a:uFillTx/>
-              <a:latin typeface="Calibri"/>
-            </a:endParaRPr>
-          </a:p>
-        </p:txBody>
-      </p:sp>
-      <p:sp>
-        <p:nvSpPr>
-          <p:cNvPr id="27" name="PlaceHolder 4"/>
+            <a:endParaRPr b="0" lang="sv-SE" sz="1800" strike="noStrike" u="none">
+              <a:solidFill>
+                <a:srgbClr val="000000"/>
+              </a:solidFill>
+              <a:effectLst/>
+              <a:uFillTx/>
+              <a:latin typeface="Arial"/>
+            </a:endParaRPr>
+          </a:p>
+        </p:txBody>
+      </p:sp>
+      <p:sp>
+        <p:nvSpPr>
+          <p:cNvPr id="33" name="PlaceHolder 4"/>
           <p:cNvSpPr>
             <a:spLocks noGrp="1"/>
           </p:cNvSpPr>
           <p:nvPr>
-            <p:ph type="dt" idx="16"/>
+            <p:ph type="dt" idx="19"/>
           </p:nvPr>
         </p:nvSpPr>
         <p:spPr>
           <a:xfrm>
             <a:off x="457200" y="6356520"/>
-            <a:ext cx="2133360" cy="364680"/>
+            <a:ext cx="2131920" cy="363240"/>
           </a:xfrm>
           <a:prstGeom prst="rect">
             <a:avLst/>
@@ -4955,6 +5778,9 @@
                 <a:spcPct val="100000"/>
               </a:lnSpc>
               <a:buNone/>
+              <a:tabLst>
+                <a:tab algn="l" pos="0"/>
+              </a:tabLst>
               <a:defRPr b="0" lang="en-US" sz="1200" strike="noStrike" u="none">
                 <a:solidFill>
                   <a:schemeClr val="dk1">
@@ -4973,6 +5799,9 @@
                 <a:spcPct val="100000"/>
               </a:lnSpc>
               <a:buNone/>
+              <a:tabLst>
+                <a:tab algn="l" pos="0"/>
+              </a:tabLst>
             </a:pPr>
             <a:r>
               <a:rPr b="0" lang="en-US" sz="1200" strike="noStrike" u="none">
@@ -5000,18 +5829,18 @@
       </p:sp>
       <p:sp>
         <p:nvSpPr>
-          <p:cNvPr id="28" name="PlaceHolder 5"/>
+          <p:cNvPr id="34" name="PlaceHolder 5"/>
           <p:cNvSpPr>
             <a:spLocks noGrp="1"/>
           </p:cNvSpPr>
           <p:nvPr>
-            <p:ph type="ftr" idx="17"/>
+            <p:ph type="ftr" idx="20"/>
           </p:nvPr>
         </p:nvSpPr>
         <p:spPr>
           <a:xfrm>
             <a:off x="3124080" y="6356520"/>
-            <a:ext cx="2895120" cy="364680"/>
+            <a:ext cx="2893680" cy="363240"/>
           </a:xfrm>
           <a:prstGeom prst="rect">
             <a:avLst/>
@@ -5027,7 +5856,13 @@
           </a:bodyPr>
           <a:lstStyle>
             <a:lvl1pPr indent="0" algn="ctr">
+              <a:lnSpc>
+                <a:spcPct val="100000"/>
+              </a:lnSpc>
               <a:buNone/>
+              <a:tabLst>
+                <a:tab algn="l" pos="0"/>
+              </a:tabLst>
               <a:defRPr b="0" lang="sv-SE" sz="1400" strike="noStrike" u="none">
                 <a:solidFill>
                   <a:srgbClr val="000000"/>
@@ -5040,7 +5875,13 @@
           </a:lstStyle>
           <a:p>
             <a:pPr indent="0" algn="ctr">
+              <a:lnSpc>
+                <a:spcPct val="100000"/>
+              </a:lnSpc>
               <a:buNone/>
+              <a:tabLst>
+                <a:tab algn="l" pos="0"/>
+              </a:tabLst>
             </a:pPr>
             <a:r>
               <a:rPr b="0" lang="sv-SE" sz="1400" strike="noStrike" u="none">
@@ -5066,18 +5907,18 @@
       </p:sp>
       <p:sp>
         <p:nvSpPr>
-          <p:cNvPr id="29" name="PlaceHolder 6"/>
+          <p:cNvPr id="35" name="PlaceHolder 6"/>
           <p:cNvSpPr>
             <a:spLocks noGrp="1"/>
           </p:cNvSpPr>
           <p:nvPr>
-            <p:ph type="sldNum" idx="18"/>
+            <p:ph type="sldNum" idx="21"/>
           </p:nvPr>
         </p:nvSpPr>
         <p:spPr>
           <a:xfrm>
             <a:off x="6553080" y="6356520"/>
-            <a:ext cx="2133360" cy="364680"/>
+            <a:ext cx="2131920" cy="363240"/>
           </a:xfrm>
           <a:prstGeom prst="rect">
             <a:avLst/>
@@ -5097,6 +5938,9 @@
                 <a:spcPct val="100000"/>
               </a:lnSpc>
               <a:buNone/>
+              <a:tabLst>
+                <a:tab algn="l" pos="0"/>
+              </a:tabLst>
               <a:defRPr b="0" lang="en-US" sz="1200" strike="noStrike" u="none">
                 <a:solidFill>
                   <a:schemeClr val="dk1">
@@ -5115,8 +5959,11 @@
                 <a:spcPct val="100000"/>
               </a:lnSpc>
               <a:buNone/>
-            </a:pPr>
-            <a:fld id="{472669C6-8BD2-4F39-B36B-2EECC615D823}" type="slidenum">
+              <a:tabLst>
+                <a:tab algn="l" pos="0"/>
+              </a:tabLst>
+            </a:pPr>
+            <a:fld id="{8BA574B6-93D9-4FC9-AC33-FFE4F1F64D36}" type="slidenum">
               <a:rPr b="0" lang="en-US" sz="1200" strike="noStrike" u="none">
                 <a:solidFill>
                   <a:schemeClr val="dk1">
@@ -5145,7 +5992,7 @@
 </p:sldLayout>
 </file>
 
-<file path=ppt/slideLayouts/slideLayout7.xml><?xml version="1.0" encoding="utf-8"?>
+<file path=ppt/slideLayouts/slideLayout8.xml><?xml version="1.0" encoding="utf-8"?>
 <p:sldLayout xmlns:a="http://schemas.openxmlformats.org/drawingml/2006/main" xmlns:p="http://schemas.openxmlformats.org/presentationml/2006/main" xmlns:r="http://schemas.openxmlformats.org/officeDocument/2006/relationships" xmlns:p14="http://schemas.microsoft.com/office/powerpoint/2010/main" xmlns:p15="http://schemas.microsoft.com/office/powerpoint/2012/main" xmlns:mc="http://schemas.openxmlformats.org/markup-compatibility/2006" type="blank" preserve="1">
   <p:cSld name="Comparison">
     <p:bg>
@@ -5171,7 +6018,7 @@
       </p:grpSpPr>
       <p:sp>
         <p:nvSpPr>
-          <p:cNvPr id="30" name="PlaceHolder 1"/>
+          <p:cNvPr id="36" name="PlaceHolder 1"/>
           <p:cNvSpPr>
             <a:spLocks noGrp="1"/>
           </p:cNvSpPr>
@@ -5182,7 +6029,7 @@
         <p:spPr>
           <a:xfrm>
             <a:off x="457200" y="274680"/>
-            <a:ext cx="8229240" cy="1142640"/>
+            <a:ext cx="8227800" cy="1141200"/>
           </a:xfrm>
           <a:prstGeom prst="rect">
             <a:avLst/>
@@ -5202,6 +6049,9 @@
                 <a:spcPct val="100000"/>
               </a:lnSpc>
               <a:buNone/>
+              <a:tabLst>
+                <a:tab algn="l" pos="0"/>
+              </a:tabLst>
             </a:pPr>
             <a:r>
               <a:rPr b="0" lang="en-US" sz="4400" strike="noStrike" u="none">
@@ -5214,20 +6064,20 @@
               </a:rPr>
               <a:t>Click to edit Master title style</a:t>
             </a:r>
-            <a:endParaRPr b="0" lang="en-US" sz="4400" strike="noStrike" u="none">
-              <a:solidFill>
-                <a:schemeClr val="dk1"/>
-              </a:solidFill>
-              <a:effectLst/>
-              <a:uFillTx/>
-              <a:latin typeface="Calibri"/>
-            </a:endParaRPr>
-          </a:p>
-        </p:txBody>
-      </p:sp>
-      <p:sp>
-        <p:nvSpPr>
-          <p:cNvPr id="31" name="PlaceHolder 2"/>
+            <a:endParaRPr b="0" lang="sv-SE" sz="4400" strike="noStrike" u="none">
+              <a:solidFill>
+                <a:srgbClr val="000000"/>
+              </a:solidFill>
+              <a:effectLst/>
+              <a:uFillTx/>
+              <a:latin typeface="Arial"/>
+            </a:endParaRPr>
+          </a:p>
+        </p:txBody>
+      </p:sp>
+      <p:sp>
+        <p:nvSpPr>
+          <p:cNvPr id="37" name="PlaceHolder 2"/>
           <p:cNvSpPr>
             <a:spLocks noGrp="1"/>
           </p:cNvSpPr>
@@ -5238,7 +6088,7 @@
         <p:spPr>
           <a:xfrm>
             <a:off x="457200" y="1535040"/>
-            <a:ext cx="4039920" cy="639360"/>
+            <a:ext cx="4038480" cy="637920"/>
           </a:xfrm>
           <a:prstGeom prst="rect">
             <a:avLst/>
@@ -5276,20 +6126,20 @@
               </a:rPr>
               <a:t>Click to edit Master text styles</a:t>
             </a:r>
-            <a:endParaRPr b="0" lang="en-US" sz="2400" strike="noStrike" u="none">
-              <a:solidFill>
-                <a:schemeClr val="dk1"/>
-              </a:solidFill>
-              <a:effectLst/>
-              <a:uFillTx/>
-              <a:latin typeface="Calibri"/>
-            </a:endParaRPr>
-          </a:p>
-        </p:txBody>
-      </p:sp>
-      <p:sp>
-        <p:nvSpPr>
-          <p:cNvPr id="32" name="PlaceHolder 3"/>
+            <a:endParaRPr b="0" lang="sv-SE" sz="2400" strike="noStrike" u="none">
+              <a:solidFill>
+                <a:srgbClr val="000000"/>
+              </a:solidFill>
+              <a:effectLst/>
+              <a:uFillTx/>
+              <a:latin typeface="Arial"/>
+            </a:endParaRPr>
+          </a:p>
+        </p:txBody>
+      </p:sp>
+      <p:sp>
+        <p:nvSpPr>
+          <p:cNvPr id="38" name="PlaceHolder 3"/>
           <p:cNvSpPr>
             <a:spLocks noGrp="1"/>
           </p:cNvSpPr>
@@ -5300,7 +6150,7 @@
         <p:spPr>
           <a:xfrm>
             <a:off x="457200" y="2174760"/>
-            <a:ext cx="4039920" cy="3951000"/>
+            <a:ext cx="4038480" cy="3949560"/>
           </a:xfrm>
           <a:prstGeom prst="rect">
             <a:avLst/>
@@ -5339,13 +6189,13 @@
               </a:rPr>
               <a:t>Click to edit Master text styles</a:t>
             </a:r>
-            <a:endParaRPr b="0" lang="en-US" sz="2400" strike="noStrike" u="none">
-              <a:solidFill>
-                <a:schemeClr val="dk1"/>
-              </a:solidFill>
-              <a:effectLst/>
-              <a:uFillTx/>
-              <a:latin typeface="Calibri"/>
+            <a:endParaRPr b="0" lang="sv-SE" sz="2400" strike="noStrike" u="none">
+              <a:solidFill>
+                <a:srgbClr val="000000"/>
+              </a:solidFill>
+              <a:effectLst/>
+              <a:uFillTx/>
+              <a:latin typeface="Arial"/>
             </a:endParaRPr>
           </a:p>
           <a:p>
@@ -5373,13 +6223,13 @@
               </a:rPr>
               <a:t>Second level</a:t>
             </a:r>
-            <a:endParaRPr b="0" lang="en-US" sz="2000" strike="noStrike" u="none">
-              <a:solidFill>
-                <a:schemeClr val="dk1"/>
-              </a:solidFill>
-              <a:effectLst/>
-              <a:uFillTx/>
-              <a:latin typeface="Calibri"/>
+            <a:endParaRPr b="0" lang="sv-SE" sz="2000" strike="noStrike" u="none">
+              <a:solidFill>
+                <a:srgbClr val="000000"/>
+              </a:solidFill>
+              <a:effectLst/>
+              <a:uFillTx/>
+              <a:latin typeface="Arial"/>
             </a:endParaRPr>
           </a:p>
           <a:p>
@@ -5407,13 +6257,13 @@
               </a:rPr>
               <a:t>Third level</a:t>
             </a:r>
-            <a:endParaRPr b="0" lang="en-US" sz="1800" strike="noStrike" u="none">
-              <a:solidFill>
-                <a:schemeClr val="dk1"/>
-              </a:solidFill>
-              <a:effectLst/>
-              <a:uFillTx/>
-              <a:latin typeface="Calibri"/>
+            <a:endParaRPr b="0" lang="sv-SE" sz="1800" strike="noStrike" u="none">
+              <a:solidFill>
+                <a:srgbClr val="000000"/>
+              </a:solidFill>
+              <a:effectLst/>
+              <a:uFillTx/>
+              <a:latin typeface="Arial"/>
             </a:endParaRPr>
           </a:p>
           <a:p>
@@ -5441,13 +6291,13 @@
               </a:rPr>
               <a:t>Fourth level</a:t>
             </a:r>
-            <a:endParaRPr b="0" lang="en-US" sz="1600" strike="noStrike" u="none">
-              <a:solidFill>
-                <a:schemeClr val="dk1"/>
-              </a:solidFill>
-              <a:effectLst/>
-              <a:uFillTx/>
-              <a:latin typeface="Calibri"/>
+            <a:endParaRPr b="0" lang="sv-SE" sz="1600" strike="noStrike" u="none">
+              <a:solidFill>
+                <a:srgbClr val="000000"/>
+              </a:solidFill>
+              <a:effectLst/>
+              <a:uFillTx/>
+              <a:latin typeface="Arial"/>
             </a:endParaRPr>
           </a:p>
           <a:p>
@@ -5475,20 +6325,20 @@
               </a:rPr>
               <a:t>Fifth level</a:t>
             </a:r>
-            <a:endParaRPr b="0" lang="en-US" sz="1600" strike="noStrike" u="none">
-              <a:solidFill>
-                <a:schemeClr val="dk1"/>
-              </a:solidFill>
-              <a:effectLst/>
-              <a:uFillTx/>
-              <a:latin typeface="Calibri"/>
-            </a:endParaRPr>
-          </a:p>
-        </p:txBody>
-      </p:sp>
-      <p:sp>
-        <p:nvSpPr>
-          <p:cNvPr id="33" name="PlaceHolder 4"/>
+            <a:endParaRPr b="0" lang="sv-SE" sz="1600" strike="noStrike" u="none">
+              <a:solidFill>
+                <a:srgbClr val="000000"/>
+              </a:solidFill>
+              <a:effectLst/>
+              <a:uFillTx/>
+              <a:latin typeface="Arial"/>
+            </a:endParaRPr>
+          </a:p>
+        </p:txBody>
+      </p:sp>
+      <p:sp>
+        <p:nvSpPr>
+          <p:cNvPr id="39" name="PlaceHolder 4"/>
           <p:cNvSpPr>
             <a:spLocks noGrp="1"/>
           </p:cNvSpPr>
@@ -5499,7 +6349,7 @@
         <p:spPr>
           <a:xfrm>
             <a:off x="4645080" y="1535040"/>
-            <a:ext cx="4041360" cy="639360"/>
+            <a:ext cx="4039920" cy="637920"/>
           </a:xfrm>
           <a:prstGeom prst="rect">
             <a:avLst/>
@@ -5537,20 +6387,20 @@
               </a:rPr>
               <a:t>Click to edit Master text styles</a:t>
             </a:r>
-            <a:endParaRPr b="0" lang="en-US" sz="2400" strike="noStrike" u="none">
-              <a:solidFill>
-                <a:schemeClr val="dk1"/>
-              </a:solidFill>
-              <a:effectLst/>
-              <a:uFillTx/>
-              <a:latin typeface="Calibri"/>
-            </a:endParaRPr>
-          </a:p>
-        </p:txBody>
-      </p:sp>
-      <p:sp>
-        <p:nvSpPr>
-          <p:cNvPr id="34" name="PlaceHolder 5"/>
+            <a:endParaRPr b="0" lang="sv-SE" sz="2400" strike="noStrike" u="none">
+              <a:solidFill>
+                <a:srgbClr val="000000"/>
+              </a:solidFill>
+              <a:effectLst/>
+              <a:uFillTx/>
+              <a:latin typeface="Arial"/>
+            </a:endParaRPr>
+          </a:p>
+        </p:txBody>
+      </p:sp>
+      <p:sp>
+        <p:nvSpPr>
+          <p:cNvPr id="40" name="PlaceHolder 5"/>
           <p:cNvSpPr>
             <a:spLocks noGrp="1"/>
           </p:cNvSpPr>
@@ -5561,7 +6411,7 @@
         <p:spPr>
           <a:xfrm>
             <a:off x="4645080" y="2174760"/>
-            <a:ext cx="4041360" cy="3951000"/>
+            <a:ext cx="4039920" cy="3949560"/>
           </a:xfrm>
           <a:prstGeom prst="rect">
             <a:avLst/>
@@ -5600,13 +6450,13 @@
               </a:rPr>
               <a:t>Click to edit Master text styles</a:t>
             </a:r>
-            <a:endParaRPr b="0" lang="en-US" sz="2400" strike="noStrike" u="none">
-              <a:solidFill>
-                <a:schemeClr val="dk1"/>
-              </a:solidFill>
-              <a:effectLst/>
-              <a:uFillTx/>
-              <a:latin typeface="Calibri"/>
+            <a:endParaRPr b="0" lang="sv-SE" sz="2400" strike="noStrike" u="none">
+              <a:solidFill>
+                <a:srgbClr val="000000"/>
+              </a:solidFill>
+              <a:effectLst/>
+              <a:uFillTx/>
+              <a:latin typeface="Arial"/>
             </a:endParaRPr>
           </a:p>
           <a:p>
@@ -5634,13 +6484,13 @@
               </a:rPr>
               <a:t>Second level</a:t>
             </a:r>
-            <a:endParaRPr b="0" lang="en-US" sz="2000" strike="noStrike" u="none">
-              <a:solidFill>
-                <a:schemeClr val="dk1"/>
-              </a:solidFill>
-              <a:effectLst/>
-              <a:uFillTx/>
-              <a:latin typeface="Calibri"/>
+            <a:endParaRPr b="0" lang="sv-SE" sz="2000" strike="noStrike" u="none">
+              <a:solidFill>
+                <a:srgbClr val="000000"/>
+              </a:solidFill>
+              <a:effectLst/>
+              <a:uFillTx/>
+              <a:latin typeface="Arial"/>
             </a:endParaRPr>
           </a:p>
           <a:p>
@@ -5668,13 +6518,13 @@
               </a:rPr>
               <a:t>Third level</a:t>
             </a:r>
-            <a:endParaRPr b="0" lang="en-US" sz="1800" strike="noStrike" u="none">
-              <a:solidFill>
-                <a:schemeClr val="dk1"/>
-              </a:solidFill>
-              <a:effectLst/>
-              <a:uFillTx/>
-              <a:latin typeface="Calibri"/>
+            <a:endParaRPr b="0" lang="sv-SE" sz="1800" strike="noStrike" u="none">
+              <a:solidFill>
+                <a:srgbClr val="000000"/>
+              </a:solidFill>
+              <a:effectLst/>
+              <a:uFillTx/>
+              <a:latin typeface="Arial"/>
             </a:endParaRPr>
           </a:p>
           <a:p>
@@ -5702,13 +6552,13 @@
               </a:rPr>
               <a:t>Fourth level</a:t>
             </a:r>
-            <a:endParaRPr b="0" lang="en-US" sz="1600" strike="noStrike" u="none">
-              <a:solidFill>
-                <a:schemeClr val="dk1"/>
-              </a:solidFill>
-              <a:effectLst/>
-              <a:uFillTx/>
-              <a:latin typeface="Calibri"/>
+            <a:endParaRPr b="0" lang="sv-SE" sz="1600" strike="noStrike" u="none">
+              <a:solidFill>
+                <a:srgbClr val="000000"/>
+              </a:solidFill>
+              <a:effectLst/>
+              <a:uFillTx/>
+              <a:latin typeface="Arial"/>
             </a:endParaRPr>
           </a:p>
           <a:p>
@@ -5736,31 +6586,31 @@
               </a:rPr>
               <a:t>Fifth level</a:t>
             </a:r>
-            <a:endParaRPr b="0" lang="en-US" sz="1600" strike="noStrike" u="none">
-              <a:solidFill>
-                <a:schemeClr val="dk1"/>
-              </a:solidFill>
-              <a:effectLst/>
-              <a:uFillTx/>
-              <a:latin typeface="Calibri"/>
-            </a:endParaRPr>
-          </a:p>
-        </p:txBody>
-      </p:sp>
-      <p:sp>
-        <p:nvSpPr>
-          <p:cNvPr id="35" name="PlaceHolder 6"/>
+            <a:endParaRPr b="0" lang="sv-SE" sz="1600" strike="noStrike" u="none">
+              <a:solidFill>
+                <a:srgbClr val="000000"/>
+              </a:solidFill>
+              <a:effectLst/>
+              <a:uFillTx/>
+              <a:latin typeface="Arial"/>
+            </a:endParaRPr>
+          </a:p>
+        </p:txBody>
+      </p:sp>
+      <p:sp>
+        <p:nvSpPr>
+          <p:cNvPr id="41" name="PlaceHolder 6"/>
           <p:cNvSpPr>
             <a:spLocks noGrp="1"/>
           </p:cNvSpPr>
           <p:nvPr>
-            <p:ph type="dt" idx="19"/>
+            <p:ph type="dt" idx="22"/>
           </p:nvPr>
         </p:nvSpPr>
         <p:spPr>
           <a:xfrm>
             <a:off x="457200" y="6356520"/>
-            <a:ext cx="2133360" cy="364680"/>
+            <a:ext cx="2131920" cy="363240"/>
           </a:xfrm>
           <a:prstGeom prst="rect">
             <a:avLst/>
@@ -5780,6 +6630,9 @@
                 <a:spcPct val="100000"/>
               </a:lnSpc>
               <a:buNone/>
+              <a:tabLst>
+                <a:tab algn="l" pos="0"/>
+              </a:tabLst>
               <a:defRPr b="0" lang="en-US" sz="1200" strike="noStrike" u="none">
                 <a:solidFill>
                   <a:schemeClr val="dk1">
@@ -5798,6 +6651,9 @@
                 <a:spcPct val="100000"/>
               </a:lnSpc>
               <a:buNone/>
+              <a:tabLst>
+                <a:tab algn="l" pos="0"/>
+              </a:tabLst>
             </a:pPr>
             <a:r>
               <a:rPr b="0" lang="en-US" sz="1200" strike="noStrike" u="none">
@@ -5825,18 +6681,18 @@
       </p:sp>
       <p:sp>
         <p:nvSpPr>
-          <p:cNvPr id="36" name="PlaceHolder 7"/>
+          <p:cNvPr id="42" name="PlaceHolder 7"/>
           <p:cNvSpPr>
             <a:spLocks noGrp="1"/>
           </p:cNvSpPr>
           <p:nvPr>
-            <p:ph type="ftr" idx="20"/>
+            <p:ph type="ftr" idx="23"/>
           </p:nvPr>
         </p:nvSpPr>
         <p:spPr>
           <a:xfrm>
             <a:off x="3124080" y="6356520"/>
-            <a:ext cx="2895120" cy="364680"/>
+            <a:ext cx="2893680" cy="363240"/>
           </a:xfrm>
           <a:prstGeom prst="rect">
             <a:avLst/>
@@ -5852,7 +6708,13 @@
           </a:bodyPr>
           <a:lstStyle>
             <a:lvl1pPr indent="0" algn="ctr">
+              <a:lnSpc>
+                <a:spcPct val="100000"/>
+              </a:lnSpc>
               <a:buNone/>
+              <a:tabLst>
+                <a:tab algn="l" pos="0"/>
+              </a:tabLst>
               <a:defRPr b="0" lang="sv-SE" sz="1400" strike="noStrike" u="none">
                 <a:solidFill>
                   <a:srgbClr val="000000"/>
@@ -5865,7 +6727,13 @@
           </a:lstStyle>
           <a:p>
             <a:pPr indent="0" algn="ctr">
+              <a:lnSpc>
+                <a:spcPct val="100000"/>
+              </a:lnSpc>
               <a:buNone/>
+              <a:tabLst>
+                <a:tab algn="l" pos="0"/>
+              </a:tabLst>
             </a:pPr>
             <a:r>
               <a:rPr b="0" lang="sv-SE" sz="1400" strike="noStrike" u="none">
@@ -5891,18 +6759,18 @@
       </p:sp>
       <p:sp>
         <p:nvSpPr>
-          <p:cNvPr id="37" name="PlaceHolder 8"/>
+          <p:cNvPr id="43" name="PlaceHolder 8"/>
           <p:cNvSpPr>
             <a:spLocks noGrp="1"/>
           </p:cNvSpPr>
           <p:nvPr>
-            <p:ph type="sldNum" idx="21"/>
+            <p:ph type="sldNum" idx="24"/>
           </p:nvPr>
         </p:nvSpPr>
         <p:spPr>
           <a:xfrm>
             <a:off x="6553080" y="6356520"/>
-            <a:ext cx="2133360" cy="364680"/>
+            <a:ext cx="2131920" cy="363240"/>
           </a:xfrm>
           <a:prstGeom prst="rect">
             <a:avLst/>
@@ -5922,6 +6790,9 @@
                 <a:spcPct val="100000"/>
               </a:lnSpc>
               <a:buNone/>
+              <a:tabLst>
+                <a:tab algn="l" pos="0"/>
+              </a:tabLst>
               <a:defRPr b="0" lang="en-US" sz="1200" strike="noStrike" u="none">
                 <a:solidFill>
                   <a:schemeClr val="dk1">
@@ -5940,8 +6811,11 @@
                 <a:spcPct val="100000"/>
               </a:lnSpc>
               <a:buNone/>
-            </a:pPr>
-            <a:fld id="{52DCFC60-33F6-4074-8323-D2B3A0A3B0D9}" type="slidenum">
+              <a:tabLst>
+                <a:tab algn="l" pos="0"/>
+              </a:tabLst>
+            </a:pPr>
+            <a:fld id="{40113F2B-CF9A-4CFE-A794-117118AADC2D}" type="slidenum">
               <a:rPr b="0" lang="en-US" sz="1200" strike="noStrike" u="none">
                 <a:solidFill>
                   <a:schemeClr val="dk1">
@@ -5970,7 +6844,7 @@
 </p:sldLayout>
 </file>
 
-<file path=ppt/slideLayouts/slideLayout8.xml><?xml version="1.0" encoding="utf-8"?>
+<file path=ppt/slideLayouts/slideLayout9.xml><?xml version="1.0" encoding="utf-8"?>
 <p:sldLayout xmlns:a="http://schemas.openxmlformats.org/drawingml/2006/main" xmlns:p="http://schemas.openxmlformats.org/presentationml/2006/main" xmlns:r="http://schemas.openxmlformats.org/officeDocument/2006/relationships" xmlns:p14="http://schemas.microsoft.com/office/powerpoint/2010/main" xmlns:p15="http://schemas.microsoft.com/office/powerpoint/2012/main" xmlns:mc="http://schemas.openxmlformats.org/markup-compatibility/2006" type="titleOnly" preserve="1">
   <p:cSld name="Title Only">
     <p:bg>
@@ -5996,7 +6870,7 @@
       </p:grpSpPr>
       <p:sp>
         <p:nvSpPr>
-          <p:cNvPr id="38" name="PlaceHolder 1"/>
+          <p:cNvPr id="44" name="PlaceHolder 1"/>
           <p:cNvSpPr>
             <a:spLocks noGrp="1"/>
           </p:cNvSpPr>
@@ -6007,7 +6881,7 @@
         <p:spPr>
           <a:xfrm>
             <a:off x="457200" y="274680"/>
-            <a:ext cx="8229240" cy="1142640"/>
+            <a:ext cx="8227800" cy="1141200"/>
           </a:xfrm>
           <a:prstGeom prst="rect">
             <a:avLst/>
@@ -6027,6 +6901,9 @@
                 <a:spcPct val="100000"/>
               </a:lnSpc>
               <a:buNone/>
+              <a:tabLst>
+                <a:tab algn="l" pos="0"/>
+              </a:tabLst>
             </a:pPr>
             <a:r>
               <a:rPr b="0" lang="en-US" sz="4400" strike="noStrike" u="none">
@@ -6039,267 +6916,20 @@
               </a:rPr>
               <a:t>Click to edit Master title style</a:t>
             </a:r>
-            <a:endParaRPr b="0" lang="en-US" sz="4400" strike="noStrike" u="none">
-              <a:solidFill>
-                <a:schemeClr val="dk1"/>
-              </a:solidFill>
-              <a:effectLst/>
-              <a:uFillTx/>
-              <a:latin typeface="Calibri"/>
-            </a:endParaRPr>
-          </a:p>
-        </p:txBody>
-      </p:sp>
-      <p:sp>
-        <p:nvSpPr>
-          <p:cNvPr id="39" name="PlaceHolder 2"/>
-          <p:cNvSpPr>
-            <a:spLocks noGrp="1"/>
-          </p:cNvSpPr>
-          <p:nvPr>
-            <p:ph type="dt" idx="22"/>
-          </p:nvPr>
-        </p:nvSpPr>
-        <p:spPr>
-          <a:xfrm>
-            <a:off x="457200" y="6356520"/>
-            <a:ext cx="2133360" cy="364680"/>
-          </a:xfrm>
-          <a:prstGeom prst="rect">
-            <a:avLst/>
-          </a:prstGeom>
-          <a:noFill/>
-          <a:ln w="0">
-            <a:noFill/>
-          </a:ln>
-        </p:spPr>
-        <p:txBody>
-          <a:bodyPr lIns="91440" rIns="91440" tIns="45720" bIns="45720" anchor="ctr">
-            <a:noAutofit/>
-          </a:bodyPr>
-          <a:lstStyle>
-            <a:lvl1pPr indent="0" defTabSz="457200">
-              <a:lnSpc>
-                <a:spcPct val="100000"/>
-              </a:lnSpc>
-              <a:buNone/>
-              <a:defRPr b="0" lang="en-US" sz="1200" strike="noStrike" u="none">
-                <a:solidFill>
-                  <a:schemeClr val="dk1">
-                    <a:tint val="75000"/>
-                  </a:schemeClr>
-                </a:solidFill>
-                <a:effectLst/>
-                <a:uFillTx/>
-                <a:latin typeface="Calibri"/>
-              </a:defRPr>
-            </a:lvl1pPr>
-          </a:lstStyle>
-          <a:p>
-            <a:pPr indent="0" defTabSz="457200">
-              <a:lnSpc>
-                <a:spcPct val="100000"/>
-              </a:lnSpc>
-              <a:buNone/>
-            </a:pPr>
-            <a:r>
-              <a:rPr b="0" lang="en-US" sz="1200" strike="noStrike" u="none">
-                <a:solidFill>
-                  <a:schemeClr val="dk1">
-                    <a:tint val="75000"/>
-                  </a:schemeClr>
-                </a:solidFill>
-                <a:effectLst/>
-                <a:uFillTx/>
-                <a:latin typeface="Calibri"/>
-              </a:rPr>
-              <a:t>&lt;datum/tid&gt;</a:t>
-            </a:r>
-            <a:endParaRPr b="0" lang="sv-SE" sz="1200" strike="noStrike" u="none">
-              <a:solidFill>
-                <a:srgbClr val="000000"/>
-              </a:solidFill>
-              <a:effectLst/>
-              <a:uFillTx/>
-              <a:latin typeface="Times New Roman"/>
-            </a:endParaRPr>
-          </a:p>
-        </p:txBody>
-      </p:sp>
-      <p:sp>
-        <p:nvSpPr>
-          <p:cNvPr id="40" name="PlaceHolder 3"/>
-          <p:cNvSpPr>
-            <a:spLocks noGrp="1"/>
-          </p:cNvSpPr>
-          <p:nvPr>
-            <p:ph type="ftr" idx="23"/>
-          </p:nvPr>
-        </p:nvSpPr>
-        <p:spPr>
-          <a:xfrm>
-            <a:off x="3124080" y="6356520"/>
-            <a:ext cx="2895120" cy="364680"/>
-          </a:xfrm>
-          <a:prstGeom prst="rect">
-            <a:avLst/>
-          </a:prstGeom>
-          <a:noFill/>
-          <a:ln w="0">
-            <a:noFill/>
-          </a:ln>
-        </p:spPr>
-        <p:txBody>
-          <a:bodyPr lIns="91440" rIns="91440" tIns="45720" bIns="45720" anchor="ctr">
-            <a:noAutofit/>
-          </a:bodyPr>
-          <a:lstStyle>
-            <a:lvl1pPr indent="0" algn="ctr">
-              <a:buNone/>
-              <a:defRPr b="0" lang="sv-SE" sz="1400" strike="noStrike" u="none">
-                <a:solidFill>
-                  <a:srgbClr val="000000"/>
-                </a:solidFill>
-                <a:effectLst/>
-                <a:uFillTx/>
-                <a:latin typeface="Times New Roman"/>
-              </a:defRPr>
-            </a:lvl1pPr>
-          </a:lstStyle>
-          <a:p>
-            <a:pPr indent="0" algn="ctr">
-              <a:buNone/>
-            </a:pPr>
-            <a:r>
-              <a:rPr b="0" lang="sv-SE" sz="1400" strike="noStrike" u="none">
-                <a:solidFill>
-                  <a:srgbClr val="000000"/>
-                </a:solidFill>
-                <a:effectLst/>
-                <a:uFillTx/>
-                <a:latin typeface="Times New Roman"/>
-              </a:rPr>
-              <a:t>&lt;sidfot&gt;</a:t>
-            </a:r>
-            <a:endParaRPr b="0" lang="sv-SE" sz="1400" strike="noStrike" u="none">
-              <a:solidFill>
-                <a:srgbClr val="000000"/>
-              </a:solidFill>
-              <a:effectLst/>
-              <a:uFillTx/>
-              <a:latin typeface="Times New Roman"/>
-            </a:endParaRPr>
-          </a:p>
-        </p:txBody>
-      </p:sp>
-      <p:sp>
-        <p:nvSpPr>
-          <p:cNvPr id="41" name="PlaceHolder 4"/>
-          <p:cNvSpPr>
-            <a:spLocks noGrp="1"/>
-          </p:cNvSpPr>
-          <p:nvPr>
-            <p:ph type="sldNum" idx="24"/>
-          </p:nvPr>
-        </p:nvSpPr>
-        <p:spPr>
-          <a:xfrm>
-            <a:off x="6553080" y="6356520"/>
-            <a:ext cx="2133360" cy="364680"/>
-          </a:xfrm>
-          <a:prstGeom prst="rect">
-            <a:avLst/>
-          </a:prstGeom>
-          <a:noFill/>
-          <a:ln w="0">
-            <a:noFill/>
-          </a:ln>
-        </p:spPr>
-        <p:txBody>
-          <a:bodyPr lIns="91440" rIns="91440" tIns="45720" bIns="45720" anchor="ctr">
-            <a:noAutofit/>
-          </a:bodyPr>
-          <a:lstStyle>
-            <a:lvl1pPr indent="0" algn="r" defTabSz="457200">
-              <a:lnSpc>
-                <a:spcPct val="100000"/>
-              </a:lnSpc>
-              <a:buNone/>
-              <a:defRPr b="0" lang="en-US" sz="1200" strike="noStrike" u="none">
-                <a:solidFill>
-                  <a:schemeClr val="dk1">
-                    <a:tint val="75000"/>
-                  </a:schemeClr>
-                </a:solidFill>
-                <a:effectLst/>
-                <a:uFillTx/>
-                <a:latin typeface="Calibri"/>
-              </a:defRPr>
-            </a:lvl1pPr>
-          </a:lstStyle>
-          <a:p>
-            <a:pPr indent="0" algn="r" defTabSz="457200">
-              <a:lnSpc>
-                <a:spcPct val="100000"/>
-              </a:lnSpc>
-              <a:buNone/>
-            </a:pPr>
-            <a:fld id="{54F160F8-0CD1-41FD-AF29-3E7A7E010BA1}" type="slidenum">
-              <a:rPr b="0" lang="en-US" sz="1200" strike="noStrike" u="none">
-                <a:solidFill>
-                  <a:schemeClr val="dk1">
-                    <a:tint val="75000"/>
-                  </a:schemeClr>
-                </a:solidFill>
-                <a:effectLst/>
-                <a:uFillTx/>
-                <a:latin typeface="Calibri"/>
-              </a:rPr>
-              <a:t>&lt;nummer&gt;</a:t>
-            </a:fld>
-            <a:endParaRPr b="0" lang="sv-SE" sz="1200" strike="noStrike" u="none">
-              <a:solidFill>
-                <a:srgbClr val="000000"/>
-              </a:solidFill>
-              <a:effectLst/>
-              <a:uFillTx/>
-              <a:latin typeface="Times New Roman"/>
-            </a:endParaRPr>
-          </a:p>
-        </p:txBody>
-      </p:sp>
-    </p:spTree>
-  </p:cSld>
-</p:sldLayout>
-</file>
-
-<file path=ppt/slideLayouts/slideLayout9.xml><?xml version="1.0" encoding="utf-8"?>
-<p:sldLayout xmlns:a="http://schemas.openxmlformats.org/drawingml/2006/main" xmlns:p="http://schemas.openxmlformats.org/presentationml/2006/main" xmlns:r="http://schemas.openxmlformats.org/officeDocument/2006/relationships" xmlns:p14="http://schemas.microsoft.com/office/powerpoint/2010/main" xmlns:p15="http://schemas.microsoft.com/office/powerpoint/2012/main" xmlns:mc="http://schemas.openxmlformats.org/markup-compatibility/2006" type="blank" preserve="1">
-  <p:cSld name="Blank">
-    <p:bg>
-      <p:bgPr>
-        <a:solidFill>
-          <a:srgbClr val="ffffff"/>
-        </a:solidFill>
-      </p:bgPr>
-    </p:bg>
-    <p:spTree>
-      <p:nvGrpSpPr>
-        <p:cNvPr id="1" name=""/>
-        <p:cNvGrpSpPr/>
-        <p:nvPr/>
-      </p:nvGrpSpPr>
-      <p:grpSpPr>
-        <a:xfrm>
-          <a:off x="0" y="0"/>
-          <a:ext cx="0" cy="0"/>
-          <a:chOff x="0" y="0"/>
-          <a:chExt cx="0" cy="0"/>
-        </a:xfrm>
-      </p:grpSpPr>
-      <p:sp>
-        <p:nvSpPr>
-          <p:cNvPr id="42" name="PlaceHolder 1"/>
+            <a:endParaRPr b="0" lang="sv-SE" sz="4400" strike="noStrike" u="none">
+              <a:solidFill>
+                <a:srgbClr val="000000"/>
+              </a:solidFill>
+              <a:effectLst/>
+              <a:uFillTx/>
+              <a:latin typeface="Arial"/>
+            </a:endParaRPr>
+          </a:p>
+        </p:txBody>
+      </p:sp>
+      <p:sp>
+        <p:nvSpPr>
+          <p:cNvPr id="45" name="PlaceHolder 2"/>
           <p:cNvSpPr>
             <a:spLocks noGrp="1"/>
           </p:cNvSpPr>
@@ -6310,7 +6940,7 @@
         <p:spPr>
           <a:xfrm>
             <a:off x="457200" y="6356520"/>
-            <a:ext cx="2133360" cy="364680"/>
+            <a:ext cx="2131920" cy="363240"/>
           </a:xfrm>
           <a:prstGeom prst="rect">
             <a:avLst/>
@@ -6330,6 +6960,9 @@
                 <a:spcPct val="100000"/>
               </a:lnSpc>
               <a:buNone/>
+              <a:tabLst>
+                <a:tab algn="l" pos="0"/>
+              </a:tabLst>
               <a:defRPr b="0" lang="en-US" sz="1200" strike="noStrike" u="none">
                 <a:solidFill>
                   <a:schemeClr val="dk1">
@@ -6348,6 +6981,9 @@
                 <a:spcPct val="100000"/>
               </a:lnSpc>
               <a:buNone/>
+              <a:tabLst>
+                <a:tab algn="l" pos="0"/>
+              </a:tabLst>
             </a:pPr>
             <a:r>
               <a:rPr b="0" lang="en-US" sz="1200" strike="noStrike" u="none">
@@ -6375,7 +7011,7 @@
       </p:sp>
       <p:sp>
         <p:nvSpPr>
-          <p:cNvPr id="43" name="PlaceHolder 2"/>
+          <p:cNvPr id="46" name="PlaceHolder 3"/>
           <p:cNvSpPr>
             <a:spLocks noGrp="1"/>
           </p:cNvSpPr>
@@ -6386,7 +7022,7 @@
         <p:spPr>
           <a:xfrm>
             <a:off x="3124080" y="6356520"/>
-            <a:ext cx="2895120" cy="364680"/>
+            <a:ext cx="2893680" cy="363240"/>
           </a:xfrm>
           <a:prstGeom prst="rect">
             <a:avLst/>
@@ -6402,7 +7038,13 @@
           </a:bodyPr>
           <a:lstStyle>
             <a:lvl1pPr indent="0" algn="ctr">
+              <a:lnSpc>
+                <a:spcPct val="100000"/>
+              </a:lnSpc>
               <a:buNone/>
+              <a:tabLst>
+                <a:tab algn="l" pos="0"/>
+              </a:tabLst>
               <a:defRPr b="0" lang="sv-SE" sz="1400" strike="noStrike" u="none">
                 <a:solidFill>
                   <a:srgbClr val="000000"/>
@@ -6415,7 +7057,13 @@
           </a:lstStyle>
           <a:p>
             <a:pPr indent="0" algn="ctr">
+              <a:lnSpc>
+                <a:spcPct val="100000"/>
+              </a:lnSpc>
               <a:buNone/>
+              <a:tabLst>
+                <a:tab algn="l" pos="0"/>
+              </a:tabLst>
             </a:pPr>
             <a:r>
               <a:rPr b="0" lang="sv-SE" sz="1400" strike="noStrike" u="none">
@@ -6441,7 +7089,7 @@
       </p:sp>
       <p:sp>
         <p:nvSpPr>
-          <p:cNvPr id="44" name="PlaceHolder 3"/>
+          <p:cNvPr id="47" name="PlaceHolder 4"/>
           <p:cNvSpPr>
             <a:spLocks noGrp="1"/>
           </p:cNvSpPr>
@@ -6452,7 +7100,7 @@
         <p:spPr>
           <a:xfrm>
             <a:off x="6553080" y="6356520"/>
-            <a:ext cx="2133360" cy="364680"/>
+            <a:ext cx="2131920" cy="363240"/>
           </a:xfrm>
           <a:prstGeom prst="rect">
             <a:avLst/>
@@ -6472,6 +7120,9 @@
                 <a:spcPct val="100000"/>
               </a:lnSpc>
               <a:buNone/>
+              <a:tabLst>
+                <a:tab algn="l" pos="0"/>
+              </a:tabLst>
               <a:defRPr b="0" lang="en-US" sz="1200" strike="noStrike" u="none">
                 <a:solidFill>
                   <a:schemeClr val="dk1">
@@ -6490,8 +7141,11 @@
                 <a:spcPct val="100000"/>
               </a:lnSpc>
               <a:buNone/>
-            </a:pPr>
-            <a:fld id="{9AFBD1BD-5A62-4E79-84BA-DA2F50BDD643}" type="slidenum">
+              <a:tabLst>
+                <a:tab algn="l" pos="0"/>
+              </a:tabLst>
+            </a:pPr>
+            <a:fld id="{26D7A86E-7EBE-457B-803A-5C724E10BBA5}" type="slidenum">
               <a:rPr b="0" lang="en-US" sz="1200" strike="noStrike" u="none">
                 <a:solidFill>
                   <a:schemeClr val="dk1">
@@ -6511,312 +7165,6 @@
               <a:effectLst/>
               <a:uFillTx/>
               <a:latin typeface="Times New Roman"/>
-            </a:endParaRPr>
-          </a:p>
-        </p:txBody>
-      </p:sp>
-      <p:sp>
-        <p:nvSpPr>
-          <p:cNvPr id="45" name="PlaceHolder 4"/>
-          <p:cNvSpPr>
-            <a:spLocks noGrp="1"/>
-          </p:cNvSpPr>
-          <p:nvPr>
-            <p:ph type="title"/>
-          </p:nvPr>
-        </p:nvSpPr>
-        <p:spPr>
-          <a:xfrm>
-            <a:off x="609120" y="273600"/>
-            <a:ext cx="10969560" cy="1144800"/>
-          </a:xfrm>
-          <a:prstGeom prst="rect">
-            <a:avLst/>
-          </a:prstGeom>
-          <a:noFill/>
-          <a:ln w="0">
-            <a:noFill/>
-          </a:ln>
-        </p:spPr>
-        <p:txBody>
-          <a:bodyPr lIns="0" rIns="0" tIns="0" bIns="0" anchor="ctr">
-            <a:noAutofit/>
-          </a:bodyPr>
-          <a:p>
-            <a:pPr indent="0">
-              <a:buNone/>
-            </a:pPr>
-            <a:r>
-              <a:rPr b="0" lang="en-US" sz="1800" strike="noStrike" u="none">
-                <a:solidFill>
-                  <a:schemeClr val="dk1"/>
-                </a:solidFill>
-                <a:effectLst/>
-                <a:uFillTx/>
-                <a:latin typeface="Calibri"/>
-              </a:rPr>
-              <a:t>Klicka för att redigera rubriktextens format</a:t>
-            </a:r>
-            <a:endParaRPr b="0" lang="en-US" sz="1800" strike="noStrike" u="none">
-              <a:solidFill>
-                <a:schemeClr val="dk1"/>
-              </a:solidFill>
-              <a:effectLst/>
-              <a:uFillTx/>
-              <a:latin typeface="Calibri"/>
-            </a:endParaRPr>
-          </a:p>
-        </p:txBody>
-      </p:sp>
-      <p:sp>
-        <p:nvSpPr>
-          <p:cNvPr id="46" name="PlaceHolder 5"/>
-          <p:cNvSpPr>
-            <a:spLocks noGrp="1"/>
-          </p:cNvSpPr>
-          <p:nvPr>
-            <p:ph type="body"/>
-          </p:nvPr>
-        </p:nvSpPr>
-        <p:spPr>
-          <a:xfrm>
-            <a:off x="609120" y="1604520"/>
-            <a:ext cx="10969560" cy="3977280"/>
-          </a:xfrm>
-          <a:prstGeom prst="rect">
-            <a:avLst/>
-          </a:prstGeom>
-          <a:noFill/>
-          <a:ln w="0">
-            <a:noFill/>
-          </a:ln>
-        </p:spPr>
-        <p:txBody>
-          <a:bodyPr lIns="0" rIns="0" tIns="0" bIns="0" anchor="t">
-            <a:normAutofit/>
-          </a:bodyPr>
-          <a:p>
-            <a:pPr marL="432000" indent="-324000">
-              <a:spcBef>
-                <a:spcPts val="1417"/>
-              </a:spcBef>
-              <a:buClr>
-                <a:srgbClr val="000000"/>
-              </a:buClr>
-              <a:buSzPct val="45000"/>
-              <a:buFont typeface="Wingdings" charset="2"/>
-              <a:buChar char=""/>
-            </a:pPr>
-            <a:r>
-              <a:rPr b="0" lang="en-US" sz="3200" strike="noStrike" u="none">
-                <a:solidFill>
-                  <a:schemeClr val="dk1"/>
-                </a:solidFill>
-                <a:effectLst/>
-                <a:uFillTx/>
-                <a:latin typeface="Calibri"/>
-              </a:rPr>
-              <a:t>Klicka för att redigera dispositionstextens format</a:t>
-            </a:r>
-            <a:endParaRPr b="0" lang="en-US" sz="3200" strike="noStrike" u="none">
-              <a:solidFill>
-                <a:schemeClr val="dk1"/>
-              </a:solidFill>
-              <a:effectLst/>
-              <a:uFillTx/>
-              <a:latin typeface="Calibri"/>
-            </a:endParaRPr>
-          </a:p>
-          <a:p>
-            <a:pPr lvl="1" marL="864000" indent="-324000">
-              <a:spcBef>
-                <a:spcPts val="1134"/>
-              </a:spcBef>
-              <a:buClr>
-                <a:srgbClr val="000000"/>
-              </a:buClr>
-              <a:buSzPct val="75000"/>
-              <a:buFont typeface="Symbol" charset="2"/>
-              <a:buChar char=""/>
-            </a:pPr>
-            <a:r>
-              <a:rPr b="0" lang="en-US" sz="2400" strike="noStrike" u="none">
-                <a:solidFill>
-                  <a:schemeClr val="dk1"/>
-                </a:solidFill>
-                <a:effectLst/>
-                <a:uFillTx/>
-                <a:latin typeface="Calibri"/>
-              </a:rPr>
-              <a:t>Andra dispositionsnivån</a:t>
-            </a:r>
-            <a:endParaRPr b="0" lang="en-US" sz="2400" strike="noStrike" u="none">
-              <a:solidFill>
-                <a:schemeClr val="dk1"/>
-              </a:solidFill>
-              <a:effectLst/>
-              <a:uFillTx/>
-              <a:latin typeface="Calibri"/>
-            </a:endParaRPr>
-          </a:p>
-          <a:p>
-            <a:pPr lvl="2" marL="1296000" indent="-288000">
-              <a:spcBef>
-                <a:spcPts val="850"/>
-              </a:spcBef>
-              <a:buClr>
-                <a:srgbClr val="000000"/>
-              </a:buClr>
-              <a:buSzPct val="45000"/>
-              <a:buFont typeface="Wingdings" charset="2"/>
-              <a:buChar char=""/>
-            </a:pPr>
-            <a:r>
-              <a:rPr b="0" lang="en-US" sz="2000" strike="noStrike" u="none">
-                <a:solidFill>
-                  <a:schemeClr val="dk1"/>
-                </a:solidFill>
-                <a:effectLst/>
-                <a:uFillTx/>
-                <a:latin typeface="Calibri"/>
-              </a:rPr>
-              <a:t>Tredje dispositionsnivån</a:t>
-            </a:r>
-            <a:endParaRPr b="0" lang="en-US" sz="2000" strike="noStrike" u="none">
-              <a:solidFill>
-                <a:schemeClr val="dk1"/>
-              </a:solidFill>
-              <a:effectLst/>
-              <a:uFillTx/>
-              <a:latin typeface="Calibri"/>
-            </a:endParaRPr>
-          </a:p>
-          <a:p>
-            <a:pPr lvl="3" marL="1728000" indent="-216000">
-              <a:spcBef>
-                <a:spcPts val="567"/>
-              </a:spcBef>
-              <a:buClr>
-                <a:srgbClr val="000000"/>
-              </a:buClr>
-              <a:buSzPct val="75000"/>
-              <a:buFont typeface="Symbol" charset="2"/>
-              <a:buChar char=""/>
-            </a:pPr>
-            <a:r>
-              <a:rPr b="0" lang="en-US" sz="2000" strike="noStrike" u="none">
-                <a:solidFill>
-                  <a:schemeClr val="dk1"/>
-                </a:solidFill>
-                <a:effectLst/>
-                <a:uFillTx/>
-                <a:latin typeface="Calibri"/>
-              </a:rPr>
-              <a:t>Fjärde dispositionsnivån</a:t>
-            </a:r>
-            <a:endParaRPr b="0" lang="en-US" sz="2000" strike="noStrike" u="none">
-              <a:solidFill>
-                <a:schemeClr val="dk1"/>
-              </a:solidFill>
-              <a:effectLst/>
-              <a:uFillTx/>
-              <a:latin typeface="Calibri"/>
-            </a:endParaRPr>
-          </a:p>
-          <a:p>
-            <a:pPr lvl="4" marL="2160000" indent="-216000">
-              <a:spcBef>
-                <a:spcPts val="283"/>
-              </a:spcBef>
-              <a:buClr>
-                <a:srgbClr val="000000"/>
-              </a:buClr>
-              <a:buSzPct val="45000"/>
-              <a:buFont typeface="Wingdings" charset="2"/>
-              <a:buChar char=""/>
-            </a:pPr>
-            <a:r>
-              <a:rPr b="0" lang="en-US" sz="2000" strike="noStrike" u="none">
-                <a:solidFill>
-                  <a:schemeClr val="dk1"/>
-                </a:solidFill>
-                <a:effectLst/>
-                <a:uFillTx/>
-                <a:latin typeface="Calibri"/>
-              </a:rPr>
-              <a:t>Femte dispositionsnivån</a:t>
-            </a:r>
-            <a:endParaRPr b="0" lang="en-US" sz="2000" strike="noStrike" u="none">
-              <a:solidFill>
-                <a:schemeClr val="dk1"/>
-              </a:solidFill>
-              <a:effectLst/>
-              <a:uFillTx/>
-              <a:latin typeface="Calibri"/>
-            </a:endParaRPr>
-          </a:p>
-          <a:p>
-            <a:pPr lvl="5" marL="2592000" indent="-216000">
-              <a:spcBef>
-                <a:spcPts val="283"/>
-              </a:spcBef>
-              <a:buClr>
-                <a:srgbClr val="000000"/>
-              </a:buClr>
-              <a:buSzPct val="45000"/>
-              <a:buFont typeface="Wingdings" charset="2"/>
-              <a:buChar char=""/>
-            </a:pPr>
-            <a:r>
-              <a:rPr b="0" lang="en-US" sz="2000" strike="noStrike" u="none">
-                <a:solidFill>
-                  <a:schemeClr val="dk1"/>
-                </a:solidFill>
-                <a:effectLst/>
-                <a:uFillTx/>
-                <a:latin typeface="Calibri"/>
-              </a:rPr>
-              <a:t>Sjätte dispositionsnivån</a:t>
-            </a:r>
-            <a:endParaRPr b="0" lang="en-US" sz="2000" strike="noStrike" u="none">
-              <a:solidFill>
-                <a:schemeClr val="dk1"/>
-              </a:solidFill>
-              <a:effectLst/>
-              <a:uFillTx/>
-              <a:latin typeface="Calibri"/>
-            </a:endParaRPr>
-          </a:p>
-          <a:p>
-            <a:pPr lvl="6" marL="3024000" indent="-216000">
-              <a:spcBef>
-                <a:spcPts val="283"/>
-              </a:spcBef>
-              <a:buClr>
-                <a:srgbClr val="000000"/>
-              </a:buClr>
-              <a:buSzPct val="45000"/>
-              <a:buFont typeface="Wingdings" charset="2"/>
-              <a:buChar char=""/>
-            </a:pPr>
-            <a:r>
-              <a:rPr b="0" lang="en-US" sz="2000" strike="noStrike" u="none">
-                <a:solidFill>
-                  <a:schemeClr val="dk1"/>
-                </a:solidFill>
-                <a:effectLst/>
-                <a:uFillTx/>
-                <a:latin typeface="Calibri"/>
-              </a:rPr>
-              <a:t>Sjunde dispositionsnivån</a:t>
-            </a:r>
-            <a:endParaRPr b="0" lang="en-US" sz="2000" strike="noStrike" u="none">
-              <a:solidFill>
-                <a:schemeClr val="dk1"/>
-              </a:solidFill>
-              <a:effectLst/>
-              <a:uFillTx/>
-              <a:latin typeface="Calibri"/>
             </a:endParaRPr>
           </a:p>
         </p:txBody>
@@ -6895,7 +7243,7 @@
         <p:spPr>
           <a:xfrm>
             <a:off x="0" y="0"/>
-            <a:ext cx="12188520" cy="91080"/>
+            <a:ext cx="12187080" cy="89640"/>
           </a:xfrm>
           <a:prstGeom prst="rect">
             <a:avLst/>
@@ -6956,7 +7304,7 @@
         <p:spPr>
           <a:xfrm>
             <a:off x="0" y="6766560"/>
-            <a:ext cx="12188520" cy="91080"/>
+            <a:ext cx="12187080" cy="89640"/>
           </a:xfrm>
           <a:prstGeom prst="rect">
             <a:avLst/>
@@ -7017,7 +7365,7 @@
         <p:spPr>
           <a:xfrm>
             <a:off x="0" y="2560320"/>
-            <a:ext cx="12188520" cy="54360"/>
+            <a:ext cx="12187080" cy="52920"/>
           </a:xfrm>
           <a:prstGeom prst="rect">
             <a:avLst/>
@@ -7078,7 +7426,7 @@
         <p:spPr>
           <a:xfrm>
             <a:off x="731520" y="822960"/>
-            <a:ext cx="10725480" cy="1554120"/>
+            <a:ext cx="10724040" cy="1552680"/>
           </a:xfrm>
           <a:prstGeom prst="rect">
             <a:avLst/>
@@ -7135,7 +7483,7 @@
         <p:spPr>
           <a:xfrm>
             <a:off x="914400" y="2788920"/>
-            <a:ext cx="10359720" cy="639720"/>
+            <a:ext cx="10358280" cy="638280"/>
           </a:xfrm>
           <a:prstGeom prst="rect">
             <a:avLst/>
@@ -7192,7 +7540,7 @@
         <p:spPr>
           <a:xfrm>
             <a:off x="914400" y="3749040"/>
-            <a:ext cx="10359720" cy="456840"/>
+            <a:ext cx="10358280" cy="455400"/>
           </a:xfrm>
           <a:prstGeom prst="rect">
             <a:avLst/>
@@ -7286,7 +7634,7 @@
         <p:spPr>
           <a:xfrm>
             <a:off x="0" y="0"/>
-            <a:ext cx="12188520" cy="91080"/>
+            <a:ext cx="12187080" cy="89640"/>
           </a:xfrm>
           <a:prstGeom prst="rect">
             <a:avLst/>
@@ -7347,7 +7695,7 @@
         <p:spPr>
           <a:xfrm>
             <a:off x="0" y="6766560"/>
-            <a:ext cx="12188520" cy="91080"/>
+            <a:ext cx="12187080" cy="89640"/>
           </a:xfrm>
           <a:prstGeom prst="rect">
             <a:avLst/>
@@ -7408,7 +7756,7 @@
         <p:spPr>
           <a:xfrm>
             <a:off x="457200" y="137160"/>
-            <a:ext cx="11274120" cy="658080"/>
+            <a:ext cx="11272680" cy="656640"/>
           </a:xfrm>
           <a:prstGeom prst="rect">
             <a:avLst/>
@@ -7465,7 +7813,7 @@
         <p:spPr>
           <a:xfrm>
             <a:off x="457200" y="868680"/>
-            <a:ext cx="11274120" cy="36360"/>
+            <a:ext cx="11272680" cy="34920"/>
           </a:xfrm>
           <a:prstGeom prst="rect">
             <a:avLst/>
@@ -7526,7 +7874,7 @@
         <p:spPr>
           <a:xfrm>
             <a:off x="457200" y="1005840"/>
-            <a:ext cx="11246760" cy="411120"/>
+            <a:ext cx="11245320" cy="409680"/>
           </a:xfrm>
           <a:prstGeom prst="rect">
             <a:avLst/>
@@ -7583,7 +7931,7 @@
         <p:spPr>
           <a:xfrm>
             <a:off x="365760" y="1554480"/>
-            <a:ext cx="3657240" cy="594000"/>
+            <a:ext cx="3655800" cy="592560"/>
           </a:xfrm>
           <a:prstGeom prst="rect">
             <a:avLst/>
@@ -7644,7 +7992,7 @@
         <p:spPr>
           <a:xfrm>
             <a:off x="365760" y="1600200"/>
-            <a:ext cx="3657240" cy="502560"/>
+            <a:ext cx="3655800" cy="501120"/>
           </a:xfrm>
           <a:prstGeom prst="rect">
             <a:avLst/>
@@ -7701,7 +8049,7 @@
         <p:spPr>
           <a:xfrm>
             <a:off x="365760" y="2240280"/>
-            <a:ext cx="3657240" cy="475200"/>
+            <a:ext cx="3655800" cy="473760"/>
           </a:xfrm>
           <a:prstGeom prst="rect">
             <a:avLst/>
@@ -7765,7 +8113,7 @@
         <p:spPr>
           <a:xfrm>
             <a:off x="457200" y="2286000"/>
-            <a:ext cx="3474360" cy="383760"/>
+            <a:ext cx="3472920" cy="382320"/>
           </a:xfrm>
           <a:prstGeom prst="rect">
             <a:avLst/>
@@ -7822,7 +8170,7 @@
         <p:spPr>
           <a:xfrm>
             <a:off x="365760" y="2770560"/>
-            <a:ext cx="3657240" cy="475200"/>
+            <a:ext cx="3655800" cy="473760"/>
           </a:xfrm>
           <a:prstGeom prst="rect">
             <a:avLst/>
@@ -7886,7 +8234,7 @@
         <p:spPr>
           <a:xfrm>
             <a:off x="457200" y="2816280"/>
-            <a:ext cx="3474360" cy="383760"/>
+            <a:ext cx="3472920" cy="382320"/>
           </a:xfrm>
           <a:prstGeom prst="rect">
             <a:avLst/>
@@ -7943,7 +8291,7 @@
         <p:spPr>
           <a:xfrm>
             <a:off x="365760" y="3300840"/>
-            <a:ext cx="3657240" cy="475200"/>
+            <a:ext cx="3655800" cy="473760"/>
           </a:xfrm>
           <a:prstGeom prst="rect">
             <a:avLst/>
@@ -8007,7 +8355,7 @@
         <p:spPr>
           <a:xfrm>
             <a:off x="457200" y="3346560"/>
-            <a:ext cx="3474360" cy="383760"/>
+            <a:ext cx="3472920" cy="382320"/>
           </a:xfrm>
           <a:prstGeom prst="rect">
             <a:avLst/>
@@ -8064,7 +8412,7 @@
         <p:spPr>
           <a:xfrm>
             <a:off x="365760" y="3831480"/>
-            <a:ext cx="3657240" cy="475200"/>
+            <a:ext cx="3655800" cy="473760"/>
           </a:xfrm>
           <a:prstGeom prst="rect">
             <a:avLst/>
@@ -8128,7 +8476,7 @@
         <p:spPr>
           <a:xfrm>
             <a:off x="457200" y="3877200"/>
-            <a:ext cx="3474360" cy="273240"/>
+            <a:ext cx="3472920" cy="272520"/>
           </a:xfrm>
           <a:prstGeom prst="rect">
             <a:avLst/>
@@ -8185,7 +8533,7 @@
         <p:spPr>
           <a:xfrm>
             <a:off x="365760" y="4361760"/>
-            <a:ext cx="3657240" cy="475200"/>
+            <a:ext cx="3655800" cy="473760"/>
           </a:xfrm>
           <a:prstGeom prst="rect">
             <a:avLst/>
@@ -8249,7 +8597,7 @@
         <p:spPr>
           <a:xfrm>
             <a:off x="457200" y="4407480"/>
-            <a:ext cx="3474360" cy="273240"/>
+            <a:ext cx="3472920" cy="272520"/>
           </a:xfrm>
           <a:prstGeom prst="rect">
             <a:avLst/>
@@ -8306,7 +8654,7 @@
         <p:spPr>
           <a:xfrm>
             <a:off x="4297680" y="1554480"/>
-            <a:ext cx="3657240" cy="594000"/>
+            <a:ext cx="3655800" cy="592560"/>
           </a:xfrm>
           <a:prstGeom prst="rect">
             <a:avLst/>
@@ -8367,7 +8715,7 @@
         <p:spPr>
           <a:xfrm>
             <a:off x="4297680" y="1600200"/>
-            <a:ext cx="3657240" cy="502560"/>
+            <a:ext cx="3655800" cy="501120"/>
           </a:xfrm>
           <a:prstGeom prst="rect">
             <a:avLst/>
@@ -8424,7 +8772,7 @@
         <p:spPr>
           <a:xfrm>
             <a:off x="4297680" y="2240280"/>
-            <a:ext cx="3657240" cy="475200"/>
+            <a:ext cx="3655800" cy="473760"/>
           </a:xfrm>
           <a:prstGeom prst="rect">
             <a:avLst/>
@@ -8488,7 +8836,7 @@
         <p:spPr>
           <a:xfrm>
             <a:off x="4389120" y="2286000"/>
-            <a:ext cx="3474360" cy="383760"/>
+            <a:ext cx="3472920" cy="382320"/>
           </a:xfrm>
           <a:prstGeom prst="rect">
             <a:avLst/>
@@ -8545,7 +8893,7 @@
         <p:spPr>
           <a:xfrm>
             <a:off x="4297680" y="2770560"/>
-            <a:ext cx="3657240" cy="475200"/>
+            <a:ext cx="3655800" cy="473760"/>
           </a:xfrm>
           <a:prstGeom prst="rect">
             <a:avLst/>
@@ -8609,7 +8957,7 @@
         <p:spPr>
           <a:xfrm>
             <a:off x="4389120" y="2816280"/>
-            <a:ext cx="3474360" cy="383760"/>
+            <a:ext cx="3472920" cy="382320"/>
           </a:xfrm>
           <a:prstGeom prst="rect">
             <a:avLst/>
@@ -8666,7 +9014,7 @@
         <p:spPr>
           <a:xfrm>
             <a:off x="4297680" y="3300840"/>
-            <a:ext cx="3657240" cy="475200"/>
+            <a:ext cx="3655800" cy="473760"/>
           </a:xfrm>
           <a:prstGeom prst="rect">
             <a:avLst/>
@@ -8730,7 +9078,7 @@
         <p:spPr>
           <a:xfrm>
             <a:off x="4389120" y="3346560"/>
-            <a:ext cx="3474360" cy="383760"/>
+            <a:ext cx="3472920" cy="382320"/>
           </a:xfrm>
           <a:prstGeom prst="rect">
             <a:avLst/>
@@ -8787,7 +9135,7 @@
         <p:spPr>
           <a:xfrm>
             <a:off x="4297680" y="3831480"/>
-            <a:ext cx="3657240" cy="475200"/>
+            <a:ext cx="3655800" cy="473760"/>
           </a:xfrm>
           <a:prstGeom prst="rect">
             <a:avLst/>
@@ -8851,7 +9199,7 @@
         <p:spPr>
           <a:xfrm>
             <a:off x="4389120" y="3877200"/>
-            <a:ext cx="3474360" cy="383760"/>
+            <a:ext cx="3472920" cy="382320"/>
           </a:xfrm>
           <a:prstGeom prst="rect">
             <a:avLst/>
@@ -8908,7 +9256,7 @@
         <p:spPr>
           <a:xfrm>
             <a:off x="4297680" y="4361760"/>
-            <a:ext cx="3657240" cy="475200"/>
+            <a:ext cx="3655800" cy="473760"/>
           </a:xfrm>
           <a:prstGeom prst="rect">
             <a:avLst/>
@@ -8972,7 +9320,7 @@
         <p:spPr>
           <a:xfrm>
             <a:off x="4389120" y="4407480"/>
-            <a:ext cx="3474360" cy="383760"/>
+            <a:ext cx="3472920" cy="382320"/>
           </a:xfrm>
           <a:prstGeom prst="rect">
             <a:avLst/>
@@ -9029,7 +9377,7 @@
         <p:spPr>
           <a:xfrm>
             <a:off x="8229600" y="1554480"/>
-            <a:ext cx="3657240" cy="594000"/>
+            <a:ext cx="3655800" cy="592560"/>
           </a:xfrm>
           <a:prstGeom prst="rect">
             <a:avLst/>
@@ -9090,7 +9438,7 @@
         <p:spPr>
           <a:xfrm>
             <a:off x="8229600" y="1600200"/>
-            <a:ext cx="3657240" cy="502560"/>
+            <a:ext cx="3655800" cy="501120"/>
           </a:xfrm>
           <a:prstGeom prst="rect">
             <a:avLst/>
@@ -9147,7 +9495,7 @@
         <p:spPr>
           <a:xfrm>
             <a:off x="8229600" y="2240280"/>
-            <a:ext cx="3657240" cy="475200"/>
+            <a:ext cx="3655800" cy="473760"/>
           </a:xfrm>
           <a:prstGeom prst="rect">
             <a:avLst/>
@@ -9211,7 +9559,7 @@
         <p:spPr>
           <a:xfrm>
             <a:off x="8321040" y="2286000"/>
-            <a:ext cx="3474360" cy="383760"/>
+            <a:ext cx="3472920" cy="382320"/>
           </a:xfrm>
           <a:prstGeom prst="rect">
             <a:avLst/>
@@ -9268,7 +9616,7 @@
         <p:spPr>
           <a:xfrm>
             <a:off x="8229600" y="2770560"/>
-            <a:ext cx="3657240" cy="475200"/>
+            <a:ext cx="3655800" cy="473760"/>
           </a:xfrm>
           <a:prstGeom prst="rect">
             <a:avLst/>
@@ -9332,7 +9680,7 @@
         <p:spPr>
           <a:xfrm>
             <a:off x="8321040" y="2816280"/>
-            <a:ext cx="3474360" cy="383760"/>
+            <a:ext cx="3472920" cy="382320"/>
           </a:xfrm>
           <a:prstGeom prst="rect">
             <a:avLst/>
@@ -9389,7 +9737,7 @@
         <p:spPr>
           <a:xfrm>
             <a:off x="8229600" y="3300840"/>
-            <a:ext cx="3657240" cy="475200"/>
+            <a:ext cx="3655800" cy="473760"/>
           </a:xfrm>
           <a:prstGeom prst="rect">
             <a:avLst/>
@@ -9453,7 +9801,7 @@
         <p:spPr>
           <a:xfrm>
             <a:off x="8321040" y="3346560"/>
-            <a:ext cx="3474360" cy="383760"/>
+            <a:ext cx="3472920" cy="382320"/>
           </a:xfrm>
           <a:prstGeom prst="rect">
             <a:avLst/>
@@ -9510,7 +9858,7 @@
         <p:spPr>
           <a:xfrm>
             <a:off x="8229600" y="3831480"/>
-            <a:ext cx="3657240" cy="475200"/>
+            <a:ext cx="3655800" cy="473760"/>
           </a:xfrm>
           <a:prstGeom prst="rect">
             <a:avLst/>
@@ -9574,7 +9922,7 @@
         <p:spPr>
           <a:xfrm>
             <a:off x="8321040" y="3877200"/>
-            <a:ext cx="3474360" cy="273240"/>
+            <a:ext cx="3472920" cy="272520"/>
           </a:xfrm>
           <a:prstGeom prst="rect">
             <a:avLst/>
@@ -9631,7 +9979,7 @@
         <p:spPr>
           <a:xfrm>
             <a:off x="8229600" y="4361760"/>
-            <a:ext cx="3657240" cy="475200"/>
+            <a:ext cx="3655800" cy="473760"/>
           </a:xfrm>
           <a:prstGeom prst="rect">
             <a:avLst/>
@@ -9695,7 +10043,7 @@
         <p:spPr>
           <a:xfrm>
             <a:off x="8321040" y="4407480"/>
-            <a:ext cx="3474360" cy="383760"/>
+            <a:ext cx="3472920" cy="382320"/>
           </a:xfrm>
           <a:prstGeom prst="rect">
             <a:avLst/>
@@ -9752,7 +10100,7 @@
         <p:spPr>
           <a:xfrm>
             <a:off x="1737360" y="5989320"/>
-            <a:ext cx="8686440" cy="594000"/>
+            <a:ext cx="8685000" cy="592560"/>
           </a:xfrm>
           <a:prstGeom prst="rect">
             <a:avLst/>
@@ -9816,7 +10164,7 @@
         <p:spPr>
           <a:xfrm>
             <a:off x="1737360" y="6035040"/>
-            <a:ext cx="8686440" cy="502560"/>
+            <a:ext cx="8685000" cy="501120"/>
           </a:xfrm>
           <a:prstGeom prst="rect">
             <a:avLst/>
@@ -9910,7 +10258,7 @@
         <p:spPr>
           <a:xfrm>
             <a:off x="0" y="0"/>
-            <a:ext cx="12188520" cy="91080"/>
+            <a:ext cx="12187080" cy="89640"/>
           </a:xfrm>
           <a:prstGeom prst="rect">
             <a:avLst/>
@@ -9971,7 +10319,7 @@
         <p:spPr>
           <a:xfrm>
             <a:off x="0" y="6766560"/>
-            <a:ext cx="12188520" cy="91080"/>
+            <a:ext cx="12187080" cy="89640"/>
           </a:xfrm>
           <a:prstGeom prst="rect">
             <a:avLst/>
@@ -10032,7 +10380,7 @@
         <p:spPr>
           <a:xfrm>
             <a:off x="457200" y="137160"/>
-            <a:ext cx="11274120" cy="658080"/>
+            <a:ext cx="11272680" cy="656640"/>
           </a:xfrm>
           <a:prstGeom prst="rect">
             <a:avLst/>
@@ -10089,7 +10437,7 @@
         <p:spPr>
           <a:xfrm>
             <a:off x="457200" y="868680"/>
-            <a:ext cx="11274120" cy="36360"/>
+            <a:ext cx="11272680" cy="34920"/>
           </a:xfrm>
           <a:prstGeom prst="rect">
             <a:avLst/>
@@ -10150,7 +10498,7 @@
         <p:spPr>
           <a:xfrm>
             <a:off x="457200" y="1005840"/>
-            <a:ext cx="11246760" cy="411120"/>
+            <a:ext cx="11245320" cy="333360"/>
           </a:xfrm>
           <a:prstGeom prst="rect">
             <a:avLst/>
@@ -10185,7 +10533,7 @@
                 <a:uFillTx/>
                 <a:latin typeface="Calibri"/>
               </a:rPr>
-              <a:t>Förinspelad video — grafbaserade lösningen i aktion</a:t>
+              <a:t>Förinspelad video — grafbaserade lösningen</a:t>
             </a:r>
             <a:endParaRPr b="0" lang="sv-SE" sz="1600" strike="noStrike" u="none">
               <a:solidFill>
@@ -10200,14 +10548,16 @@
       </p:sp>
       <p:sp>
         <p:nvSpPr>
-          <p:cNvPr id="269" name="Rectangle 6"/>
+          <p:cNvPr id="269" name="Rectangle 6">
+            <a:hlinkClick r:id="rId1"/>
+          </p:cNvPr>
           <p:cNvSpPr/>
           <p:nvPr/>
         </p:nvSpPr>
         <p:spPr>
           <a:xfrm>
             <a:off x="1371600" y="1554480"/>
-            <a:ext cx="9445320" cy="4845960"/>
+            <a:ext cx="9443880" cy="4844520"/>
           </a:xfrm>
           <a:prstGeom prst="rect">
             <a:avLst/>
@@ -10270,8 +10620,8 @@
         </p:nvSpPr>
         <p:spPr>
           <a:xfrm>
-            <a:off x="1371600" y="3749040"/>
-            <a:ext cx="9445320" cy="456840"/>
+            <a:off x="1371600" y="3785040"/>
+            <a:ext cx="9443880" cy="288000"/>
           </a:xfrm>
           <a:prstGeom prst="rect">
             <a:avLst/>
@@ -10300,11 +10650,12 @@
             <a:r>
               <a:rPr b="0" i="1" lang="en-US" sz="1300" strike="noStrike" u="none">
                 <a:solidFill>
-                  <a:srgbClr val="555555"/>
-                </a:solidFill>
-                <a:effectLst/>
-                <a:uFillTx/>
-                <a:latin typeface="Calibri"/>
+                  <a:srgbClr val="0000ff"/>
+                </a:solidFill>
+                <a:effectLst/>
+                <a:uFillTx/>
+                <a:latin typeface="Calibri"/>
+                <a:hlinkClick r:id="rId2"/>
               </a:rPr>
               <a:t>[ VIDEO ]</a:t>
             </a:r>
@@ -10365,7 +10716,7 @@
         <p:spPr>
           <a:xfrm>
             <a:off x="0" y="0"/>
-            <a:ext cx="12188520" cy="91080"/>
+            <a:ext cx="12187080" cy="89640"/>
           </a:xfrm>
           <a:prstGeom prst="rect">
             <a:avLst/>
@@ -10426,7 +10777,7 @@
         <p:spPr>
           <a:xfrm>
             <a:off x="0" y="6766560"/>
-            <a:ext cx="12188520" cy="91080"/>
+            <a:ext cx="12187080" cy="89640"/>
           </a:xfrm>
           <a:prstGeom prst="rect">
             <a:avLst/>
@@ -10487,7 +10838,7 @@
         <p:spPr>
           <a:xfrm>
             <a:off x="457200" y="137160"/>
-            <a:ext cx="11274120" cy="658080"/>
+            <a:ext cx="11272680" cy="656640"/>
           </a:xfrm>
           <a:prstGeom prst="rect">
             <a:avLst/>
@@ -10544,7 +10895,7 @@
         <p:spPr>
           <a:xfrm>
             <a:off x="457200" y="868680"/>
-            <a:ext cx="11274120" cy="36360"/>
+            <a:ext cx="11272680" cy="34920"/>
           </a:xfrm>
           <a:prstGeom prst="rect">
             <a:avLst/>
@@ -10604,7 +10955,7 @@
         </p:nvGraphicFramePr>
         <p:xfrm>
           <a:off x="365760" y="1097280"/>
-          <a:ext cx="6857640" cy="5394600"/>
+          <a:ext cx="6856200" cy="5393160"/>
         </p:xfrm>
         <a:graphic>
           <a:graphicData uri="http://schemas.openxmlformats.org/drawingml/2006/chart">
@@ -10621,7 +10972,7 @@
         <p:spPr>
           <a:xfrm>
             <a:off x="7498080" y="1188720"/>
-            <a:ext cx="4480200" cy="1005480"/>
+            <a:ext cx="4478760" cy="1004040"/>
           </a:xfrm>
           <a:prstGeom prst="rect">
             <a:avLst/>
@@ -10685,7 +11036,7 @@
         <p:spPr>
           <a:xfrm>
             <a:off x="7635240" y="1280160"/>
-            <a:ext cx="4205880" cy="365400"/>
+            <a:ext cx="4204440" cy="363960"/>
           </a:xfrm>
           <a:prstGeom prst="rect">
             <a:avLst/>
@@ -10742,7 +11093,7 @@
         <p:spPr>
           <a:xfrm>
             <a:off x="7635240" y="1691640"/>
-            <a:ext cx="4205880" cy="411120"/>
+            <a:ext cx="4204440" cy="409680"/>
           </a:xfrm>
           <a:prstGeom prst="rect">
             <a:avLst/>
@@ -10799,7 +11150,7 @@
         <p:spPr>
           <a:xfrm>
             <a:off x="7498080" y="2377440"/>
-            <a:ext cx="4480200" cy="1005480"/>
+            <a:ext cx="4478760" cy="1004040"/>
           </a:xfrm>
           <a:prstGeom prst="rect">
             <a:avLst/>
@@ -10863,7 +11214,7 @@
         <p:spPr>
           <a:xfrm>
             <a:off x="7635240" y="2468880"/>
-            <a:ext cx="4205880" cy="365400"/>
+            <a:ext cx="4204440" cy="363960"/>
           </a:xfrm>
           <a:prstGeom prst="rect">
             <a:avLst/>
@@ -10920,7 +11271,7 @@
         <p:spPr>
           <a:xfrm>
             <a:off x="7635240" y="2880360"/>
-            <a:ext cx="4205880" cy="411120"/>
+            <a:ext cx="4204440" cy="409680"/>
           </a:xfrm>
           <a:prstGeom prst="rect">
             <a:avLst/>
@@ -10977,7 +11328,7 @@
         <p:spPr>
           <a:xfrm>
             <a:off x="7498080" y="3566160"/>
-            <a:ext cx="4480200" cy="1005480"/>
+            <a:ext cx="4478760" cy="1004040"/>
           </a:xfrm>
           <a:prstGeom prst="rect">
             <a:avLst/>
@@ -11041,7 +11392,7 @@
         <p:spPr>
           <a:xfrm>
             <a:off x="7635240" y="3657600"/>
-            <a:ext cx="4205880" cy="365400"/>
+            <a:ext cx="4204440" cy="363960"/>
           </a:xfrm>
           <a:prstGeom prst="rect">
             <a:avLst/>
@@ -11098,7 +11449,7 @@
         <p:spPr>
           <a:xfrm>
             <a:off x="7635240" y="4069080"/>
-            <a:ext cx="4205880" cy="411120"/>
+            <a:ext cx="4204440" cy="409680"/>
           </a:xfrm>
           <a:prstGeom prst="rect">
             <a:avLst/>
@@ -11155,7 +11506,7 @@
         <p:spPr>
           <a:xfrm>
             <a:off x="7498080" y="4846320"/>
-            <a:ext cx="4480200" cy="1645560"/>
+            <a:ext cx="4478760" cy="1644120"/>
           </a:xfrm>
           <a:prstGeom prst="rect">
             <a:avLst/>
@@ -11219,7 +11570,7 @@
         <p:spPr>
           <a:xfrm>
             <a:off x="7635240" y="4937760"/>
-            <a:ext cx="4205880" cy="365400"/>
+            <a:ext cx="4204440" cy="363960"/>
           </a:xfrm>
           <a:prstGeom prst="rect">
             <a:avLst/>
@@ -11276,7 +11627,7 @@
         <p:spPr>
           <a:xfrm>
             <a:off x="7635240" y="5349240"/>
-            <a:ext cx="4205880" cy="1051200"/>
+            <a:ext cx="4204440" cy="1049760"/>
           </a:xfrm>
           <a:prstGeom prst="rect">
             <a:avLst/>
@@ -11297,6 +11648,11 @@
             <a:spAutoFit/>
           </a:bodyPr>
           <a:p>
+            <a:pPr>
+              <a:lnSpc>
+                <a:spcPct val="100000"/>
+              </a:lnSpc>
+            </a:pPr>
             <a:r>
               <a:rPr b="0" lang="en-US" sz="1200" strike="noStrike" u="none">
                 <a:solidFill>
@@ -11318,6 +11674,11 @@
             </a:endParaRPr>
           </a:p>
           <a:p>
+            <a:pPr>
+              <a:lnSpc>
+                <a:spcPct val="100000"/>
+              </a:lnSpc>
+            </a:pPr>
             <a:r>
               <a:rPr b="0" lang="en-US" sz="1200" strike="noStrike" u="none">
                 <a:solidFill>
@@ -11339,6 +11700,11 @@
             </a:endParaRPr>
           </a:p>
           <a:p>
+            <a:pPr>
+              <a:lnSpc>
+                <a:spcPct val="100000"/>
+              </a:lnSpc>
+            </a:pPr>
             <a:r>
               <a:rPr b="0" lang="en-US" sz="1200" strike="noStrike" u="none">
                 <a:solidFill>
@@ -11433,7 +11799,7 @@
         <p:spPr>
           <a:xfrm>
             <a:off x="0" y="0"/>
-            <a:ext cx="12188520" cy="91080"/>
+            <a:ext cx="12187080" cy="89640"/>
           </a:xfrm>
           <a:prstGeom prst="rect">
             <a:avLst/>
@@ -11494,7 +11860,7 @@
         <p:spPr>
           <a:xfrm>
             <a:off x="0" y="6766560"/>
-            <a:ext cx="12188520" cy="91080"/>
+            <a:ext cx="12187080" cy="89640"/>
           </a:xfrm>
           <a:prstGeom prst="rect">
             <a:avLst/>
@@ -11555,7 +11921,7 @@
         <p:spPr>
           <a:xfrm>
             <a:off x="457200" y="137160"/>
-            <a:ext cx="11274120" cy="658080"/>
+            <a:ext cx="11272680" cy="656640"/>
           </a:xfrm>
           <a:prstGeom prst="rect">
             <a:avLst/>
@@ -11612,7 +11978,7 @@
         <p:spPr>
           <a:xfrm>
             <a:off x="457200" y="868680"/>
-            <a:ext cx="11274120" cy="36360"/>
+            <a:ext cx="11272680" cy="34920"/>
           </a:xfrm>
           <a:prstGeom prst="rect">
             <a:avLst/>
@@ -11673,7 +12039,7 @@
         <p:spPr>
           <a:xfrm>
             <a:off x="365760" y="1005840"/>
-            <a:ext cx="5760360" cy="319680"/>
+            <a:ext cx="5758920" cy="318240"/>
           </a:xfrm>
           <a:prstGeom prst="rect">
             <a:avLst/>
@@ -11729,7 +12095,7 @@
         </p:nvGraphicFramePr>
         <p:xfrm>
           <a:off x="365760" y="1371600"/>
-          <a:ext cx="5577480" cy="5120280"/>
+          <a:ext cx="5576040" cy="5118840"/>
         </p:xfrm>
         <a:graphic>
           <a:graphicData uri="http://schemas.openxmlformats.org/drawingml/2006/chart">
@@ -11746,7 +12112,7 @@
         <p:spPr>
           <a:xfrm>
             <a:off x="6217920" y="1005840"/>
-            <a:ext cx="5760360" cy="319680"/>
+            <a:ext cx="5758920" cy="318240"/>
           </a:xfrm>
           <a:prstGeom prst="rect">
             <a:avLst/>
@@ -11802,7 +12168,7 @@
         </p:nvGraphicFramePr>
         <p:xfrm>
           <a:off x="6217920" y="1371600"/>
-          <a:ext cx="5577480" cy="5120280"/>
+          <a:ext cx="5576040" cy="5118840"/>
         </p:xfrm>
         <a:graphic>
           <a:graphicData uri="http://schemas.openxmlformats.org/drawingml/2006/chart">
@@ -11819,7 +12185,7 @@
         <p:spPr>
           <a:xfrm>
             <a:off x="6089760" y="1005840"/>
-            <a:ext cx="36360" cy="5394600"/>
+            <a:ext cx="34920" cy="5393160"/>
           </a:xfrm>
           <a:prstGeom prst="rect">
             <a:avLst/>
@@ -11917,7 +12283,7 @@
         <p:spPr>
           <a:xfrm>
             <a:off x="0" y="0"/>
-            <a:ext cx="12188520" cy="91080"/>
+            <a:ext cx="12187080" cy="89640"/>
           </a:xfrm>
           <a:prstGeom prst="rect">
             <a:avLst/>
@@ -11978,7 +12344,7 @@
         <p:spPr>
           <a:xfrm>
             <a:off x="0" y="6766560"/>
-            <a:ext cx="12188520" cy="91080"/>
+            <a:ext cx="12187080" cy="89640"/>
           </a:xfrm>
           <a:prstGeom prst="rect">
             <a:avLst/>
@@ -12039,7 +12405,7 @@
         <p:spPr>
           <a:xfrm>
             <a:off x="457200" y="137160"/>
-            <a:ext cx="11274120" cy="658080"/>
+            <a:ext cx="11272680" cy="656640"/>
           </a:xfrm>
           <a:prstGeom prst="rect">
             <a:avLst/>
@@ -12096,7 +12462,7 @@
         <p:spPr>
           <a:xfrm>
             <a:off x="457200" y="868680"/>
-            <a:ext cx="11274120" cy="36360"/>
+            <a:ext cx="11272680" cy="34920"/>
           </a:xfrm>
           <a:prstGeom prst="rect">
             <a:avLst/>
@@ -12157,7 +12523,7 @@
         <p:spPr>
           <a:xfrm>
             <a:off x="457200" y="1005840"/>
-            <a:ext cx="5486040" cy="411120"/>
+            <a:ext cx="5484600" cy="409680"/>
           </a:xfrm>
           <a:prstGeom prst="rect">
             <a:avLst/>
@@ -12214,7 +12580,7 @@
         <p:spPr>
           <a:xfrm>
             <a:off x="640080" y="1554480"/>
-            <a:ext cx="5303160" cy="4571640"/>
+            <a:ext cx="5301720" cy="4570200"/>
           </a:xfrm>
           <a:prstGeom prst="rect">
             <a:avLst/>
@@ -12462,7 +12828,7 @@
         <p:spPr>
           <a:xfrm>
             <a:off x="6309360" y="1005840"/>
-            <a:ext cx="5577480" cy="4023000"/>
+            <a:ext cx="5576040" cy="4021560"/>
           </a:xfrm>
           <a:prstGeom prst="rect">
             <a:avLst/>
@@ -12526,7 +12892,7 @@
         <p:spPr>
           <a:xfrm>
             <a:off x="6446520" y="1097280"/>
-            <a:ext cx="5303160" cy="456840"/>
+            <a:ext cx="5301720" cy="455400"/>
           </a:xfrm>
           <a:prstGeom prst="rect">
             <a:avLst/>
@@ -12583,7 +12949,7 @@
         <p:spPr>
           <a:xfrm>
             <a:off x="6446520" y="1691640"/>
-            <a:ext cx="5303160" cy="3108600"/>
+            <a:ext cx="5301720" cy="3107160"/>
           </a:xfrm>
           <a:prstGeom prst="rect">
             <a:avLst/>
@@ -12604,6 +12970,11 @@
             <a:spAutoFit/>
           </a:bodyPr>
           <a:p>
+            <a:pPr>
+              <a:lnSpc>
+                <a:spcPct val="100000"/>
+              </a:lnSpc>
+            </a:pPr>
             <a:r>
               <a:rPr b="0" lang="en-US" sz="1400" strike="noStrike" u="none">
                 <a:solidFill>
@@ -12625,6 +12996,11 @@
             </a:endParaRPr>
           </a:p>
           <a:p>
+            <a:pPr>
+              <a:lnSpc>
+                <a:spcPct val="100000"/>
+              </a:lnSpc>
+            </a:pPr>
             <a:endParaRPr b="0" lang="sv-SE" sz="1400" strike="noStrike" u="none">
               <a:solidFill>
                 <a:srgbClr val="000000"/>
@@ -12635,6 +13011,11 @@
             </a:endParaRPr>
           </a:p>
           <a:p>
+            <a:pPr>
+              <a:lnSpc>
+                <a:spcPct val="100000"/>
+              </a:lnSpc>
+            </a:pPr>
             <a:r>
               <a:rPr b="0" lang="en-US" sz="1400" strike="noStrike" u="none">
                 <a:solidFill>
@@ -12656,6 +13037,11 @@
             </a:endParaRPr>
           </a:p>
           <a:p>
+            <a:pPr>
+              <a:lnSpc>
+                <a:spcPct val="100000"/>
+              </a:lnSpc>
+            </a:pPr>
             <a:endParaRPr b="0" lang="sv-SE" sz="1400" strike="noStrike" u="none">
               <a:solidFill>
                 <a:srgbClr val="000000"/>
@@ -12702,7 +13088,7 @@
         <p:spPr>
           <a:xfrm>
             <a:off x="6309360" y="5212080"/>
-            <a:ext cx="5577480" cy="1325520"/>
+            <a:ext cx="5576040" cy="1324080"/>
           </a:xfrm>
           <a:prstGeom prst="rect">
             <a:avLst/>
@@ -12766,7 +13152,7 @@
         <p:spPr>
           <a:xfrm>
             <a:off x="6446520" y="5303520"/>
-            <a:ext cx="5303160" cy="365400"/>
+            <a:ext cx="5301720" cy="363960"/>
           </a:xfrm>
           <a:prstGeom prst="rect">
             <a:avLst/>
@@ -12823,7 +13209,7 @@
         <p:spPr>
           <a:xfrm>
             <a:off x="6446520" y="5715000"/>
-            <a:ext cx="5303160" cy="685440"/>
+            <a:ext cx="5301720" cy="684000"/>
           </a:xfrm>
           <a:prstGeom prst="rect">
             <a:avLst/>
@@ -12917,7 +13303,7 @@
         <p:spPr>
           <a:xfrm>
             <a:off x="0" y="0"/>
-            <a:ext cx="12188520" cy="91080"/>
+            <a:ext cx="12187080" cy="89640"/>
           </a:xfrm>
           <a:prstGeom prst="rect">
             <a:avLst/>
@@ -12978,7 +13364,7 @@
         <p:spPr>
           <a:xfrm>
             <a:off x="0" y="6766560"/>
-            <a:ext cx="12188520" cy="91080"/>
+            <a:ext cx="12187080" cy="89640"/>
           </a:xfrm>
           <a:prstGeom prst="rect">
             <a:avLst/>
@@ -13039,7 +13425,7 @@
         <p:spPr>
           <a:xfrm>
             <a:off x="0" y="3017520"/>
-            <a:ext cx="12188520" cy="54360"/>
+            <a:ext cx="12187080" cy="52920"/>
           </a:xfrm>
           <a:prstGeom prst="rect">
             <a:avLst/>
@@ -13100,7 +13486,7 @@
         <p:spPr>
           <a:xfrm>
             <a:off x="1371600" y="914400"/>
-            <a:ext cx="9445320" cy="1828440"/>
+            <a:ext cx="9443880" cy="1827000"/>
           </a:xfrm>
           <a:prstGeom prst="rect">
             <a:avLst/>
@@ -13157,7 +13543,7 @@
         <p:spPr>
           <a:xfrm>
             <a:off x="1371600" y="3291840"/>
-            <a:ext cx="9445320" cy="1096920"/>
+            <a:ext cx="9443880" cy="1095480"/>
           </a:xfrm>
           <a:prstGeom prst="rect">
             <a:avLst/>
@@ -13214,7 +13600,7 @@
         <p:spPr>
           <a:xfrm>
             <a:off x="1371600" y="4937760"/>
-            <a:ext cx="9445320" cy="517320"/>
+            <a:ext cx="9443880" cy="516600"/>
           </a:xfrm>
           <a:prstGeom prst="rect">
             <a:avLst/>
@@ -13235,6 +13621,11 @@
             <a:spAutoFit/>
           </a:bodyPr>
           <a:p>
+            <a:pPr>
+              <a:lnSpc>
+                <a:spcPct val="100000"/>
+              </a:lnSpc>
+            </a:pPr>
             <a:endParaRPr b="0" lang="sv-SE" sz="1400" strike="noStrike" u="none">
               <a:solidFill>
                 <a:srgbClr val="000000"/>
@@ -13259,7 +13650,7 @@
                 <a:uFillTx/>
                 <a:latin typeface="Calibri"/>
               </a:rPr>
-              <a:t>Knightec Group AB  ·  Mittuniversitetet  ·  2026</a:t>
+              <a:t>Isak Lampell  ·  Mittuniversitetet  ·  2026</a:t>
             </a:r>
             <a:endParaRPr b="0" lang="sv-SE" sz="1400" strike="noStrike" u="none">
               <a:solidFill>
@@ -13318,7 +13709,7 @@
         <p:spPr>
           <a:xfrm>
             <a:off x="0" y="0"/>
-            <a:ext cx="12188520" cy="91080"/>
+            <a:ext cx="12187080" cy="89640"/>
           </a:xfrm>
           <a:prstGeom prst="rect">
             <a:avLst/>
@@ -13379,7 +13770,7 @@
         <p:spPr>
           <a:xfrm>
             <a:off x="0" y="6766560"/>
-            <a:ext cx="12188520" cy="91080"/>
+            <a:ext cx="12187080" cy="89640"/>
           </a:xfrm>
           <a:prstGeom prst="rect">
             <a:avLst/>
@@ -13440,7 +13831,7 @@
         <p:spPr>
           <a:xfrm>
             <a:off x="457200" y="137160"/>
-            <a:ext cx="11274120" cy="658080"/>
+            <a:ext cx="11272680" cy="656640"/>
           </a:xfrm>
           <a:prstGeom prst="rect">
             <a:avLst/>
@@ -13497,7 +13888,7 @@
         <p:spPr>
           <a:xfrm>
             <a:off x="457200" y="868680"/>
-            <a:ext cx="11274120" cy="36360"/>
+            <a:ext cx="11272680" cy="34920"/>
           </a:xfrm>
           <a:prstGeom prst="rect">
             <a:avLst/>
@@ -13558,7 +13949,7 @@
         <p:spPr>
           <a:xfrm>
             <a:off x="457200" y="1051560"/>
-            <a:ext cx="7772040" cy="822600"/>
+            <a:ext cx="7770600" cy="821160"/>
           </a:xfrm>
           <a:prstGeom prst="rect">
             <a:avLst/>
@@ -13579,6 +13970,11 @@
             <a:spAutoFit/>
           </a:bodyPr>
           <a:p>
+            <a:pPr>
+              <a:lnSpc>
+                <a:spcPct val="100000"/>
+              </a:lnSpc>
+            </a:pPr>
             <a:r>
               <a:rPr b="0" lang="en-US" sz="1500" strike="noStrike" u="none">
                 <a:solidFill>
@@ -13636,7 +14032,7 @@
         <p:spPr>
           <a:xfrm>
             <a:off x="457200" y="2011680"/>
-            <a:ext cx="7772040" cy="594000"/>
+            <a:ext cx="7770600" cy="592560"/>
           </a:xfrm>
           <a:prstGeom prst="rect">
             <a:avLst/>
@@ -13693,7 +14089,7 @@
         <p:spPr>
           <a:xfrm>
             <a:off x="457200" y="2788920"/>
-            <a:ext cx="7772040" cy="1005480"/>
+            <a:ext cx="7770600" cy="1004040"/>
           </a:xfrm>
           <a:prstGeom prst="rect">
             <a:avLst/>
@@ -13714,6 +14110,11 @@
             <a:spAutoFit/>
           </a:bodyPr>
           <a:p>
+            <a:pPr>
+              <a:lnSpc>
+                <a:spcPct val="100000"/>
+              </a:lnSpc>
+            </a:pPr>
             <a:r>
               <a:rPr b="0" lang="en-US" sz="1500" strike="noStrike" u="none">
                 <a:solidFill>
@@ -13735,6 +14136,11 @@
             </a:endParaRPr>
           </a:p>
           <a:p>
+            <a:pPr>
+              <a:lnSpc>
+                <a:spcPct val="100000"/>
+              </a:lnSpc>
+            </a:pPr>
             <a:r>
               <a:rPr b="0" lang="en-US" sz="1500" strike="noStrike" u="none">
                 <a:solidFill>
@@ -13792,7 +14198,7 @@
         <p:spPr>
           <a:xfrm>
             <a:off x="457200" y="4069080"/>
-            <a:ext cx="7772040" cy="1188360"/>
+            <a:ext cx="7770600" cy="1186920"/>
           </a:xfrm>
           <a:prstGeom prst="rect">
             <a:avLst/>
@@ -13856,7 +14262,7 @@
         <p:spPr>
           <a:xfrm>
             <a:off x="594360" y="4206240"/>
-            <a:ext cx="7497720" cy="914040"/>
+            <a:ext cx="7496280" cy="912600"/>
           </a:xfrm>
           <a:prstGeom prst="rect">
             <a:avLst/>
@@ -13877,6 +14283,11 @@
             <a:spAutoFit/>
           </a:bodyPr>
           <a:p>
+            <a:pPr>
+              <a:lnSpc>
+                <a:spcPct val="100000"/>
+              </a:lnSpc>
+            </a:pPr>
             <a:r>
               <a:rPr b="1" lang="en-US" sz="1500" strike="noStrike" u="none">
                 <a:solidFill>
@@ -13934,7 +14345,7 @@
         <p:spPr>
           <a:xfrm>
             <a:off x="8412480" y="1051560"/>
-            <a:ext cx="3474360" cy="5120280"/>
+            <a:ext cx="3472920" cy="5118840"/>
           </a:xfrm>
           <a:prstGeom prst="rect">
             <a:avLst/>
@@ -13998,7 +14409,7 @@
         <p:spPr>
           <a:xfrm>
             <a:off x="8412480" y="3383280"/>
-            <a:ext cx="3474360" cy="456840"/>
+            <a:ext cx="3472920" cy="455400"/>
           </a:xfrm>
           <a:prstGeom prst="rect">
             <a:avLst/>
@@ -14059,7 +14470,7 @@
         <p:spPr>
           <a:xfrm>
             <a:off x="8412480" y="1051560"/>
-            <a:ext cx="3474360" cy="5120280"/>
+            <a:ext cx="3513960" cy="5118840"/>
           </a:xfrm>
           <a:prstGeom prst="rect">
             <a:avLst/>
@@ -14116,7 +14527,7 @@
         <p:spPr>
           <a:xfrm>
             <a:off x="0" y="0"/>
-            <a:ext cx="12188520" cy="91080"/>
+            <a:ext cx="12187080" cy="89640"/>
           </a:xfrm>
           <a:prstGeom prst="rect">
             <a:avLst/>
@@ -14177,7 +14588,7 @@
         <p:spPr>
           <a:xfrm>
             <a:off x="0" y="6766560"/>
-            <a:ext cx="12188520" cy="91080"/>
+            <a:ext cx="12187080" cy="89640"/>
           </a:xfrm>
           <a:prstGeom prst="rect">
             <a:avLst/>
@@ -14238,7 +14649,7 @@
         <p:spPr>
           <a:xfrm>
             <a:off x="457200" y="137160"/>
-            <a:ext cx="11274120" cy="658080"/>
+            <a:ext cx="11272680" cy="656640"/>
           </a:xfrm>
           <a:prstGeom prst="rect">
             <a:avLst/>
@@ -14295,7 +14706,7 @@
         <p:spPr>
           <a:xfrm>
             <a:off x="457200" y="868680"/>
-            <a:ext cx="11274120" cy="36360"/>
+            <a:ext cx="11272680" cy="34920"/>
           </a:xfrm>
           <a:prstGeom prst="rect">
             <a:avLst/>
@@ -14356,7 +14767,7 @@
         <p:spPr>
           <a:xfrm>
             <a:off x="457200" y="1005840"/>
-            <a:ext cx="11246760" cy="502560"/>
+            <a:ext cx="11245320" cy="501120"/>
           </a:xfrm>
           <a:prstGeom prst="rect">
             <a:avLst/>
@@ -14413,7 +14824,7 @@
         <p:spPr>
           <a:xfrm>
             <a:off x="457200" y="1645920"/>
-            <a:ext cx="7314840" cy="411120"/>
+            <a:ext cx="7313400" cy="409680"/>
           </a:xfrm>
           <a:prstGeom prst="rect">
             <a:avLst/>
@@ -14470,7 +14881,7 @@
         <p:spPr>
           <a:xfrm>
             <a:off x="457200" y="2194560"/>
-            <a:ext cx="3565800" cy="3565800"/>
+            <a:ext cx="3564360" cy="3564360"/>
           </a:xfrm>
           <a:prstGeom prst="rect">
             <a:avLst/>
@@ -14534,7 +14945,7 @@
         <p:spPr>
           <a:xfrm>
             <a:off x="457200" y="2286000"/>
-            <a:ext cx="3565800" cy="594000"/>
+            <a:ext cx="3564360" cy="592560"/>
           </a:xfrm>
           <a:prstGeom prst="rect">
             <a:avLst/>
@@ -14591,7 +15002,7 @@
         <p:spPr>
           <a:xfrm>
             <a:off x="731520" y="2971800"/>
-            <a:ext cx="3017160" cy="36360"/>
+            <a:ext cx="3015720" cy="34920"/>
           </a:xfrm>
           <a:prstGeom prst="rect">
             <a:avLst/>
@@ -14652,7 +15063,7 @@
         <p:spPr>
           <a:xfrm>
             <a:off x="731520" y="3090600"/>
-            <a:ext cx="3017160" cy="438480"/>
+            <a:ext cx="3015720" cy="437040"/>
           </a:xfrm>
           <a:prstGeom prst="rect">
             <a:avLst/>
@@ -14709,7 +15120,7 @@
         <p:spPr>
           <a:xfrm>
             <a:off x="731520" y="3566160"/>
-            <a:ext cx="3017160" cy="438480"/>
+            <a:ext cx="3015720" cy="437040"/>
           </a:xfrm>
           <a:prstGeom prst="rect">
             <a:avLst/>
@@ -14766,7 +15177,7 @@
         <p:spPr>
           <a:xfrm>
             <a:off x="731520" y="4041720"/>
-            <a:ext cx="3017160" cy="438480"/>
+            <a:ext cx="3015720" cy="437040"/>
           </a:xfrm>
           <a:prstGeom prst="rect">
             <a:avLst/>
@@ -14823,7 +15234,7 @@
         <p:spPr>
           <a:xfrm>
             <a:off x="731520" y="4517280"/>
-            <a:ext cx="3017160" cy="438480"/>
+            <a:ext cx="3015720" cy="437040"/>
           </a:xfrm>
           <a:prstGeom prst="rect">
             <a:avLst/>
@@ -14880,7 +15291,7 @@
         <p:spPr>
           <a:xfrm>
             <a:off x="731520" y="4992480"/>
-            <a:ext cx="3017160" cy="438480"/>
+            <a:ext cx="3015720" cy="437040"/>
           </a:xfrm>
           <a:prstGeom prst="rect">
             <a:avLst/>
@@ -14937,7 +15348,7 @@
         <p:spPr>
           <a:xfrm>
             <a:off x="4297680" y="2194560"/>
-            <a:ext cx="3565800" cy="3565800"/>
+            <a:ext cx="3564360" cy="3564360"/>
           </a:xfrm>
           <a:prstGeom prst="rect">
             <a:avLst/>
@@ -15001,7 +15412,7 @@
         <p:spPr>
           <a:xfrm>
             <a:off x="4297680" y="2286000"/>
-            <a:ext cx="3565800" cy="594000"/>
+            <a:ext cx="3564360" cy="592560"/>
           </a:xfrm>
           <a:prstGeom prst="rect">
             <a:avLst/>
@@ -15058,7 +15469,7 @@
         <p:spPr>
           <a:xfrm>
             <a:off x="4572000" y="2971800"/>
-            <a:ext cx="3017160" cy="36360"/>
+            <a:ext cx="3015720" cy="34920"/>
           </a:xfrm>
           <a:prstGeom prst="rect">
             <a:avLst/>
@@ -15119,7 +15530,7 @@
         <p:spPr>
           <a:xfrm>
             <a:off x="4572000" y="3090600"/>
-            <a:ext cx="3017160" cy="438480"/>
+            <a:ext cx="3015720" cy="437040"/>
           </a:xfrm>
           <a:prstGeom prst="rect">
             <a:avLst/>
@@ -15176,7 +15587,7 @@
         <p:spPr>
           <a:xfrm>
             <a:off x="4572000" y="3566160"/>
-            <a:ext cx="3017160" cy="438480"/>
+            <a:ext cx="3015720" cy="437040"/>
           </a:xfrm>
           <a:prstGeom prst="rect">
             <a:avLst/>
@@ -15233,7 +15644,7 @@
         <p:spPr>
           <a:xfrm>
             <a:off x="4572000" y="4041720"/>
-            <a:ext cx="3017160" cy="438480"/>
+            <a:ext cx="3015720" cy="437040"/>
           </a:xfrm>
           <a:prstGeom prst="rect">
             <a:avLst/>
@@ -15290,7 +15701,7 @@
         <p:spPr>
           <a:xfrm>
             <a:off x="4572000" y="4517280"/>
-            <a:ext cx="3017160" cy="438480"/>
+            <a:ext cx="3015720" cy="437040"/>
           </a:xfrm>
           <a:prstGeom prst="rect">
             <a:avLst/>
@@ -15347,7 +15758,7 @@
         <p:spPr>
           <a:xfrm>
             <a:off x="8138160" y="2194560"/>
-            <a:ext cx="3565800" cy="3565800"/>
+            <a:ext cx="3564360" cy="3564360"/>
           </a:xfrm>
           <a:prstGeom prst="rect">
             <a:avLst/>
@@ -15411,7 +15822,7 @@
         <p:spPr>
           <a:xfrm>
             <a:off x="8138160" y="2286000"/>
-            <a:ext cx="3565800" cy="594000"/>
+            <a:ext cx="3564360" cy="592560"/>
           </a:xfrm>
           <a:prstGeom prst="rect">
             <a:avLst/>
@@ -15468,7 +15879,7 @@
         <p:spPr>
           <a:xfrm>
             <a:off x="8412480" y="2971800"/>
-            <a:ext cx="3017160" cy="36360"/>
+            <a:ext cx="3015720" cy="34920"/>
           </a:xfrm>
           <a:prstGeom prst="rect">
             <a:avLst/>
@@ -15529,7 +15940,7 @@
         <p:spPr>
           <a:xfrm>
             <a:off x="8412480" y="3090600"/>
-            <a:ext cx="3017160" cy="438480"/>
+            <a:ext cx="3015720" cy="437040"/>
           </a:xfrm>
           <a:prstGeom prst="rect">
             <a:avLst/>
@@ -15586,7 +15997,7 @@
         <p:spPr>
           <a:xfrm>
             <a:off x="8412480" y="3566160"/>
-            <a:ext cx="3017160" cy="438480"/>
+            <a:ext cx="3015720" cy="437040"/>
           </a:xfrm>
           <a:prstGeom prst="rect">
             <a:avLst/>
@@ -15643,7 +16054,7 @@
         <p:spPr>
           <a:xfrm>
             <a:off x="8412480" y="4041720"/>
-            <a:ext cx="3017160" cy="438480"/>
+            <a:ext cx="3015720" cy="437040"/>
           </a:xfrm>
           <a:prstGeom prst="rect">
             <a:avLst/>
@@ -15700,7 +16111,7 @@
         <p:spPr>
           <a:xfrm>
             <a:off x="8412480" y="4517280"/>
-            <a:ext cx="3017160" cy="438480"/>
+            <a:ext cx="3015720" cy="437040"/>
           </a:xfrm>
           <a:prstGeom prst="rect">
             <a:avLst/>
@@ -15757,7 +16168,7 @@
         <p:spPr>
           <a:xfrm>
             <a:off x="8412480" y="4992480"/>
-            <a:ext cx="3017160" cy="438480"/>
+            <a:ext cx="3015720" cy="437040"/>
           </a:xfrm>
           <a:prstGeom prst="rect">
             <a:avLst/>
@@ -15814,7 +16225,7 @@
         <p:spPr>
           <a:xfrm>
             <a:off x="457200" y="5897880"/>
-            <a:ext cx="11246760" cy="456840"/>
+            <a:ext cx="11245320" cy="455400"/>
           </a:xfrm>
           <a:prstGeom prst="rect">
             <a:avLst/>
@@ -15908,7 +16319,7 @@
         <p:spPr>
           <a:xfrm>
             <a:off x="0" y="0"/>
-            <a:ext cx="12188520" cy="91080"/>
+            <a:ext cx="12187080" cy="89640"/>
           </a:xfrm>
           <a:prstGeom prst="rect">
             <a:avLst/>
@@ -15969,7 +16380,7 @@
         <p:spPr>
           <a:xfrm>
             <a:off x="0" y="6766560"/>
-            <a:ext cx="12188520" cy="91080"/>
+            <a:ext cx="12187080" cy="89640"/>
           </a:xfrm>
           <a:prstGeom prst="rect">
             <a:avLst/>
@@ -16030,7 +16441,7 @@
         <p:spPr>
           <a:xfrm>
             <a:off x="457200" y="137160"/>
-            <a:ext cx="11274120" cy="658080"/>
+            <a:ext cx="11272680" cy="656640"/>
           </a:xfrm>
           <a:prstGeom prst="rect">
             <a:avLst/>
@@ -16087,7 +16498,7 @@
         <p:spPr>
           <a:xfrm>
             <a:off x="457200" y="868680"/>
-            <a:ext cx="11274120" cy="36360"/>
+            <a:ext cx="11272680" cy="34920"/>
           </a:xfrm>
           <a:prstGeom prst="rect">
             <a:avLst/>
@@ -16148,7 +16559,7 @@
         <p:spPr>
           <a:xfrm>
             <a:off x="457200" y="1005840"/>
-            <a:ext cx="11246760" cy="411120"/>
+            <a:ext cx="11245320" cy="409680"/>
           </a:xfrm>
           <a:prstGeom prst="rect">
             <a:avLst/>
@@ -16205,7 +16616,7 @@
         <p:spPr>
           <a:xfrm>
             <a:off x="457200" y="1554480"/>
-            <a:ext cx="5486040" cy="5028840"/>
+            <a:ext cx="5484600" cy="5027400"/>
           </a:xfrm>
           <a:prstGeom prst="rect">
             <a:avLst/>
@@ -16269,7 +16680,7 @@
         <p:spPr>
           <a:xfrm>
             <a:off x="594360" y="1645920"/>
-            <a:ext cx="5211720" cy="502560"/>
+            <a:ext cx="5210280" cy="501120"/>
           </a:xfrm>
           <a:prstGeom prst="rect">
             <a:avLst/>
@@ -16326,7 +16737,7 @@
         <p:spPr>
           <a:xfrm>
             <a:off x="594360" y="2240280"/>
-            <a:ext cx="5211720" cy="27000"/>
+            <a:ext cx="5210280" cy="25560"/>
           </a:xfrm>
           <a:prstGeom prst="rect">
             <a:avLst/>
@@ -16387,7 +16798,7 @@
         <p:spPr>
           <a:xfrm>
             <a:off x="640080" y="2377440"/>
-            <a:ext cx="5120280" cy="4571640"/>
+            <a:ext cx="5118840" cy="4570200"/>
           </a:xfrm>
           <a:prstGeom prst="rect">
             <a:avLst/>
@@ -16675,7 +17086,7 @@
         <p:spPr>
           <a:xfrm>
             <a:off x="6263640" y="1554480"/>
-            <a:ext cx="5486040" cy="5028840"/>
+            <a:ext cx="5484600" cy="5027400"/>
           </a:xfrm>
           <a:prstGeom prst="rect">
             <a:avLst/>
@@ -16739,7 +17150,7 @@
         <p:spPr>
           <a:xfrm>
             <a:off x="6400800" y="1645920"/>
-            <a:ext cx="5211720" cy="502560"/>
+            <a:ext cx="5210280" cy="501120"/>
           </a:xfrm>
           <a:prstGeom prst="rect">
             <a:avLst/>
@@ -16796,7 +17207,7 @@
         <p:spPr>
           <a:xfrm>
             <a:off x="6400800" y="2240280"/>
-            <a:ext cx="5211720" cy="27000"/>
+            <a:ext cx="5210280" cy="25560"/>
           </a:xfrm>
           <a:prstGeom prst="rect">
             <a:avLst/>
@@ -16857,7 +17268,7 @@
         <p:spPr>
           <a:xfrm>
             <a:off x="6400800" y="2377440"/>
-            <a:ext cx="5211720" cy="4571640"/>
+            <a:ext cx="5210280" cy="4570200"/>
           </a:xfrm>
           <a:prstGeom prst="rect">
             <a:avLst/>
@@ -17164,7 +17575,7 @@
         <p:spPr>
           <a:xfrm>
             <a:off x="0" y="0"/>
-            <a:ext cx="12188520" cy="91080"/>
+            <a:ext cx="12187080" cy="89640"/>
           </a:xfrm>
           <a:prstGeom prst="rect">
             <a:avLst/>
@@ -17225,7 +17636,7 @@
         <p:spPr>
           <a:xfrm>
             <a:off x="0" y="6766560"/>
-            <a:ext cx="12188520" cy="91080"/>
+            <a:ext cx="12187080" cy="89640"/>
           </a:xfrm>
           <a:prstGeom prst="rect">
             <a:avLst/>
@@ -17286,7 +17697,7 @@
         <p:spPr>
           <a:xfrm>
             <a:off x="457200" y="137160"/>
-            <a:ext cx="11274120" cy="658080"/>
+            <a:ext cx="11272680" cy="656640"/>
           </a:xfrm>
           <a:prstGeom prst="rect">
             <a:avLst/>
@@ -17343,7 +17754,7 @@
         <p:spPr>
           <a:xfrm>
             <a:off x="457200" y="868680"/>
-            <a:ext cx="11274120" cy="36360"/>
+            <a:ext cx="11272680" cy="34920"/>
           </a:xfrm>
           <a:prstGeom prst="rect">
             <a:avLst/>
@@ -17404,7 +17815,7 @@
         <p:spPr>
           <a:xfrm>
             <a:off x="365760" y="1051560"/>
-            <a:ext cx="5394600" cy="2422800"/>
+            <a:ext cx="5393160" cy="2421360"/>
           </a:xfrm>
           <a:prstGeom prst="rect">
             <a:avLst/>
@@ -17468,7 +17879,7 @@
         <p:spPr>
           <a:xfrm>
             <a:off x="502920" y="1143000"/>
-            <a:ext cx="5120280" cy="456840"/>
+            <a:ext cx="5118840" cy="455400"/>
           </a:xfrm>
           <a:prstGeom prst="rect">
             <a:avLst/>
@@ -17525,7 +17936,7 @@
         <p:spPr>
           <a:xfrm>
             <a:off x="502920" y="1645920"/>
-            <a:ext cx="5120280" cy="27000"/>
+            <a:ext cx="5118840" cy="25560"/>
           </a:xfrm>
           <a:prstGeom prst="rect">
             <a:avLst/>
@@ -17586,7 +17997,7 @@
         <p:spPr>
           <a:xfrm>
             <a:off x="502920" y="1783080"/>
-            <a:ext cx="5120280" cy="1554120"/>
+            <a:ext cx="5118840" cy="1552680"/>
           </a:xfrm>
           <a:prstGeom prst="rect">
             <a:avLst/>
@@ -17607,6 +18018,11 @@
             <a:spAutoFit/>
           </a:bodyPr>
           <a:p>
+            <a:pPr>
+              <a:lnSpc>
+                <a:spcPct val="100000"/>
+              </a:lnSpc>
+            </a:pPr>
             <a:r>
               <a:rPr b="0" lang="en-US" sz="1200" strike="noStrike" u="none">
                 <a:solidFill>
@@ -17628,6 +18044,11 @@
             </a:endParaRPr>
           </a:p>
           <a:p>
+            <a:pPr>
+              <a:lnSpc>
+                <a:spcPct val="100000"/>
+              </a:lnSpc>
+            </a:pPr>
             <a:endParaRPr b="0" lang="sv-SE" sz="1200" strike="noStrike" u="none">
               <a:solidFill>
                 <a:srgbClr val="000000"/>
@@ -17674,7 +18095,7 @@
         <p:spPr>
           <a:xfrm>
             <a:off x="6309360" y="1051560"/>
-            <a:ext cx="5394600" cy="2422800"/>
+            <a:ext cx="5393160" cy="2421360"/>
           </a:xfrm>
           <a:prstGeom prst="rect">
             <a:avLst/>
@@ -17738,7 +18159,7 @@
         <p:spPr>
           <a:xfrm>
             <a:off x="6446520" y="1143000"/>
-            <a:ext cx="5120280" cy="456840"/>
+            <a:ext cx="5118840" cy="455400"/>
           </a:xfrm>
           <a:prstGeom prst="rect">
             <a:avLst/>
@@ -17795,7 +18216,7 @@
         <p:spPr>
           <a:xfrm>
             <a:off x="6446520" y="1645920"/>
-            <a:ext cx="5120280" cy="27000"/>
+            <a:ext cx="5118840" cy="25560"/>
           </a:xfrm>
           <a:prstGeom prst="rect">
             <a:avLst/>
@@ -17856,7 +18277,7 @@
         <p:spPr>
           <a:xfrm>
             <a:off x="6446520" y="1783080"/>
-            <a:ext cx="5120280" cy="1554120"/>
+            <a:ext cx="5118840" cy="1552680"/>
           </a:xfrm>
           <a:prstGeom prst="rect">
             <a:avLst/>
@@ -17877,6 +18298,11 @@
             <a:spAutoFit/>
           </a:bodyPr>
           <a:p>
+            <a:pPr>
+              <a:lnSpc>
+                <a:spcPct val="100000"/>
+              </a:lnSpc>
+            </a:pPr>
             <a:r>
               <a:rPr b="0" lang="en-US" sz="1200" strike="noStrike" u="none">
                 <a:solidFill>
@@ -17898,6 +18324,11 @@
             </a:endParaRPr>
           </a:p>
           <a:p>
+            <a:pPr>
+              <a:lnSpc>
+                <a:spcPct val="100000"/>
+              </a:lnSpc>
+            </a:pPr>
             <a:endParaRPr b="0" lang="sv-SE" sz="1200" strike="noStrike" u="none">
               <a:solidFill>
                 <a:srgbClr val="000000"/>
@@ -17944,7 +18375,7 @@
         <p:spPr>
           <a:xfrm>
             <a:off x="365760" y="3657600"/>
-            <a:ext cx="5394600" cy="2422800"/>
+            <a:ext cx="5393160" cy="2421360"/>
           </a:xfrm>
           <a:prstGeom prst="rect">
             <a:avLst/>
@@ -18008,7 +18439,7 @@
         <p:spPr>
           <a:xfrm>
             <a:off x="502920" y="3749040"/>
-            <a:ext cx="5120280" cy="456840"/>
+            <a:ext cx="5118840" cy="455400"/>
           </a:xfrm>
           <a:prstGeom prst="rect">
             <a:avLst/>
@@ -18065,7 +18496,7 @@
         <p:spPr>
           <a:xfrm>
             <a:off x="502920" y="4251960"/>
-            <a:ext cx="5120280" cy="27000"/>
+            <a:ext cx="5118840" cy="25560"/>
           </a:xfrm>
           <a:prstGeom prst="rect">
             <a:avLst/>
@@ -18126,7 +18557,7 @@
         <p:spPr>
           <a:xfrm>
             <a:off x="502920" y="4389120"/>
-            <a:ext cx="5120280" cy="1554120"/>
+            <a:ext cx="5118840" cy="1187640"/>
           </a:xfrm>
           <a:prstGeom prst="rect">
             <a:avLst/>
@@ -18147,6 +18578,11 @@
             <a:spAutoFit/>
           </a:bodyPr>
           <a:p>
+            <a:pPr>
+              <a:lnSpc>
+                <a:spcPct val="100000"/>
+              </a:lnSpc>
+            </a:pPr>
             <a:r>
               <a:rPr b="0" lang="en-US" sz="1200" strike="noStrike" u="none">
                 <a:solidFill>
@@ -18168,6 +18604,11 @@
             </a:endParaRPr>
           </a:p>
           <a:p>
+            <a:pPr>
+              <a:lnSpc>
+                <a:spcPct val="100000"/>
+              </a:lnSpc>
+            </a:pPr>
             <a:endParaRPr b="0" lang="sv-SE" sz="1200" strike="noStrike" u="none">
               <a:solidFill>
                 <a:srgbClr val="000000"/>
@@ -18178,6 +18619,47 @@
             </a:endParaRPr>
           </a:p>
           <a:p>
+            <a:pPr>
+              <a:lnSpc>
+                <a:spcPct val="100000"/>
+              </a:lnSpc>
+            </a:pPr>
+            <a:r>
+              <a:rPr b="0" lang="en-US" sz="1200" strike="noStrike" u="none">
+                <a:solidFill>
+                  <a:srgbClr val="555555"/>
+                </a:solidFill>
+                <a:effectLst/>
+                <a:uFillTx/>
+                <a:latin typeface="Calibri"/>
+              </a:rPr>
+              <a:t>Lagras som noder och kanter</a:t>
+            </a:r>
+            <a:endParaRPr b="0" lang="sv-SE" sz="1200" strike="noStrike" u="none">
+              <a:solidFill>
+                <a:srgbClr val="000000"/>
+              </a:solidFill>
+              <a:effectLst/>
+              <a:uFillTx/>
+              <a:latin typeface="Arial"/>
+            </a:endParaRPr>
+          </a:p>
+          <a:p>
+            <a:pPr>
+              <a:lnSpc>
+                <a:spcPct val="100000"/>
+              </a:lnSpc>
+            </a:pPr>
+            <a:endParaRPr b="0" lang="sv-SE" sz="1200" strike="noStrike" u="none">
+              <a:solidFill>
+                <a:srgbClr val="000000"/>
+              </a:solidFill>
+              <a:effectLst/>
+              <a:uFillTx/>
+              <a:latin typeface="Arial"/>
+            </a:endParaRPr>
+          </a:p>
+          <a:p>
             <a:pPr defTabSz="457200">
               <a:lnSpc>
                 <a:spcPct val="100000"/>
@@ -18214,7 +18696,7 @@
         <p:spPr>
           <a:xfrm>
             <a:off x="6309360" y="3657600"/>
-            <a:ext cx="5394600" cy="2422800"/>
+            <a:ext cx="5393160" cy="2421360"/>
           </a:xfrm>
           <a:prstGeom prst="rect">
             <a:avLst/>
@@ -18278,7 +18760,7 @@
         <p:spPr>
           <a:xfrm>
             <a:off x="6446520" y="3749040"/>
-            <a:ext cx="5120280" cy="456840"/>
+            <a:ext cx="5118840" cy="455400"/>
           </a:xfrm>
           <a:prstGeom prst="rect">
             <a:avLst/>
@@ -18335,7 +18817,7 @@
         <p:spPr>
           <a:xfrm>
             <a:off x="6446520" y="4251960"/>
-            <a:ext cx="5120280" cy="27000"/>
+            <a:ext cx="5118840" cy="25560"/>
           </a:xfrm>
           <a:prstGeom prst="rect">
             <a:avLst/>
@@ -18396,7 +18878,7 @@
         <p:spPr>
           <a:xfrm>
             <a:off x="6446520" y="4389120"/>
-            <a:ext cx="5120280" cy="1554120"/>
+            <a:ext cx="5118840" cy="1552680"/>
           </a:xfrm>
           <a:prstGeom prst="rect">
             <a:avLst/>
@@ -18417,6 +18899,11 @@
             <a:spAutoFit/>
           </a:bodyPr>
           <a:p>
+            <a:pPr>
+              <a:lnSpc>
+                <a:spcPct val="100000"/>
+              </a:lnSpc>
+            </a:pPr>
             <a:r>
               <a:rPr b="0" lang="en-US" sz="1200" strike="noStrike" u="none">
                 <a:solidFill>
@@ -18438,6 +18925,11 @@
             </a:endParaRPr>
           </a:p>
           <a:p>
+            <a:pPr>
+              <a:lnSpc>
+                <a:spcPct val="100000"/>
+              </a:lnSpc>
+            </a:pPr>
             <a:endParaRPr b="0" lang="sv-SE" sz="1200" strike="noStrike" u="none">
               <a:solidFill>
                 <a:srgbClr val="000000"/>
@@ -18521,7 +19013,7 @@
         <p:spPr>
           <a:xfrm>
             <a:off x="0" y="0"/>
-            <a:ext cx="12188520" cy="91080"/>
+            <a:ext cx="12187080" cy="89640"/>
           </a:xfrm>
           <a:prstGeom prst="rect">
             <a:avLst/>
@@ -18582,7 +19074,7 @@
         <p:spPr>
           <a:xfrm>
             <a:off x="0" y="6766560"/>
-            <a:ext cx="12188520" cy="91080"/>
+            <a:ext cx="12187080" cy="89640"/>
           </a:xfrm>
           <a:prstGeom prst="rect">
             <a:avLst/>
@@ -18643,7 +19135,7 @@
         <p:spPr>
           <a:xfrm>
             <a:off x="457200" y="137160"/>
-            <a:ext cx="11274120" cy="658080"/>
+            <a:ext cx="11272680" cy="656640"/>
           </a:xfrm>
           <a:prstGeom prst="rect">
             <a:avLst/>
@@ -18700,7 +19192,7 @@
         <p:spPr>
           <a:xfrm>
             <a:off x="457200" y="868680"/>
-            <a:ext cx="11274120" cy="36360"/>
+            <a:ext cx="11272680" cy="34920"/>
           </a:xfrm>
           <a:prstGeom prst="rect">
             <a:avLst/>
@@ -18761,7 +19253,7 @@
         <p:spPr>
           <a:xfrm>
             <a:off x="457200" y="1005840"/>
-            <a:ext cx="11246760" cy="502560"/>
+            <a:ext cx="11245320" cy="501120"/>
           </a:xfrm>
           <a:prstGeom prst="rect">
             <a:avLst/>
@@ -18818,7 +19310,7 @@
         <p:spPr>
           <a:xfrm>
             <a:off x="457200" y="3863160"/>
-            <a:ext cx="7772040" cy="456840"/>
+            <a:ext cx="7770600" cy="455400"/>
           </a:xfrm>
           <a:prstGeom prst="rect">
             <a:avLst/>
@@ -18875,7 +19367,7 @@
         <p:spPr>
           <a:xfrm>
             <a:off x="8412480" y="1828800"/>
-            <a:ext cx="3565800" cy="4571640"/>
+            <a:ext cx="3564360" cy="4570200"/>
           </a:xfrm>
           <a:prstGeom prst="rect">
             <a:avLst/>
@@ -19127,7 +19619,7 @@
         <p:spPr>
           <a:xfrm>
             <a:off x="8412480" y="5029200"/>
-            <a:ext cx="3565800" cy="1508400"/>
+            <a:ext cx="3564360" cy="1506960"/>
           </a:xfrm>
           <a:prstGeom prst="rect">
             <a:avLst/>
@@ -19191,7 +19683,7 @@
         <p:spPr>
           <a:xfrm>
             <a:off x="8503920" y="5166360"/>
-            <a:ext cx="3382920" cy="1234080"/>
+            <a:ext cx="3381480" cy="1232640"/>
           </a:xfrm>
           <a:prstGeom prst="rect">
             <a:avLst/>
@@ -19251,8 +19743,8 @@
         </p:blipFill>
         <p:spPr>
           <a:xfrm>
-            <a:off x="720000" y="1800000"/>
-            <a:ext cx="6591600" cy="4372200"/>
+            <a:off x="1440000" y="1620000"/>
+            <a:ext cx="5758920" cy="4456800"/>
           </a:xfrm>
           <a:prstGeom prst="rect">
             <a:avLst/>
@@ -19309,7 +19801,7 @@
         <p:spPr>
           <a:xfrm>
             <a:off x="0" y="0"/>
-            <a:ext cx="12188520" cy="91080"/>
+            <a:ext cx="12187080" cy="89640"/>
           </a:xfrm>
           <a:prstGeom prst="rect">
             <a:avLst/>
@@ -19370,7 +19862,7 @@
         <p:spPr>
           <a:xfrm>
             <a:off x="0" y="6766560"/>
-            <a:ext cx="12188520" cy="91080"/>
+            <a:ext cx="12187080" cy="89640"/>
           </a:xfrm>
           <a:prstGeom prst="rect">
             <a:avLst/>
@@ -19431,7 +19923,7 @@
         <p:spPr>
           <a:xfrm>
             <a:off x="457200" y="137160"/>
-            <a:ext cx="11274120" cy="658080"/>
+            <a:ext cx="11272680" cy="485640"/>
           </a:xfrm>
           <a:prstGeom prst="rect">
             <a:avLst/>
@@ -19466,7 +19958,7 @@
                 <a:uFillTx/>
                 <a:latin typeface="Calibri"/>
               </a:rPr>
-              <a:t>Metod — Design Science Research</a:t>
+              <a:t>Metod</a:t>
             </a:r>
             <a:endParaRPr b="0" lang="sv-SE" sz="2600" strike="noStrike" u="none">
               <a:solidFill>
@@ -19488,7 +19980,7 @@
         <p:spPr>
           <a:xfrm>
             <a:off x="457200" y="868680"/>
-            <a:ext cx="11274120" cy="36360"/>
+            <a:ext cx="11272680" cy="34920"/>
           </a:xfrm>
           <a:prstGeom prst="rect">
             <a:avLst/>
@@ -19549,7 +20041,7 @@
         <p:spPr>
           <a:xfrm>
             <a:off x="457200" y="1005840"/>
-            <a:ext cx="11246760" cy="411120"/>
+            <a:ext cx="11245320" cy="409680"/>
           </a:xfrm>
           <a:prstGeom prst="rect">
             <a:avLst/>
@@ -19606,7 +20098,7 @@
         <p:spPr>
           <a:xfrm>
             <a:off x="365760" y="1600200"/>
-            <a:ext cx="2011320" cy="1005480"/>
+            <a:ext cx="2009880" cy="1004040"/>
           </a:xfrm>
           <a:prstGeom prst="rect">
             <a:avLst/>
@@ -19670,7 +20162,7 @@
         <p:spPr>
           <a:xfrm>
             <a:off x="411480" y="1691640"/>
-            <a:ext cx="1919880" cy="822600"/>
+            <a:ext cx="1918440" cy="821160"/>
           </a:xfrm>
           <a:prstGeom prst="rect">
             <a:avLst/>
@@ -19691,6 +20183,11 @@
             <a:spAutoFit/>
           </a:bodyPr>
           <a:p>
+            <a:pPr>
+              <a:lnSpc>
+                <a:spcPct val="100000"/>
+              </a:lnSpc>
+            </a:pPr>
             <a:r>
               <a:rPr b="1" lang="en-US" sz="1300" strike="noStrike" u="none">
                 <a:solidFill>
@@ -19748,7 +20245,7 @@
         <p:spPr>
           <a:xfrm>
             <a:off x="2423160" y="1828800"/>
-            <a:ext cx="319680" cy="639720"/>
+            <a:ext cx="318240" cy="638280"/>
           </a:xfrm>
           <a:prstGeom prst="rect">
             <a:avLst/>
@@ -19805,7 +20302,7 @@
         <p:spPr>
           <a:xfrm>
             <a:off x="2788920" y="1600200"/>
-            <a:ext cx="2011320" cy="1005480"/>
+            <a:ext cx="2009880" cy="1004040"/>
           </a:xfrm>
           <a:prstGeom prst="rect">
             <a:avLst/>
@@ -19869,7 +20366,7 @@
         <p:spPr>
           <a:xfrm>
             <a:off x="2834640" y="1691640"/>
-            <a:ext cx="1919880" cy="822600"/>
+            <a:ext cx="1918440" cy="821160"/>
           </a:xfrm>
           <a:prstGeom prst="rect">
             <a:avLst/>
@@ -19890,6 +20387,11 @@
             <a:spAutoFit/>
           </a:bodyPr>
           <a:p>
+            <a:pPr>
+              <a:lnSpc>
+                <a:spcPct val="100000"/>
+              </a:lnSpc>
+            </a:pPr>
             <a:r>
               <a:rPr b="1" lang="en-US" sz="1300" strike="noStrike" u="none">
                 <a:solidFill>
@@ -19947,7 +20449,7 @@
         <p:spPr>
           <a:xfrm>
             <a:off x="4846320" y="1828800"/>
-            <a:ext cx="319680" cy="639720"/>
+            <a:ext cx="318240" cy="638280"/>
           </a:xfrm>
           <a:prstGeom prst="rect">
             <a:avLst/>
@@ -20004,7 +20506,7 @@
         <p:spPr>
           <a:xfrm>
             <a:off x="5212080" y="1600200"/>
-            <a:ext cx="2011320" cy="1005480"/>
+            <a:ext cx="2009880" cy="1004040"/>
           </a:xfrm>
           <a:prstGeom prst="rect">
             <a:avLst/>
@@ -20068,7 +20570,7 @@
         <p:spPr>
           <a:xfrm>
             <a:off x="5257800" y="1691640"/>
-            <a:ext cx="1919880" cy="822600"/>
+            <a:ext cx="1918440" cy="883080"/>
           </a:xfrm>
           <a:prstGeom prst="rect">
             <a:avLst/>
@@ -20089,6 +20591,11 @@
             <a:spAutoFit/>
           </a:bodyPr>
           <a:p>
+            <a:pPr>
+              <a:lnSpc>
+                <a:spcPct val="100000"/>
+              </a:lnSpc>
+            </a:pPr>
             <a:r>
               <a:rPr b="1" lang="en-US" sz="1300" strike="noStrike" u="none">
                 <a:solidFill>
@@ -20124,7 +20631,7 @@
                 <a:uFillTx/>
                 <a:latin typeface="Calibri"/>
               </a:rPr>
-              <a:t>15 testfrågor</a:t>
+              <a:t>15 testfrågor och</a:t>
             </a:r>
             <a:endParaRPr b="0" lang="sv-SE" sz="1300" strike="noStrike" u="none">
               <a:solidFill>
@@ -20135,6 +20642,32 @@
               <a:latin typeface="Arial"/>
             </a:endParaRPr>
           </a:p>
+          <a:p>
+            <a:pPr algn="ctr" defTabSz="457200">
+              <a:lnSpc>
+                <a:spcPct val="100000"/>
+              </a:lnSpc>
+            </a:pPr>
+            <a:r>
+              <a:rPr b="1" lang="en-US" sz="1300" strike="noStrike" u="none">
+                <a:solidFill>
+                  <a:srgbClr val="1a1a1a"/>
+                </a:solidFill>
+                <a:effectLst/>
+                <a:uFillTx/>
+                <a:latin typeface="Calibri"/>
+              </a:rPr>
+              <a:t>mät tid,anrop och korrekthet</a:t>
+            </a:r>
+            <a:endParaRPr b="0" lang="sv-SE" sz="1300" strike="noStrike" u="none">
+              <a:solidFill>
+                <a:srgbClr val="000000"/>
+              </a:solidFill>
+              <a:effectLst/>
+              <a:uFillTx/>
+              <a:latin typeface="Arial"/>
+            </a:endParaRPr>
+          </a:p>
         </p:txBody>
       </p:sp>
       <p:sp>
@@ -20146,7 +20679,7 @@
         <p:spPr>
           <a:xfrm>
             <a:off x="7269480" y="1828800"/>
-            <a:ext cx="319680" cy="639720"/>
+            <a:ext cx="318240" cy="638280"/>
           </a:xfrm>
           <a:prstGeom prst="rect">
             <a:avLst/>
@@ -20203,7 +20736,7 @@
         <p:spPr>
           <a:xfrm>
             <a:off x="7635240" y="1600200"/>
-            <a:ext cx="2011320" cy="1005480"/>
+            <a:ext cx="2009880" cy="1004040"/>
           </a:xfrm>
           <a:prstGeom prst="rect">
             <a:avLst/>
@@ -20267,7 +20800,7 @@
         <p:spPr>
           <a:xfrm>
             <a:off x="7680960" y="1691640"/>
-            <a:ext cx="1919880" cy="822600"/>
+            <a:ext cx="1918440" cy="821160"/>
           </a:xfrm>
           <a:prstGeom prst="rect">
             <a:avLst/>
@@ -20288,6 +20821,11 @@
             <a:spAutoFit/>
           </a:bodyPr>
           <a:p>
+            <a:pPr>
+              <a:lnSpc>
+                <a:spcPct val="100000"/>
+              </a:lnSpc>
+            </a:pPr>
             <a:r>
               <a:rPr b="1" lang="en-US" sz="1300" strike="noStrike" u="none">
                 <a:solidFill>
@@ -20345,7 +20883,7 @@
         <p:spPr>
           <a:xfrm>
             <a:off x="365760" y="2926080"/>
-            <a:ext cx="3702960" cy="3702960"/>
+            <a:ext cx="3701520" cy="3701520"/>
           </a:xfrm>
           <a:prstGeom prst="rect">
             <a:avLst/>
@@ -20409,7 +20947,7 @@
         <p:spPr>
           <a:xfrm>
             <a:off x="457200" y="2999160"/>
-            <a:ext cx="3520080" cy="502560"/>
+            <a:ext cx="3518640" cy="501120"/>
           </a:xfrm>
           <a:prstGeom prst="rect">
             <a:avLst/>
@@ -20466,7 +21004,7 @@
         <p:spPr>
           <a:xfrm>
             <a:off x="548640" y="3547800"/>
-            <a:ext cx="3337200" cy="27000"/>
+            <a:ext cx="3335760" cy="25560"/>
           </a:xfrm>
           <a:prstGeom prst="rect">
             <a:avLst/>
@@ -20527,7 +21065,7 @@
         <p:spPr>
           <a:xfrm>
             <a:off x="502920" y="3639240"/>
-            <a:ext cx="3474360" cy="529920"/>
+            <a:ext cx="3472920" cy="528480"/>
           </a:xfrm>
           <a:prstGeom prst="rect">
             <a:avLst/>
@@ -20584,7 +21122,7 @@
         <p:spPr>
           <a:xfrm>
             <a:off x="502920" y="4206240"/>
-            <a:ext cx="3474360" cy="529920"/>
+            <a:ext cx="3472920" cy="528480"/>
           </a:xfrm>
           <a:prstGeom prst="rect">
             <a:avLst/>
@@ -20641,7 +21179,7 @@
         <p:spPr>
           <a:xfrm>
             <a:off x="502920" y="4773240"/>
-            <a:ext cx="3474360" cy="529920"/>
+            <a:ext cx="3472920" cy="528480"/>
           </a:xfrm>
           <a:prstGeom prst="rect">
             <a:avLst/>
@@ -20698,7 +21236,7 @@
         <p:spPr>
           <a:xfrm>
             <a:off x="502920" y="5340240"/>
-            <a:ext cx="3474360" cy="529920"/>
+            <a:ext cx="3472920" cy="528480"/>
           </a:xfrm>
           <a:prstGeom prst="rect">
             <a:avLst/>
@@ -20755,7 +21293,7 @@
         <p:spPr>
           <a:xfrm>
             <a:off x="502920" y="5906880"/>
-            <a:ext cx="3474360" cy="529920"/>
+            <a:ext cx="3472920" cy="528480"/>
           </a:xfrm>
           <a:prstGeom prst="rect">
             <a:avLst/>
@@ -20812,7 +21350,7 @@
         <p:spPr>
           <a:xfrm>
             <a:off x="4251960" y="2926080"/>
-            <a:ext cx="3702960" cy="3702960"/>
+            <a:ext cx="3701520" cy="3701520"/>
           </a:xfrm>
           <a:prstGeom prst="rect">
             <a:avLst/>
@@ -20876,7 +21414,7 @@
         <p:spPr>
           <a:xfrm>
             <a:off x="4343400" y="2999160"/>
-            <a:ext cx="3520080" cy="502560"/>
+            <a:ext cx="3518640" cy="501120"/>
           </a:xfrm>
           <a:prstGeom prst="rect">
             <a:avLst/>
@@ -20933,7 +21471,7 @@
         <p:spPr>
           <a:xfrm>
             <a:off x="4434840" y="3547800"/>
-            <a:ext cx="3337200" cy="27000"/>
+            <a:ext cx="3335760" cy="25560"/>
           </a:xfrm>
           <a:prstGeom prst="rect">
             <a:avLst/>
@@ -20994,7 +21532,7 @@
         <p:spPr>
           <a:xfrm>
             <a:off x="4389120" y="3639240"/>
-            <a:ext cx="3474360" cy="529920"/>
+            <a:ext cx="3472920" cy="528480"/>
           </a:xfrm>
           <a:prstGeom prst="rect">
             <a:avLst/>
@@ -21051,7 +21589,7 @@
         <p:spPr>
           <a:xfrm>
             <a:off x="4389120" y="4206240"/>
-            <a:ext cx="3474360" cy="529920"/>
+            <a:ext cx="3472920" cy="528480"/>
           </a:xfrm>
           <a:prstGeom prst="rect">
             <a:avLst/>
@@ -21072,6 +21610,11 @@
             <a:spAutoFit/>
           </a:bodyPr>
           <a:p>
+            <a:pPr>
+              <a:lnSpc>
+                <a:spcPct val="100000"/>
+              </a:lnSpc>
+            </a:pPr>
             <a:r>
               <a:rPr b="0" lang="en-US" sz="1000" strike="noStrike" u="none">
                 <a:solidFill>
@@ -21129,7 +21672,7 @@
         <p:spPr>
           <a:xfrm>
             <a:off x="4389120" y="4773240"/>
-            <a:ext cx="3474360" cy="529920"/>
+            <a:ext cx="3472920" cy="528480"/>
           </a:xfrm>
           <a:prstGeom prst="rect">
             <a:avLst/>
@@ -21150,6 +21693,11 @@
             <a:spAutoFit/>
           </a:bodyPr>
           <a:p>
+            <a:pPr>
+              <a:lnSpc>
+                <a:spcPct val="100000"/>
+              </a:lnSpc>
+            </a:pPr>
             <a:r>
               <a:rPr b="0" lang="en-US" sz="1000" strike="noStrike" u="none">
                 <a:solidFill>
@@ -21207,7 +21755,7 @@
         <p:spPr>
           <a:xfrm>
             <a:off x="4389120" y="5340240"/>
-            <a:ext cx="3474360" cy="529920"/>
+            <a:ext cx="3472920" cy="528480"/>
           </a:xfrm>
           <a:prstGeom prst="rect">
             <a:avLst/>
@@ -21264,7 +21812,7 @@
         <p:spPr>
           <a:xfrm>
             <a:off x="4389120" y="5906880"/>
-            <a:ext cx="3474360" cy="529920"/>
+            <a:ext cx="3472920" cy="394920"/>
           </a:xfrm>
           <a:prstGeom prst="rect">
             <a:avLst/>
@@ -21285,6 +21833,11 @@
             <a:spAutoFit/>
           </a:bodyPr>
           <a:p>
+            <a:pPr>
+              <a:lnSpc>
+                <a:spcPct val="100000"/>
+              </a:lnSpc>
+            </a:pPr>
             <a:r>
               <a:rPr b="0" lang="en-US" sz="1000" strike="noStrike" u="none">
                 <a:solidFill>
@@ -21294,7 +21847,7 @@
                 <a:uFillTx/>
                 <a:latin typeface="Calibri"/>
               </a:rPr>
-              <a:t>Q10: Which Confluence docs are about AWS?</a:t>
+              <a:t>Q10: Which Confluence docs is about AWS?</a:t>
             </a:r>
             <a:endParaRPr b="0" lang="sv-SE" sz="1000" strike="noStrike" u="none">
               <a:solidFill>
@@ -21342,7 +21895,7 @@
         <p:spPr>
           <a:xfrm>
             <a:off x="8138160" y="2926080"/>
-            <a:ext cx="3702960" cy="3702960"/>
+            <a:ext cx="3701520" cy="3701520"/>
           </a:xfrm>
           <a:prstGeom prst="rect">
             <a:avLst/>
@@ -21406,7 +21959,7 @@
         <p:spPr>
           <a:xfrm>
             <a:off x="8229600" y="2999160"/>
-            <a:ext cx="3520080" cy="502560"/>
+            <a:ext cx="3518640" cy="501120"/>
           </a:xfrm>
           <a:prstGeom prst="rect">
             <a:avLst/>
@@ -21463,7 +22016,7 @@
         <p:spPr>
           <a:xfrm>
             <a:off x="8321040" y="3547800"/>
-            <a:ext cx="3337200" cy="27000"/>
+            <a:ext cx="3335760" cy="25560"/>
           </a:xfrm>
           <a:prstGeom prst="rect">
             <a:avLst/>
@@ -21524,7 +22077,7 @@
         <p:spPr>
           <a:xfrm>
             <a:off x="8275320" y="3639240"/>
-            <a:ext cx="3474360" cy="529920"/>
+            <a:ext cx="3472920" cy="528480"/>
           </a:xfrm>
           <a:prstGeom prst="rect">
             <a:avLst/>
@@ -21545,6 +22098,11 @@
             <a:spAutoFit/>
           </a:bodyPr>
           <a:p>
+            <a:pPr>
+              <a:lnSpc>
+                <a:spcPct val="100000"/>
+              </a:lnSpc>
+            </a:pPr>
             <a:r>
               <a:rPr b="0" lang="en-US" sz="1000" strike="noStrike" u="none">
                 <a:solidFill>
@@ -21602,7 +22160,7 @@
         <p:spPr>
           <a:xfrm>
             <a:off x="8275320" y="4206240"/>
-            <a:ext cx="3474360" cy="529920"/>
+            <a:ext cx="3472920" cy="528480"/>
           </a:xfrm>
           <a:prstGeom prst="rect">
             <a:avLst/>
@@ -21623,6 +22181,11 @@
             <a:spAutoFit/>
           </a:bodyPr>
           <a:p>
+            <a:pPr>
+              <a:lnSpc>
+                <a:spcPct val="100000"/>
+              </a:lnSpc>
+            </a:pPr>
             <a:r>
               <a:rPr b="0" lang="en-US" sz="1000" strike="noStrike" u="none">
                 <a:solidFill>
@@ -21680,7 +22243,7 @@
         <p:spPr>
           <a:xfrm>
             <a:off x="8275320" y="4773240"/>
-            <a:ext cx="3474360" cy="529920"/>
+            <a:ext cx="3472920" cy="528480"/>
           </a:xfrm>
           <a:prstGeom prst="rect">
             <a:avLst/>
@@ -21701,6 +22264,11 @@
             <a:spAutoFit/>
           </a:bodyPr>
           <a:p>
+            <a:pPr>
+              <a:lnSpc>
+                <a:spcPct val="100000"/>
+              </a:lnSpc>
+            </a:pPr>
             <a:r>
               <a:rPr b="0" lang="en-US" sz="1000" strike="noStrike" u="none">
                 <a:solidFill>
@@ -21758,7 +22326,7 @@
         <p:spPr>
           <a:xfrm>
             <a:off x="8275320" y="5340240"/>
-            <a:ext cx="3474360" cy="529920"/>
+            <a:ext cx="3472920" cy="528480"/>
           </a:xfrm>
           <a:prstGeom prst="rect">
             <a:avLst/>
@@ -21779,6 +22347,11 @@
             <a:spAutoFit/>
           </a:bodyPr>
           <a:p>
+            <a:pPr>
+              <a:lnSpc>
+                <a:spcPct val="100000"/>
+              </a:lnSpc>
+            </a:pPr>
             <a:r>
               <a:rPr b="0" lang="en-US" sz="1000" strike="noStrike" u="none">
                 <a:solidFill>
@@ -21836,7 +22409,7 @@
         <p:spPr>
           <a:xfrm>
             <a:off x="8275320" y="5906880"/>
-            <a:ext cx="3474360" cy="529920"/>
+            <a:ext cx="3472920" cy="528480"/>
           </a:xfrm>
           <a:prstGeom prst="rect">
             <a:avLst/>
@@ -21857,6 +22430,11 @@
             <a:spAutoFit/>
           </a:bodyPr>
           <a:p>
+            <a:pPr>
+              <a:lnSpc>
+                <a:spcPct val="100000"/>
+              </a:lnSpc>
+            </a:pPr>
             <a:r>
               <a:rPr b="0" lang="en-US" sz="1000" strike="noStrike" u="none">
                 <a:solidFill>
@@ -21951,7 +22529,7 @@
         <p:spPr>
           <a:xfrm>
             <a:off x="0" y="0"/>
-            <a:ext cx="12188520" cy="91080"/>
+            <a:ext cx="12187080" cy="89640"/>
           </a:xfrm>
           <a:prstGeom prst="rect">
             <a:avLst/>
@@ -22012,7 +22590,7 @@
         <p:spPr>
           <a:xfrm>
             <a:off x="0" y="6766560"/>
-            <a:ext cx="12188520" cy="91080"/>
+            <a:ext cx="12187080" cy="89640"/>
           </a:xfrm>
           <a:prstGeom prst="rect">
             <a:avLst/>
@@ -22073,7 +22651,7 @@
         <p:spPr>
           <a:xfrm>
             <a:off x="457200" y="137160"/>
-            <a:ext cx="11274120" cy="658080"/>
+            <a:ext cx="11272680" cy="656640"/>
           </a:xfrm>
           <a:prstGeom prst="rect">
             <a:avLst/>
@@ -22130,7 +22708,7 @@
         <p:spPr>
           <a:xfrm>
             <a:off x="457200" y="868680"/>
-            <a:ext cx="11274120" cy="36360"/>
+            <a:ext cx="11272680" cy="34920"/>
           </a:xfrm>
           <a:prstGeom prst="rect">
             <a:avLst/>
@@ -22191,7 +22769,7 @@
         <p:spPr>
           <a:xfrm>
             <a:off x="365760" y="2926080"/>
-            <a:ext cx="11429640" cy="288720"/>
+            <a:ext cx="11428200" cy="287280"/>
           </a:xfrm>
           <a:prstGeom prst="rect">
             <a:avLst/>
@@ -22237,7 +22815,7 @@
         <p:spPr>
           <a:xfrm>
             <a:off x="365760" y="5394960"/>
-            <a:ext cx="11429640" cy="1142640"/>
+            <a:ext cx="11428200" cy="1141200"/>
           </a:xfrm>
           <a:prstGeom prst="rect">
             <a:avLst/>
@@ -22301,7 +22879,7 @@
         <p:spPr>
           <a:xfrm>
             <a:off x="502920" y="5532120"/>
-            <a:ext cx="11155320" cy="822600"/>
+            <a:ext cx="11153880" cy="821160"/>
           </a:xfrm>
           <a:prstGeom prst="rect">
             <a:avLst/>
@@ -22362,7 +22940,7 @@
         <p:spPr>
           <a:xfrm>
             <a:off x="2621160" y="1260000"/>
-            <a:ext cx="6018840" cy="3457800"/>
+            <a:ext cx="6017400" cy="3456360"/>
           </a:xfrm>
           <a:prstGeom prst="rect">
             <a:avLst/>
@@ -22419,7 +22997,7 @@
         <p:spPr>
           <a:xfrm>
             <a:off x="0" y="0"/>
-            <a:ext cx="12188520" cy="91080"/>
+            <a:ext cx="12187080" cy="89640"/>
           </a:xfrm>
           <a:prstGeom prst="rect">
             <a:avLst/>
@@ -22480,7 +23058,7 @@
         <p:spPr>
           <a:xfrm>
             <a:off x="0" y="6766560"/>
-            <a:ext cx="12188520" cy="91080"/>
+            <a:ext cx="12187080" cy="89640"/>
           </a:xfrm>
           <a:prstGeom prst="rect">
             <a:avLst/>
@@ -22541,7 +23119,7 @@
         <p:spPr>
           <a:xfrm>
             <a:off x="457200" y="137160"/>
-            <a:ext cx="11274120" cy="658080"/>
+            <a:ext cx="11272680" cy="656640"/>
           </a:xfrm>
           <a:prstGeom prst="rect">
             <a:avLst/>
@@ -22598,7 +23176,7 @@
         <p:spPr>
           <a:xfrm>
             <a:off x="457200" y="868680"/>
-            <a:ext cx="11274120" cy="36360"/>
+            <a:ext cx="11272680" cy="34920"/>
           </a:xfrm>
           <a:prstGeom prst="rect">
             <a:avLst/>
@@ -22659,7 +23237,7 @@
         <p:spPr>
           <a:xfrm>
             <a:off x="457200" y="1051560"/>
-            <a:ext cx="5486040" cy="5394600"/>
+            <a:ext cx="5484600" cy="5393160"/>
           </a:xfrm>
           <a:prstGeom prst="rect">
             <a:avLst/>
@@ -22723,7 +23301,7 @@
         <p:spPr>
           <a:xfrm>
             <a:off x="594360" y="1143000"/>
-            <a:ext cx="5211720" cy="456840"/>
+            <a:ext cx="5210280" cy="455400"/>
           </a:xfrm>
           <a:prstGeom prst="rect">
             <a:avLst/>
@@ -22780,7 +23358,7 @@
         <p:spPr>
           <a:xfrm>
             <a:off x="594360" y="1737360"/>
-            <a:ext cx="411120" cy="411120"/>
+            <a:ext cx="409680" cy="409680"/>
           </a:xfrm>
           <a:prstGeom prst="rect">
             <a:avLst/>
@@ -22841,7 +23419,7 @@
         <p:spPr>
           <a:xfrm>
             <a:off x="594360" y="1737360"/>
-            <a:ext cx="411120" cy="411120"/>
+            <a:ext cx="409680" cy="409680"/>
           </a:xfrm>
           <a:prstGeom prst="rect">
             <a:avLst/>
@@ -22898,7 +23476,7 @@
         <p:spPr>
           <a:xfrm>
             <a:off x="1097280" y="1737360"/>
-            <a:ext cx="4663080" cy="776880"/>
+            <a:ext cx="4661640" cy="775440"/>
           </a:xfrm>
           <a:prstGeom prst="rect">
             <a:avLst/>
@@ -22919,6 +23497,11 @@
             <a:spAutoFit/>
           </a:bodyPr>
           <a:p>
+            <a:pPr>
+              <a:lnSpc>
+                <a:spcPct val="100000"/>
+              </a:lnSpc>
+            </a:pPr>
             <a:r>
               <a:rPr b="0" lang="en-US" sz="1300" strike="noStrike" u="none">
                 <a:solidFill>
@@ -22976,7 +23559,7 @@
         <p:spPr>
           <a:xfrm>
             <a:off x="594360" y="2743200"/>
-            <a:ext cx="411120" cy="411120"/>
+            <a:ext cx="409680" cy="409680"/>
           </a:xfrm>
           <a:prstGeom prst="rect">
             <a:avLst/>
@@ -23037,7 +23620,7 @@
         <p:spPr>
           <a:xfrm>
             <a:off x="594360" y="2743200"/>
-            <a:ext cx="411120" cy="411120"/>
+            <a:ext cx="409680" cy="409680"/>
           </a:xfrm>
           <a:prstGeom prst="rect">
             <a:avLst/>
@@ -23094,7 +23677,7 @@
         <p:spPr>
           <a:xfrm>
             <a:off x="1097280" y="2743200"/>
-            <a:ext cx="4663080" cy="776880"/>
+            <a:ext cx="4661640" cy="487080"/>
           </a:xfrm>
           <a:prstGeom prst="rect">
             <a:avLst/>
@@ -23115,6 +23698,11 @@
             <a:spAutoFit/>
           </a:bodyPr>
           <a:p>
+            <a:pPr>
+              <a:lnSpc>
+                <a:spcPct val="100000"/>
+              </a:lnSpc>
+            </a:pPr>
             <a:r>
               <a:rPr b="0" lang="en-US" sz="1300" strike="noStrike" u="none">
                 <a:solidFill>
@@ -23150,7 +23738,7 @@
                 <a:uFillTx/>
                 <a:latin typeface="Calibri"/>
               </a:rPr>
-              <a:t>    baserat på schemat och frågan</a:t>
+              <a:t>    baserat på schemat, frågan och systemprompt</a:t>
             </a:r>
             <a:endParaRPr b="0" lang="sv-SE" sz="1300" strike="noStrike" u="none">
               <a:solidFill>
@@ -23172,7 +23760,7 @@
         <p:spPr>
           <a:xfrm>
             <a:off x="594360" y="3749040"/>
-            <a:ext cx="411120" cy="411120"/>
+            <a:ext cx="409680" cy="409680"/>
           </a:xfrm>
           <a:prstGeom prst="rect">
             <a:avLst/>
@@ -23233,7 +23821,7 @@
         <p:spPr>
           <a:xfrm>
             <a:off x="594360" y="3749040"/>
-            <a:ext cx="411120" cy="411120"/>
+            <a:ext cx="409680" cy="409680"/>
           </a:xfrm>
           <a:prstGeom prst="rect">
             <a:avLst/>
@@ -23290,7 +23878,7 @@
         <p:spPr>
           <a:xfrm>
             <a:off x="1097280" y="3749040"/>
-            <a:ext cx="4663080" cy="776880"/>
+            <a:ext cx="4661640" cy="775440"/>
           </a:xfrm>
           <a:prstGeom prst="rect">
             <a:avLst/>
@@ -23347,7 +23935,7 @@
         <p:spPr>
           <a:xfrm>
             <a:off x="594360" y="4754880"/>
-            <a:ext cx="411120" cy="411120"/>
+            <a:ext cx="409680" cy="409680"/>
           </a:xfrm>
           <a:prstGeom prst="rect">
             <a:avLst/>
@@ -23408,7 +23996,7 @@
         <p:spPr>
           <a:xfrm>
             <a:off x="594360" y="4754880"/>
-            <a:ext cx="411120" cy="411120"/>
+            <a:ext cx="409680" cy="409680"/>
           </a:xfrm>
           <a:prstGeom prst="rect">
             <a:avLst/>
@@ -23465,7 +24053,7 @@
         <p:spPr>
           <a:xfrm>
             <a:off x="1097280" y="4754880"/>
-            <a:ext cx="4663080" cy="776880"/>
+            <a:ext cx="4661640" cy="775440"/>
           </a:xfrm>
           <a:prstGeom prst="rect">
             <a:avLst/>
@@ -23522,7 +24110,7 @@
         <p:spPr>
           <a:xfrm>
             <a:off x="594360" y="5806440"/>
-            <a:ext cx="5211720" cy="502560"/>
+            <a:ext cx="5210280" cy="501120"/>
           </a:xfrm>
           <a:prstGeom prst="rect">
             <a:avLst/>
@@ -23586,7 +24174,7 @@
         <p:spPr>
           <a:xfrm>
             <a:off x="640080" y="5852160"/>
-            <a:ext cx="5120280" cy="411120"/>
+            <a:ext cx="5118840" cy="288000"/>
           </a:xfrm>
           <a:prstGeom prst="rect">
             <a:avLst/>
@@ -23643,7 +24231,7 @@
         <p:spPr>
           <a:xfrm>
             <a:off x="6217920" y="1051560"/>
-            <a:ext cx="5668920" cy="5394600"/>
+            <a:ext cx="5667480" cy="5393160"/>
           </a:xfrm>
           <a:prstGeom prst="rect">
             <a:avLst/>
@@ -23707,7 +24295,7 @@
         <p:spPr>
           <a:xfrm>
             <a:off x="6217920" y="3520440"/>
-            <a:ext cx="5668920" cy="456840"/>
+            <a:ext cx="5667480" cy="455400"/>
           </a:xfrm>
           <a:prstGeom prst="rect">
             <a:avLst/>
@@ -23728,6 +24316,11 @@
             <a:spAutoFit/>
           </a:bodyPr>
           <a:p>
+            <a:pPr>
+              <a:lnSpc>
+                <a:spcPct val="100000"/>
+              </a:lnSpc>
+            </a:pPr>
             <a:r>
               <a:rPr b="0" i="1" lang="en-US" sz="1300" strike="noStrike" u="none">
                 <a:solidFill>
@@ -23789,7 +24382,7 @@
         <p:spPr>
           <a:xfrm>
             <a:off x="6199920" y="1051560"/>
-            <a:ext cx="5680080" cy="5428440"/>
+            <a:ext cx="5678640" cy="5427000"/>
           </a:xfrm>
           <a:prstGeom prst="rect">
             <a:avLst/>
